--- a/tuesday/Code4Climate_Tuesday_AQImeaning.pptx
+++ b/tuesday/Code4Climate_Tuesday_AQImeaning.pptx
@@ -6,17 +6,20 @@
     <p:sldMasterId id="2147483648" r:id="rId5"/>
   </p:sldMasterIdLst>
   <p:notesMasterIdLst>
-    <p:notesMasterId r:id="rId14"/>
+    <p:notesMasterId r:id="rId17"/>
   </p:notesMasterIdLst>
   <p:sldIdLst>
-    <p:sldId id="298" r:id="rId6"/>
-    <p:sldId id="294" r:id="rId7"/>
-    <p:sldId id="281" r:id="rId8"/>
-    <p:sldId id="282" r:id="rId9"/>
-    <p:sldId id="296" r:id="rId10"/>
-    <p:sldId id="297" r:id="rId11"/>
-    <p:sldId id="293" r:id="rId12"/>
-    <p:sldId id="286" r:id="rId13"/>
+    <p:sldId id="300" r:id="rId6"/>
+    <p:sldId id="301" r:id="rId7"/>
+    <p:sldId id="302" r:id="rId8"/>
+    <p:sldId id="298" r:id="rId9"/>
+    <p:sldId id="294" r:id="rId10"/>
+    <p:sldId id="281" r:id="rId11"/>
+    <p:sldId id="282" r:id="rId12"/>
+    <p:sldId id="296" r:id="rId13"/>
+    <p:sldId id="297" r:id="rId14"/>
+    <p:sldId id="293" r:id="rId15"/>
+    <p:sldId id="286" r:id="rId16"/>
   </p:sldIdLst>
   <p:sldSz cx="12192000" cy="6858000"/>
   <p:notesSz cx="6858000" cy="9144000"/>
@@ -157,150 +160,24 @@
     </pc:docChg>
   </pc:docChgLst>
   <pc:docChgLst>
-    <pc:chgData name="Mukut, KM" userId="2fac2f92-416c-4e92-82ba-41ee479b5d48" providerId="ADAL" clId="{B4086C10-76DC-8C49-B312-2A3F37850741}"/>
-    <pc:docChg chg="undo custSel addSld delSld modSld">
-      <pc:chgData name="Mukut, KM" userId="2fac2f92-416c-4e92-82ba-41ee479b5d48" providerId="ADAL" clId="{B4086C10-76DC-8C49-B312-2A3F37850741}" dt="2023-07-23T22:11:03.939" v="407" actId="20577"/>
+    <pc:chgData name="Roy, Somesh" userId="1acabf4b-f33c-4133-9f27-9eb78ba0ac66" providerId="ADAL" clId="{1D6AC2EB-F712-4211-8004-4938C3240DC1}"/>
+    <pc:docChg chg="custSel modSld">
+      <pc:chgData name="Roy, Somesh" userId="1acabf4b-f33c-4133-9f27-9eb78ba0ac66" providerId="ADAL" clId="{1D6AC2EB-F712-4211-8004-4938C3240DC1}" dt="2023-07-24T22:17:12.865" v="4" actId="404"/>
       <pc:docMkLst>
         <pc:docMk/>
       </pc:docMkLst>
-      <pc:sldChg chg="addSp delSp modSp mod setBg setClrOvrMap">
-        <pc:chgData name="Mukut, KM" userId="2fac2f92-416c-4e92-82ba-41ee479b5d48" providerId="ADAL" clId="{B4086C10-76DC-8C49-B312-2A3F37850741}" dt="2023-07-23T22:08:26.259" v="361" actId="26606"/>
-        <pc:sldMkLst>
-          <pc:docMk/>
-          <pc:sldMk cId="4132216747" sldId="256"/>
-        </pc:sldMkLst>
-      </pc:sldChg>
-      <pc:sldChg chg="addSp delSp modSp mod setBg addAnim delAnim">
-        <pc:chgData name="Mukut, KM" userId="2fac2f92-416c-4e92-82ba-41ee479b5d48" providerId="ADAL" clId="{B4086C10-76DC-8C49-B312-2A3F37850741}" dt="2023-07-23T22:11:03.939" v="407" actId="20577"/>
-        <pc:sldMkLst>
-          <pc:docMk/>
-          <pc:sldMk cId="367211742" sldId="260"/>
-        </pc:sldMkLst>
-      </pc:sldChg>
-      <pc:sldChg chg="del">
-        <pc:chgData name="Mukut, KM" userId="2fac2f92-416c-4e92-82ba-41ee479b5d48" providerId="ADAL" clId="{B4086C10-76DC-8C49-B312-2A3F37850741}" dt="2023-07-23T21:23:28.506" v="27" actId="2696"/>
-        <pc:sldMkLst>
-          <pc:docMk/>
-          <pc:sldMk cId="3886847710" sldId="269"/>
-        </pc:sldMkLst>
-      </pc:sldChg>
-      <pc:sldChg chg="del">
-        <pc:chgData name="Mukut, KM" userId="2fac2f92-416c-4e92-82ba-41ee479b5d48" providerId="ADAL" clId="{B4086C10-76DC-8C49-B312-2A3F37850741}" dt="2023-07-23T21:58:02.263" v="330" actId="2696"/>
-        <pc:sldMkLst>
-          <pc:docMk/>
-          <pc:sldMk cId="3793004979" sldId="270"/>
-        </pc:sldMkLst>
-      </pc:sldChg>
-      <pc:sldChg chg="modSp mod">
-        <pc:chgData name="Mukut, KM" userId="2fac2f92-416c-4e92-82ba-41ee479b5d48" providerId="ADAL" clId="{B4086C10-76DC-8C49-B312-2A3F37850741}" dt="2023-07-23T21:44:40.269" v="71" actId="2711"/>
-        <pc:sldMkLst>
-          <pc:docMk/>
-          <pc:sldMk cId="697158601" sldId="272"/>
-        </pc:sldMkLst>
-      </pc:sldChg>
-      <pc:sldChg chg="modSp mod">
-        <pc:chgData name="Mukut, KM" userId="2fac2f92-416c-4e92-82ba-41ee479b5d48" providerId="ADAL" clId="{B4086C10-76DC-8C49-B312-2A3F37850741}" dt="2023-07-23T21:44:24.861" v="70" actId="2711"/>
-        <pc:sldMkLst>
-          <pc:docMk/>
-          <pc:sldMk cId="4235301837" sldId="273"/>
-        </pc:sldMkLst>
-      </pc:sldChg>
-      <pc:sldChg chg="modSp mod">
-        <pc:chgData name="Mukut, KM" userId="2fac2f92-416c-4e92-82ba-41ee479b5d48" providerId="ADAL" clId="{B4086C10-76DC-8C49-B312-2A3F37850741}" dt="2023-07-23T21:44:47.620" v="73" actId="27636"/>
-        <pc:sldMkLst>
-          <pc:docMk/>
-          <pc:sldMk cId="3718634394" sldId="274"/>
-        </pc:sldMkLst>
-      </pc:sldChg>
-      <pc:sldChg chg="modSp mod">
-        <pc:chgData name="Mukut, KM" userId="2fac2f92-416c-4e92-82ba-41ee479b5d48" providerId="ADAL" clId="{B4086C10-76DC-8C49-B312-2A3F37850741}" dt="2023-07-23T21:44:12.996" v="69" actId="2711"/>
-        <pc:sldMkLst>
-          <pc:docMk/>
-          <pc:sldMk cId="1118311816" sldId="275"/>
-        </pc:sldMkLst>
-      </pc:sldChg>
-      <pc:sldChg chg="modSp mod">
-        <pc:chgData name="Mukut, KM" userId="2fac2f92-416c-4e92-82ba-41ee479b5d48" providerId="ADAL" clId="{B4086C10-76DC-8C49-B312-2A3F37850741}" dt="2023-07-23T21:44:01.506" v="68" actId="1076"/>
-        <pc:sldMkLst>
-          <pc:docMk/>
-          <pc:sldMk cId="382836062" sldId="276"/>
-        </pc:sldMkLst>
-      </pc:sldChg>
-      <pc:sldChg chg="modSp mod">
-        <pc:chgData name="Mukut, KM" userId="2fac2f92-416c-4e92-82ba-41ee479b5d48" providerId="ADAL" clId="{B4086C10-76DC-8C49-B312-2A3F37850741}" dt="2023-07-23T21:43:47.744" v="66" actId="2711"/>
-        <pc:sldMkLst>
-          <pc:docMk/>
-          <pc:sldMk cId="1998030866" sldId="277"/>
-        </pc:sldMkLst>
-      </pc:sldChg>
-      <pc:sldChg chg="modSp mod">
-        <pc:chgData name="Mukut, KM" userId="2fac2f92-416c-4e92-82ba-41ee479b5d48" providerId="ADAL" clId="{B4086C10-76DC-8C49-B312-2A3F37850741}" dt="2023-07-23T21:43:31.652" v="64" actId="2711"/>
-        <pc:sldMkLst>
-          <pc:docMk/>
-          <pc:sldMk cId="3158441860" sldId="278"/>
-        </pc:sldMkLst>
-      </pc:sldChg>
-      <pc:sldChg chg="modSp mod">
-        <pc:chgData name="Mukut, KM" userId="2fac2f92-416c-4e92-82ba-41ee479b5d48" providerId="ADAL" clId="{B4086C10-76DC-8C49-B312-2A3F37850741}" dt="2023-07-23T21:38:43.322" v="41" actId="2711"/>
-        <pc:sldMkLst>
-          <pc:docMk/>
-          <pc:sldMk cId="4143896332" sldId="279"/>
-        </pc:sldMkLst>
-      </pc:sldChg>
-      <pc:sldChg chg="del">
-        <pc:chgData name="Mukut, KM" userId="2fac2f92-416c-4e92-82ba-41ee479b5d48" providerId="ADAL" clId="{B4086C10-76DC-8C49-B312-2A3F37850741}" dt="2023-07-23T21:40:12.709" v="42" actId="2696"/>
-        <pc:sldMkLst>
-          <pc:docMk/>
-          <pc:sldMk cId="151862332" sldId="280"/>
-        </pc:sldMkLst>
-      </pc:sldChg>
-      <pc:sldChg chg="addSp delSp modSp add del mod">
-        <pc:chgData name="Mukut, KM" userId="2fac2f92-416c-4e92-82ba-41ee479b5d48" providerId="ADAL" clId="{B4086C10-76DC-8C49-B312-2A3F37850741}" dt="2023-07-23T21:22:43.756" v="24" actId="14100"/>
-        <pc:sldMkLst>
-          <pc:docMk/>
-          <pc:sldMk cId="0" sldId="281"/>
-        </pc:sldMkLst>
-      </pc:sldChg>
-      <pc:sldChg chg="modSp add mod">
-        <pc:chgData name="Mukut, KM" userId="2fac2f92-416c-4e92-82ba-41ee479b5d48" providerId="ADAL" clId="{B4086C10-76DC-8C49-B312-2A3F37850741}" dt="2023-07-23T21:23:19.259" v="26" actId="2711"/>
-        <pc:sldMkLst>
-          <pc:docMk/>
-          <pc:sldMk cId="0" sldId="282"/>
-        </pc:sldMkLst>
-      </pc:sldChg>
-      <pc:sldChg chg="delSp add mod">
-        <pc:chgData name="Mukut, KM" userId="2fac2f92-416c-4e92-82ba-41ee479b5d48" providerId="ADAL" clId="{B4086C10-76DC-8C49-B312-2A3F37850741}" dt="2023-07-23T21:23:47.797" v="29" actId="478"/>
-        <pc:sldMkLst>
-          <pc:docMk/>
-          <pc:sldMk cId="0" sldId="283"/>
-        </pc:sldMkLst>
-      </pc:sldChg>
-      <pc:sldChg chg="delSp add mod">
-        <pc:chgData name="Mukut, KM" userId="2fac2f92-416c-4e92-82ba-41ee479b5d48" providerId="ADAL" clId="{B4086C10-76DC-8C49-B312-2A3F37850741}" dt="2023-07-23T21:24:03.428" v="31" actId="478"/>
-        <pc:sldMkLst>
-          <pc:docMk/>
-          <pc:sldMk cId="0" sldId="284"/>
-        </pc:sldMkLst>
-      </pc:sldChg>
-      <pc:sldChg chg="delSp add mod">
-        <pc:chgData name="Mukut, KM" userId="2fac2f92-416c-4e92-82ba-41ee479b5d48" providerId="ADAL" clId="{B4086C10-76DC-8C49-B312-2A3F37850741}" dt="2023-07-23T21:24:18.044" v="33" actId="478"/>
-        <pc:sldMkLst>
-          <pc:docMk/>
-          <pc:sldMk cId="0" sldId="285"/>
-        </pc:sldMkLst>
-      </pc:sldChg>
-      <pc:sldChg chg="delSp modSp add mod">
-        <pc:chgData name="Mukut, KM" userId="2fac2f92-416c-4e92-82ba-41ee479b5d48" providerId="ADAL" clId="{B4086C10-76DC-8C49-B312-2A3F37850741}" dt="2023-07-23T21:58:22.432" v="348" actId="1036"/>
-        <pc:sldMkLst>
-          <pc:docMk/>
-          <pc:sldMk cId="0" sldId="286"/>
-        </pc:sldMkLst>
-      </pc:sldChg>
-      <pc:sldChg chg="addSp delSp modSp new mod setBg">
-        <pc:chgData name="Mukut, KM" userId="2fac2f92-416c-4e92-82ba-41ee479b5d48" providerId="ADAL" clId="{B4086C10-76DC-8C49-B312-2A3F37850741}" dt="2023-07-23T21:43:19.719" v="63" actId="2711"/>
-        <pc:sldMkLst>
-          <pc:docMk/>
-          <pc:sldMk cId="1955131238" sldId="287"/>
+      <pc:sldChg chg="delSp mod delAnim">
+        <pc:chgData name="Roy, Somesh" userId="1acabf4b-f33c-4133-9f27-9eb78ba0ac66" providerId="ADAL" clId="{1D6AC2EB-F712-4211-8004-4938C3240DC1}" dt="2023-07-24T22:16:09.385" v="0" actId="478"/>
+        <pc:sldMkLst>
+          <pc:docMk/>
+          <pc:sldMk cId="4221095728" sldId="257"/>
+        </pc:sldMkLst>
+      </pc:sldChg>
+      <pc:sldChg chg="addSp modSp mod">
+        <pc:chgData name="Roy, Somesh" userId="1acabf4b-f33c-4133-9f27-9eb78ba0ac66" providerId="ADAL" clId="{1D6AC2EB-F712-4211-8004-4938C3240DC1}" dt="2023-07-24T22:17:12.865" v="4" actId="404"/>
+        <pc:sldMkLst>
+          <pc:docMk/>
+          <pc:sldMk cId="7928765" sldId="292"/>
         </pc:sldMkLst>
       </pc:sldChg>
     </pc:docChg>
@@ -720,29 +597,6 @@
           </pc:sldLayoutMkLst>
         </pc:sldLayoutChg>
       </pc:sldMasterChg>
-    </pc:docChg>
-  </pc:docChgLst>
-  <pc:docChgLst>
-    <pc:chgData name="Roy, Somesh" userId="1acabf4b-f33c-4133-9f27-9eb78ba0ac66" providerId="ADAL" clId="{1D6AC2EB-F712-4211-8004-4938C3240DC1}"/>
-    <pc:docChg chg="custSel modSld">
-      <pc:chgData name="Roy, Somesh" userId="1acabf4b-f33c-4133-9f27-9eb78ba0ac66" providerId="ADAL" clId="{1D6AC2EB-F712-4211-8004-4938C3240DC1}" dt="2023-07-24T22:17:12.865" v="4" actId="404"/>
-      <pc:docMkLst>
-        <pc:docMk/>
-      </pc:docMkLst>
-      <pc:sldChg chg="delSp mod delAnim">
-        <pc:chgData name="Roy, Somesh" userId="1acabf4b-f33c-4133-9f27-9eb78ba0ac66" providerId="ADAL" clId="{1D6AC2EB-F712-4211-8004-4938C3240DC1}" dt="2023-07-24T22:16:09.385" v="0" actId="478"/>
-        <pc:sldMkLst>
-          <pc:docMk/>
-          <pc:sldMk cId="4221095728" sldId="257"/>
-        </pc:sldMkLst>
-      </pc:sldChg>
-      <pc:sldChg chg="addSp modSp mod">
-        <pc:chgData name="Roy, Somesh" userId="1acabf4b-f33c-4133-9f27-9eb78ba0ac66" providerId="ADAL" clId="{1D6AC2EB-F712-4211-8004-4938C3240DC1}" dt="2023-07-24T22:17:12.865" v="4" actId="404"/>
-        <pc:sldMkLst>
-          <pc:docMk/>
-          <pc:sldMk cId="7928765" sldId="292"/>
-        </pc:sldMkLst>
-      </pc:sldChg>
     </pc:docChg>
   </pc:docChgLst>
   <pc:docChgLst>
@@ -905,6 +759,155 @@
     </pc:docChg>
   </pc:docChgLst>
   <pc:docChgLst>
+    <pc:chgData name="Mukut, KM" userId="2fac2f92-416c-4e92-82ba-41ee479b5d48" providerId="ADAL" clId="{B4086C10-76DC-8C49-B312-2A3F37850741}"/>
+    <pc:docChg chg="undo custSel addSld delSld modSld">
+      <pc:chgData name="Mukut, KM" userId="2fac2f92-416c-4e92-82ba-41ee479b5d48" providerId="ADAL" clId="{B4086C10-76DC-8C49-B312-2A3F37850741}" dt="2023-07-23T22:11:03.939" v="407" actId="20577"/>
+      <pc:docMkLst>
+        <pc:docMk/>
+      </pc:docMkLst>
+      <pc:sldChg chg="addSp delSp modSp mod setBg setClrOvrMap">
+        <pc:chgData name="Mukut, KM" userId="2fac2f92-416c-4e92-82ba-41ee479b5d48" providerId="ADAL" clId="{B4086C10-76DC-8C49-B312-2A3F37850741}" dt="2023-07-23T22:08:26.259" v="361" actId="26606"/>
+        <pc:sldMkLst>
+          <pc:docMk/>
+          <pc:sldMk cId="4132216747" sldId="256"/>
+        </pc:sldMkLst>
+      </pc:sldChg>
+      <pc:sldChg chg="addSp delSp modSp mod setBg addAnim delAnim">
+        <pc:chgData name="Mukut, KM" userId="2fac2f92-416c-4e92-82ba-41ee479b5d48" providerId="ADAL" clId="{B4086C10-76DC-8C49-B312-2A3F37850741}" dt="2023-07-23T22:11:03.939" v="407" actId="20577"/>
+        <pc:sldMkLst>
+          <pc:docMk/>
+          <pc:sldMk cId="367211742" sldId="260"/>
+        </pc:sldMkLst>
+      </pc:sldChg>
+      <pc:sldChg chg="del">
+        <pc:chgData name="Mukut, KM" userId="2fac2f92-416c-4e92-82ba-41ee479b5d48" providerId="ADAL" clId="{B4086C10-76DC-8C49-B312-2A3F37850741}" dt="2023-07-23T21:23:28.506" v="27" actId="2696"/>
+        <pc:sldMkLst>
+          <pc:docMk/>
+          <pc:sldMk cId="3886847710" sldId="269"/>
+        </pc:sldMkLst>
+      </pc:sldChg>
+      <pc:sldChg chg="del">
+        <pc:chgData name="Mukut, KM" userId="2fac2f92-416c-4e92-82ba-41ee479b5d48" providerId="ADAL" clId="{B4086C10-76DC-8C49-B312-2A3F37850741}" dt="2023-07-23T21:58:02.263" v="330" actId="2696"/>
+        <pc:sldMkLst>
+          <pc:docMk/>
+          <pc:sldMk cId="3793004979" sldId="270"/>
+        </pc:sldMkLst>
+      </pc:sldChg>
+      <pc:sldChg chg="modSp mod">
+        <pc:chgData name="Mukut, KM" userId="2fac2f92-416c-4e92-82ba-41ee479b5d48" providerId="ADAL" clId="{B4086C10-76DC-8C49-B312-2A3F37850741}" dt="2023-07-23T21:44:40.269" v="71" actId="2711"/>
+        <pc:sldMkLst>
+          <pc:docMk/>
+          <pc:sldMk cId="697158601" sldId="272"/>
+        </pc:sldMkLst>
+      </pc:sldChg>
+      <pc:sldChg chg="modSp mod">
+        <pc:chgData name="Mukut, KM" userId="2fac2f92-416c-4e92-82ba-41ee479b5d48" providerId="ADAL" clId="{B4086C10-76DC-8C49-B312-2A3F37850741}" dt="2023-07-23T21:44:24.861" v="70" actId="2711"/>
+        <pc:sldMkLst>
+          <pc:docMk/>
+          <pc:sldMk cId="4235301837" sldId="273"/>
+        </pc:sldMkLst>
+      </pc:sldChg>
+      <pc:sldChg chg="modSp mod">
+        <pc:chgData name="Mukut, KM" userId="2fac2f92-416c-4e92-82ba-41ee479b5d48" providerId="ADAL" clId="{B4086C10-76DC-8C49-B312-2A3F37850741}" dt="2023-07-23T21:44:47.620" v="73" actId="27636"/>
+        <pc:sldMkLst>
+          <pc:docMk/>
+          <pc:sldMk cId="3718634394" sldId="274"/>
+        </pc:sldMkLst>
+      </pc:sldChg>
+      <pc:sldChg chg="modSp mod">
+        <pc:chgData name="Mukut, KM" userId="2fac2f92-416c-4e92-82ba-41ee479b5d48" providerId="ADAL" clId="{B4086C10-76DC-8C49-B312-2A3F37850741}" dt="2023-07-23T21:44:12.996" v="69" actId="2711"/>
+        <pc:sldMkLst>
+          <pc:docMk/>
+          <pc:sldMk cId="1118311816" sldId="275"/>
+        </pc:sldMkLst>
+      </pc:sldChg>
+      <pc:sldChg chg="modSp mod">
+        <pc:chgData name="Mukut, KM" userId="2fac2f92-416c-4e92-82ba-41ee479b5d48" providerId="ADAL" clId="{B4086C10-76DC-8C49-B312-2A3F37850741}" dt="2023-07-23T21:44:01.506" v="68" actId="1076"/>
+        <pc:sldMkLst>
+          <pc:docMk/>
+          <pc:sldMk cId="382836062" sldId="276"/>
+        </pc:sldMkLst>
+      </pc:sldChg>
+      <pc:sldChg chg="modSp mod">
+        <pc:chgData name="Mukut, KM" userId="2fac2f92-416c-4e92-82ba-41ee479b5d48" providerId="ADAL" clId="{B4086C10-76DC-8C49-B312-2A3F37850741}" dt="2023-07-23T21:43:47.744" v="66" actId="2711"/>
+        <pc:sldMkLst>
+          <pc:docMk/>
+          <pc:sldMk cId="1998030866" sldId="277"/>
+        </pc:sldMkLst>
+      </pc:sldChg>
+      <pc:sldChg chg="modSp mod">
+        <pc:chgData name="Mukut, KM" userId="2fac2f92-416c-4e92-82ba-41ee479b5d48" providerId="ADAL" clId="{B4086C10-76DC-8C49-B312-2A3F37850741}" dt="2023-07-23T21:43:31.652" v="64" actId="2711"/>
+        <pc:sldMkLst>
+          <pc:docMk/>
+          <pc:sldMk cId="3158441860" sldId="278"/>
+        </pc:sldMkLst>
+      </pc:sldChg>
+      <pc:sldChg chg="modSp mod">
+        <pc:chgData name="Mukut, KM" userId="2fac2f92-416c-4e92-82ba-41ee479b5d48" providerId="ADAL" clId="{B4086C10-76DC-8C49-B312-2A3F37850741}" dt="2023-07-23T21:38:43.322" v="41" actId="2711"/>
+        <pc:sldMkLst>
+          <pc:docMk/>
+          <pc:sldMk cId="4143896332" sldId="279"/>
+        </pc:sldMkLst>
+      </pc:sldChg>
+      <pc:sldChg chg="del">
+        <pc:chgData name="Mukut, KM" userId="2fac2f92-416c-4e92-82ba-41ee479b5d48" providerId="ADAL" clId="{B4086C10-76DC-8C49-B312-2A3F37850741}" dt="2023-07-23T21:40:12.709" v="42" actId="2696"/>
+        <pc:sldMkLst>
+          <pc:docMk/>
+          <pc:sldMk cId="151862332" sldId="280"/>
+        </pc:sldMkLst>
+      </pc:sldChg>
+      <pc:sldChg chg="addSp delSp modSp add del mod">
+        <pc:chgData name="Mukut, KM" userId="2fac2f92-416c-4e92-82ba-41ee479b5d48" providerId="ADAL" clId="{B4086C10-76DC-8C49-B312-2A3F37850741}" dt="2023-07-23T21:22:43.756" v="24" actId="14100"/>
+        <pc:sldMkLst>
+          <pc:docMk/>
+          <pc:sldMk cId="0" sldId="281"/>
+        </pc:sldMkLst>
+      </pc:sldChg>
+      <pc:sldChg chg="modSp add mod">
+        <pc:chgData name="Mukut, KM" userId="2fac2f92-416c-4e92-82ba-41ee479b5d48" providerId="ADAL" clId="{B4086C10-76DC-8C49-B312-2A3F37850741}" dt="2023-07-23T21:23:19.259" v="26" actId="2711"/>
+        <pc:sldMkLst>
+          <pc:docMk/>
+          <pc:sldMk cId="0" sldId="282"/>
+        </pc:sldMkLst>
+      </pc:sldChg>
+      <pc:sldChg chg="delSp add mod">
+        <pc:chgData name="Mukut, KM" userId="2fac2f92-416c-4e92-82ba-41ee479b5d48" providerId="ADAL" clId="{B4086C10-76DC-8C49-B312-2A3F37850741}" dt="2023-07-23T21:23:47.797" v="29" actId="478"/>
+        <pc:sldMkLst>
+          <pc:docMk/>
+          <pc:sldMk cId="0" sldId="283"/>
+        </pc:sldMkLst>
+      </pc:sldChg>
+      <pc:sldChg chg="delSp add mod">
+        <pc:chgData name="Mukut, KM" userId="2fac2f92-416c-4e92-82ba-41ee479b5d48" providerId="ADAL" clId="{B4086C10-76DC-8C49-B312-2A3F37850741}" dt="2023-07-23T21:24:03.428" v="31" actId="478"/>
+        <pc:sldMkLst>
+          <pc:docMk/>
+          <pc:sldMk cId="0" sldId="284"/>
+        </pc:sldMkLst>
+      </pc:sldChg>
+      <pc:sldChg chg="delSp add mod">
+        <pc:chgData name="Mukut, KM" userId="2fac2f92-416c-4e92-82ba-41ee479b5d48" providerId="ADAL" clId="{B4086C10-76DC-8C49-B312-2A3F37850741}" dt="2023-07-23T21:24:18.044" v="33" actId="478"/>
+        <pc:sldMkLst>
+          <pc:docMk/>
+          <pc:sldMk cId="0" sldId="285"/>
+        </pc:sldMkLst>
+      </pc:sldChg>
+      <pc:sldChg chg="delSp modSp add mod">
+        <pc:chgData name="Mukut, KM" userId="2fac2f92-416c-4e92-82ba-41ee479b5d48" providerId="ADAL" clId="{B4086C10-76DC-8C49-B312-2A3F37850741}" dt="2023-07-23T21:58:22.432" v="348" actId="1036"/>
+        <pc:sldMkLst>
+          <pc:docMk/>
+          <pc:sldMk cId="0" sldId="286"/>
+        </pc:sldMkLst>
+      </pc:sldChg>
+      <pc:sldChg chg="addSp delSp modSp new mod setBg">
+        <pc:chgData name="Mukut, KM" userId="2fac2f92-416c-4e92-82ba-41ee479b5d48" providerId="ADAL" clId="{B4086C10-76DC-8C49-B312-2A3F37850741}" dt="2023-07-23T21:43:19.719" v="63" actId="2711"/>
+        <pc:sldMkLst>
+          <pc:docMk/>
+          <pc:sldMk cId="1955131238" sldId="287"/>
+        </pc:sldMkLst>
+      </pc:sldChg>
+    </pc:docChg>
+  </pc:docChgLst>
+  <pc:docChgLst>
     <pc:chgData name="Roy, Somesh" userId="1acabf4b-f33c-4133-9f27-9eb78ba0ac66" providerId="ADAL" clId="{8A7932B7-C305-40E5-B508-CC22F6115DD4}"/>
     <pc:docChg chg="undo redo custSel addSld delSld modSld sldOrd addMainMaster modMainMaster">
       <pc:chgData name="Roy, Somesh" userId="1acabf4b-f33c-4133-9f27-9eb78ba0ac66" providerId="ADAL" clId="{8A7932B7-C305-40E5-B508-CC22F6115DD4}" dt="2023-07-24T18:54:43.436" v="7550" actId="47"/>
@@ -1456,7 +1459,7 @@
           <a:p>
             <a:fld id="{82D275FB-3023-4CE2-97CF-EB95DA1A3B15}" type="datetimeFigureOut">
               <a:rPr lang="en-US" smtClean="0"/>
-              <a:t>7/29/2025</a:t>
+              <a:t>7/21/2026</a:t>
             </a:fld>
             <a:endParaRPr lang="en-US"/>
           </a:p>
@@ -1835,7 +1838,7 @@
                 <a:tabLst/>
                 <a:defRPr/>
               </a:pPr>
-              <a:t>3</a:t>
+              <a:t>6</a:t>
             </a:fld>
             <a:endParaRPr kumimoji="0" lang="en-US" sz="1800" b="0" i="0" u="none" strike="noStrike" kern="1200" cap="none" spc="0" normalizeH="0" baseline="0" noProof="0">
               <a:ln>
@@ -1932,7 +1935,7 @@
           <a:p>
             <a:fld id="{F7021451-1387-4CA6-816F-3879F97B5CBC}" type="slidenum">
               <a:rPr lang="en-US"/>
-              <a:t>4</a:t>
+              <a:t>7</a:t>
             </a:fld>
             <a:endParaRPr lang="en-US"/>
           </a:p>
@@ -2016,7 +2019,7 @@
           <a:p>
             <a:fld id="{F7021451-1387-4CA6-816F-3879F97B5CBC}" type="slidenum">
               <a:rPr lang="en-US"/>
-              <a:t>7</a:t>
+              <a:t>10</a:t>
             </a:fld>
             <a:endParaRPr lang="en-US"/>
           </a:p>
@@ -2100,7 +2103,7 @@
           <a:p>
             <a:fld id="{F7021451-1387-4CA6-816F-3879F97B5CBC}" type="slidenum">
               <a:rPr lang="en-US"/>
-              <a:t>8</a:t>
+              <a:t>11</a:t>
             </a:fld>
             <a:endParaRPr lang="en-US"/>
           </a:p>
@@ -2274,7 +2277,7 @@
           <a:p>
             <a:fld id="{30650893-92C0-41BB-B843-C71662A9E31B}" type="datetimeFigureOut">
               <a:rPr lang="en-US" smtClean="0"/>
-              <a:t>7/29/2025</a:t>
+              <a:t>7/21/2026</a:t>
             </a:fld>
             <a:endParaRPr lang="en-US"/>
           </a:p>
@@ -2338,6 +2341,281 @@
     <p:extLst>
       <p:ext uri="{BB962C8B-B14F-4D97-AF65-F5344CB8AC3E}">
         <p14:creationId xmlns:p14="http://schemas.microsoft.com/office/powerpoint/2010/main" val="1800965985"/>
+      </p:ext>
+    </p:extLst>
+  </p:cSld>
+  <p:clrMapOvr>
+    <a:masterClrMapping/>
+  </p:clrMapOvr>
+</p:sldLayout>
+</file>
+
+<file path=ppt/slideLayouts/slideLayout3.xml><?xml version="1.0" encoding="utf-8"?>
+<p:sldLayout xmlns:a="http://schemas.openxmlformats.org/drawingml/2006/main" xmlns:r="http://schemas.openxmlformats.org/officeDocument/2006/relationships" xmlns:p="http://schemas.openxmlformats.org/presentationml/2006/main" type="secHead">
+  <p:cSld name="Section Header">
+    <p:spTree>
+      <p:nvGrpSpPr>
+        <p:cNvPr id="1" name=""/>
+        <p:cNvGrpSpPr/>
+        <p:nvPr/>
+      </p:nvGrpSpPr>
+      <p:grpSpPr>
+        <a:xfrm>
+          <a:off x="0" y="0"/>
+          <a:ext cx="0" cy="0"/>
+          <a:chOff x="0" y="0"/>
+          <a:chExt cx="0" cy="0"/>
+        </a:xfrm>
+      </p:grpSpPr>
+      <p:sp>
+        <p:nvSpPr>
+          <p:cNvPr id="2" name="Title 1">
+            <a:extLst>
+              <a:ext uri="{FF2B5EF4-FFF2-40B4-BE49-F238E27FC236}">
+                <a16:creationId xmlns:a16="http://schemas.microsoft.com/office/drawing/2014/main" id="{479F4DB9-A39A-8A18-155A-4EBBBFD04CCA}"/>
+              </a:ext>
+            </a:extLst>
+          </p:cNvPr>
+          <p:cNvSpPr>
+            <a:spLocks noGrp="1"/>
+          </p:cNvSpPr>
+          <p:nvPr>
+            <p:ph type="title"/>
+          </p:nvPr>
+        </p:nvSpPr>
+        <p:spPr>
+          <a:xfrm>
+            <a:off x="831850" y="1709738"/>
+            <a:ext cx="10515600" cy="2852737"/>
+          </a:xfrm>
+        </p:spPr>
+        <p:txBody>
+          <a:bodyPr anchor="b"/>
+          <a:lstStyle>
+            <a:lvl1pPr>
+              <a:defRPr sz="6000"/>
+            </a:lvl1pPr>
+          </a:lstStyle>
+          <a:p>
+            <a:r>
+              <a:rPr lang="en-US"/>
+              <a:t>Click to edit Master title style</a:t>
+            </a:r>
+          </a:p>
+        </p:txBody>
+      </p:sp>
+      <p:sp>
+        <p:nvSpPr>
+          <p:cNvPr id="3" name="Text Placeholder 2">
+            <a:extLst>
+              <a:ext uri="{FF2B5EF4-FFF2-40B4-BE49-F238E27FC236}">
+                <a16:creationId xmlns:a16="http://schemas.microsoft.com/office/drawing/2014/main" id="{6E71FEA0-4433-5AB0-4623-362010FBBB39}"/>
+              </a:ext>
+            </a:extLst>
+          </p:cNvPr>
+          <p:cNvSpPr>
+            <a:spLocks noGrp="1"/>
+          </p:cNvSpPr>
+          <p:nvPr>
+            <p:ph type="body" idx="1"/>
+          </p:nvPr>
+        </p:nvSpPr>
+        <p:spPr>
+          <a:xfrm>
+            <a:off x="831850" y="4589463"/>
+            <a:ext cx="10515600" cy="1500187"/>
+          </a:xfrm>
+        </p:spPr>
+        <p:txBody>
+          <a:bodyPr/>
+          <a:lstStyle>
+            <a:lvl1pPr marL="0" indent="0">
+              <a:buNone/>
+              <a:defRPr sz="2400">
+                <a:solidFill>
+                  <a:schemeClr val="tx1">
+                    <a:tint val="75000"/>
+                  </a:schemeClr>
+                </a:solidFill>
+              </a:defRPr>
+            </a:lvl1pPr>
+            <a:lvl2pPr marL="457200" indent="0">
+              <a:buNone/>
+              <a:defRPr sz="2000">
+                <a:solidFill>
+                  <a:schemeClr val="tx1">
+                    <a:tint val="75000"/>
+                  </a:schemeClr>
+                </a:solidFill>
+              </a:defRPr>
+            </a:lvl2pPr>
+            <a:lvl3pPr marL="914400" indent="0">
+              <a:buNone/>
+              <a:defRPr sz="1800">
+                <a:solidFill>
+                  <a:schemeClr val="tx1">
+                    <a:tint val="75000"/>
+                  </a:schemeClr>
+                </a:solidFill>
+              </a:defRPr>
+            </a:lvl3pPr>
+            <a:lvl4pPr marL="1371600" indent="0">
+              <a:buNone/>
+              <a:defRPr sz="1600">
+                <a:solidFill>
+                  <a:schemeClr val="tx1">
+                    <a:tint val="75000"/>
+                  </a:schemeClr>
+                </a:solidFill>
+              </a:defRPr>
+            </a:lvl4pPr>
+            <a:lvl5pPr marL="1828800" indent="0">
+              <a:buNone/>
+              <a:defRPr sz="1600">
+                <a:solidFill>
+                  <a:schemeClr val="tx1">
+                    <a:tint val="75000"/>
+                  </a:schemeClr>
+                </a:solidFill>
+              </a:defRPr>
+            </a:lvl5pPr>
+            <a:lvl6pPr marL="2286000" indent="0">
+              <a:buNone/>
+              <a:defRPr sz="1600">
+                <a:solidFill>
+                  <a:schemeClr val="tx1">
+                    <a:tint val="75000"/>
+                  </a:schemeClr>
+                </a:solidFill>
+              </a:defRPr>
+            </a:lvl6pPr>
+            <a:lvl7pPr marL="2743200" indent="0">
+              <a:buNone/>
+              <a:defRPr sz="1600">
+                <a:solidFill>
+                  <a:schemeClr val="tx1">
+                    <a:tint val="75000"/>
+                  </a:schemeClr>
+                </a:solidFill>
+              </a:defRPr>
+            </a:lvl7pPr>
+            <a:lvl8pPr marL="3200400" indent="0">
+              <a:buNone/>
+              <a:defRPr sz="1600">
+                <a:solidFill>
+                  <a:schemeClr val="tx1">
+                    <a:tint val="75000"/>
+                  </a:schemeClr>
+                </a:solidFill>
+              </a:defRPr>
+            </a:lvl8pPr>
+            <a:lvl9pPr marL="3657600" indent="0">
+              <a:buNone/>
+              <a:defRPr sz="1600">
+                <a:solidFill>
+                  <a:schemeClr val="tx1">
+                    <a:tint val="75000"/>
+                  </a:schemeClr>
+                </a:solidFill>
+              </a:defRPr>
+            </a:lvl9pPr>
+          </a:lstStyle>
+          <a:p>
+            <a:pPr lvl="0"/>
+            <a:r>
+              <a:rPr lang="en-US"/>
+              <a:t>Click to edit Master text styles</a:t>
+            </a:r>
+          </a:p>
+        </p:txBody>
+      </p:sp>
+      <p:sp>
+        <p:nvSpPr>
+          <p:cNvPr id="4" name="Date Placeholder 3">
+            <a:extLst>
+              <a:ext uri="{FF2B5EF4-FFF2-40B4-BE49-F238E27FC236}">
+                <a16:creationId xmlns:a16="http://schemas.microsoft.com/office/drawing/2014/main" id="{16CC1799-571E-0ED2-5586-8790B95702F6}"/>
+              </a:ext>
+            </a:extLst>
+          </p:cNvPr>
+          <p:cNvSpPr>
+            <a:spLocks noGrp="1"/>
+          </p:cNvSpPr>
+          <p:nvPr>
+            <p:ph type="dt" sz="half" idx="10"/>
+          </p:nvPr>
+        </p:nvSpPr>
+        <p:spPr/>
+        <p:txBody>
+          <a:bodyPr/>
+          <a:lstStyle/>
+          <a:p>
+            <a:fld id="{54FDF642-009D-4294-9E1E-7F2B05CB1E7C}" type="datetime1">
+              <a:rPr lang="en-US" smtClean="0"/>
+              <a:t>7/21/2026</a:t>
+            </a:fld>
+            <a:endParaRPr lang="en-US"/>
+          </a:p>
+        </p:txBody>
+      </p:sp>
+      <p:sp>
+        <p:nvSpPr>
+          <p:cNvPr id="5" name="Footer Placeholder 4">
+            <a:extLst>
+              <a:ext uri="{FF2B5EF4-FFF2-40B4-BE49-F238E27FC236}">
+                <a16:creationId xmlns:a16="http://schemas.microsoft.com/office/drawing/2014/main" id="{D4999CB0-03C0-32E2-118B-7EB09D217EDF}"/>
+              </a:ext>
+            </a:extLst>
+          </p:cNvPr>
+          <p:cNvSpPr>
+            <a:spLocks noGrp="1"/>
+          </p:cNvSpPr>
+          <p:nvPr>
+            <p:ph type="ftr" sz="quarter" idx="11"/>
+          </p:nvPr>
+        </p:nvSpPr>
+        <p:spPr/>
+        <p:txBody>
+          <a:bodyPr/>
+          <a:lstStyle/>
+          <a:p>
+            <a:endParaRPr lang="en-US"/>
+          </a:p>
+        </p:txBody>
+      </p:sp>
+      <p:sp>
+        <p:nvSpPr>
+          <p:cNvPr id="6" name="Slide Number Placeholder 5">
+            <a:extLst>
+              <a:ext uri="{FF2B5EF4-FFF2-40B4-BE49-F238E27FC236}">
+                <a16:creationId xmlns:a16="http://schemas.microsoft.com/office/drawing/2014/main" id="{B6B3C00D-6DDF-A9C6-CEED-BDF859D724F9}"/>
+              </a:ext>
+            </a:extLst>
+          </p:cNvPr>
+          <p:cNvSpPr>
+            <a:spLocks noGrp="1"/>
+          </p:cNvSpPr>
+          <p:nvPr>
+            <p:ph type="sldNum" sz="quarter" idx="12"/>
+          </p:nvPr>
+        </p:nvSpPr>
+        <p:spPr/>
+        <p:txBody>
+          <a:bodyPr/>
+          <a:lstStyle/>
+          <a:p>
+            <a:fld id="{03C731F9-C159-4852-9A74-0BE793153C89}" type="slidenum">
+              <a:rPr lang="en-US" smtClean="0"/>
+              <a:t>‹#›</a:t>
+            </a:fld>
+            <a:endParaRPr lang="en-US"/>
+          </a:p>
+        </p:txBody>
+      </p:sp>
+    </p:spTree>
+    <p:extLst>
+      <p:ext uri="{BB962C8B-B14F-4D97-AF65-F5344CB8AC3E}">
+        <p14:creationId xmlns:p14="http://schemas.microsoft.com/office/powerpoint/2010/main" val="2256316387"/>
       </p:ext>
     </p:extLst>
   </p:cSld>
@@ -2797,7 +3075,7 @@
           <a:p>
             <a:fld id="{30650893-92C0-41BB-B843-C71662A9E31B}" type="datetimeFigureOut">
               <a:rPr lang="en-US" smtClean="0"/>
-              <a:t>7/29/2025</a:t>
+              <a:t>7/21/2026</a:t>
             </a:fld>
             <a:endParaRPr lang="en-US"/>
           </a:p>
@@ -2903,6 +3181,7 @@
   <p:clrMap bg1="lt1" tx1="dk1" bg2="lt2" tx2="dk2" accent1="accent1" accent2="accent2" accent3="accent3" accent4="accent4" accent5="accent5" accent6="accent6" hlink="hlink" folHlink="folHlink"/>
   <p:sldLayoutIdLst>
     <p:sldLayoutId id="2147483650" r:id="rId1"/>
+    <p:sldLayoutId id="2147483652" r:id="rId2"/>
   </p:sldLayoutIdLst>
   <p:txStyles>
     <p:titleStyle>
@@ -3190,6 +3469,1934 @@
 <file path=ppt/slides/slide1.xml><?xml version="1.0" encoding="utf-8"?>
 <p:sld xmlns:a="http://schemas.openxmlformats.org/drawingml/2006/main" xmlns:r="http://schemas.openxmlformats.org/officeDocument/2006/relationships" xmlns:p="http://schemas.openxmlformats.org/presentationml/2006/main">
   <p:cSld>
+    <p:spTree>
+      <p:nvGrpSpPr>
+        <p:cNvPr id="1" name=""/>
+        <p:cNvGrpSpPr/>
+        <p:nvPr/>
+      </p:nvGrpSpPr>
+      <p:grpSpPr>
+        <a:xfrm>
+          <a:off x="0" y="0"/>
+          <a:ext cx="0" cy="0"/>
+          <a:chOff x="0" y="0"/>
+          <a:chExt cx="0" cy="0"/>
+        </a:xfrm>
+      </p:grpSpPr>
+      <p:sp>
+        <p:nvSpPr>
+          <p:cNvPr id="2" name="Title 1">
+            <a:extLst>
+              <a:ext uri="{FF2B5EF4-FFF2-40B4-BE49-F238E27FC236}">
+                <a16:creationId xmlns:a16="http://schemas.microsoft.com/office/drawing/2014/main" id="{CB6FF0D5-BA19-75E2-33AD-A5C9C1B5E29D}"/>
+              </a:ext>
+            </a:extLst>
+          </p:cNvPr>
+          <p:cNvSpPr>
+            <a:spLocks noGrp="1"/>
+          </p:cNvSpPr>
+          <p:nvPr>
+            <p:ph type="title"/>
+          </p:nvPr>
+        </p:nvSpPr>
+        <p:spPr>
+          <a:xfrm>
+            <a:off x="5297762" y="640080"/>
+            <a:ext cx="6251110" cy="3566160"/>
+          </a:xfrm>
+        </p:spPr>
+        <p:txBody>
+          <a:bodyPr vert="horz" lIns="91440" tIns="45720" rIns="91440" bIns="45720" rtlCol="0" anchor="b">
+            <a:normAutofit/>
+          </a:bodyPr>
+          <a:lstStyle/>
+          <a:p>
+            <a:r>
+              <a:rPr lang="en-US" sz="5400"/>
+              <a:t>Let’s play a game</a:t>
+            </a:r>
+          </a:p>
+        </p:txBody>
+      </p:sp>
+      <p:sp>
+        <p:nvSpPr>
+          <p:cNvPr id="3" name="Content Placeholder 2">
+            <a:extLst>
+              <a:ext uri="{FF2B5EF4-FFF2-40B4-BE49-F238E27FC236}">
+                <a16:creationId xmlns:a16="http://schemas.microsoft.com/office/drawing/2014/main" id="{DC252FE0-DB63-C046-1EB4-C48633FF2575}"/>
+              </a:ext>
+            </a:extLst>
+          </p:cNvPr>
+          <p:cNvSpPr>
+            <a:spLocks noGrp="1"/>
+          </p:cNvSpPr>
+          <p:nvPr>
+            <p:ph type="body" idx="1"/>
+          </p:nvPr>
+        </p:nvSpPr>
+        <p:spPr>
+          <a:xfrm>
+            <a:off x="5297760" y="4636008"/>
+            <a:ext cx="6251111" cy="1572768"/>
+          </a:xfrm>
+        </p:spPr>
+        <p:txBody>
+          <a:bodyPr vert="horz" lIns="91440" tIns="45720" rIns="91440" bIns="45720" rtlCol="0">
+            <a:normAutofit/>
+          </a:bodyPr>
+          <a:lstStyle/>
+          <a:p>
+            <a:r>
+              <a:rPr lang="en-US" dirty="0">
+                <a:solidFill>
+                  <a:schemeClr val="tx1"/>
+                </a:solidFill>
+              </a:rPr>
+              <a:t>Everyone grab a colored sticky note</a:t>
+            </a:r>
+          </a:p>
+        </p:txBody>
+      </p:sp>
+      <p:pic>
+        <p:nvPicPr>
+          <p:cNvPr id="5" name="Picture 4" descr="A stack of dice on a boardgame">
+            <a:extLst>
+              <a:ext uri="{FF2B5EF4-FFF2-40B4-BE49-F238E27FC236}">
+                <a16:creationId xmlns:a16="http://schemas.microsoft.com/office/drawing/2014/main" id="{45B1612D-9B7D-5420-3395-E5BBF96DE8FE}"/>
+              </a:ext>
+            </a:extLst>
+          </p:cNvPr>
+          <p:cNvPicPr>
+            <a:picLocks noChangeAspect="1"/>
+          </p:cNvPicPr>
+          <p:nvPr/>
+        </p:nvPicPr>
+        <p:blipFill rotWithShape="1">
+          <a:blip r:embed="rId2"/>
+          <a:srcRect l="10190" r="21899"/>
+          <a:stretch/>
+        </p:blipFill>
+        <p:spPr>
+          <a:xfrm>
+            <a:off x="1" y="10"/>
+            <a:ext cx="4657344" cy="6857990"/>
+          </a:xfrm>
+          <a:custGeom>
+            <a:avLst/>
+            <a:gdLst/>
+            <a:ahLst/>
+            <a:cxnLst/>
+            <a:rect l="l" t="t" r="r" b="b"/>
+            <a:pathLst>
+              <a:path w="4657344" h="6858000">
+                <a:moveTo>
+                  <a:pt x="0" y="0"/>
+                </a:moveTo>
+                <a:lnTo>
+                  <a:pt x="3429755" y="0"/>
+                </a:lnTo>
+                <a:lnTo>
+                  <a:pt x="3526016" y="148742"/>
+                </a:lnTo>
+                <a:cubicBezTo>
+                  <a:pt x="3657740" y="365513"/>
+                  <a:pt x="3777402" y="589569"/>
+                  <a:pt x="3886489" y="819975"/>
+                </a:cubicBezTo>
+                <a:cubicBezTo>
+                  <a:pt x="3891856" y="833492"/>
+                  <a:pt x="3900663" y="845393"/>
+                  <a:pt x="3912049" y="854514"/>
+                </a:cubicBezTo>
+                <a:cubicBezTo>
+                  <a:pt x="3897352" y="819849"/>
+                  <a:pt x="3883037" y="784928"/>
+                  <a:pt x="3868083" y="750263"/>
+                </a:cubicBezTo>
+                <a:cubicBezTo>
+                  <a:pt x="3806989" y="608712"/>
+                  <a:pt x="3742478" y="469145"/>
+                  <a:pt x="3674155" y="331786"/>
+                </a:cubicBezTo>
+                <a:lnTo>
+                  <a:pt x="3496656" y="0"/>
+                </a:lnTo>
+                <a:lnTo>
+                  <a:pt x="3554371" y="0"/>
+                </a:lnTo>
+                <a:lnTo>
+                  <a:pt x="3661621" y="196614"/>
+                </a:lnTo>
+                <a:cubicBezTo>
+                  <a:pt x="3856899" y="573253"/>
+                  <a:pt x="4021071" y="966066"/>
+                  <a:pt x="4161279" y="1371196"/>
+                </a:cubicBezTo>
+                <a:cubicBezTo>
+                  <a:pt x="4379525" y="2007265"/>
+                  <a:pt x="4530141" y="2664286"/>
+                  <a:pt x="4610660" y="3331516"/>
+                </a:cubicBezTo>
+                <a:cubicBezTo>
+                  <a:pt x="4652837" y="3672965"/>
+                  <a:pt x="4671625" y="4013908"/>
+                  <a:pt x="4645040" y="4357388"/>
+                </a:cubicBezTo>
+                <a:cubicBezTo>
+                  <a:pt x="4613599" y="4758899"/>
+                  <a:pt x="4566181" y="5157998"/>
+                  <a:pt x="4485789" y="5552906"/>
+                </a:cubicBezTo>
+                <a:cubicBezTo>
+                  <a:pt x="4397121" y="5988893"/>
+                  <a:pt x="4276748" y="6414594"/>
+                  <a:pt x="4117769" y="6828295"/>
+                </a:cubicBezTo>
+                <a:lnTo>
+                  <a:pt x="4105288" y="6858000"/>
+                </a:lnTo>
+                <a:lnTo>
+                  <a:pt x="4052520" y="6858000"/>
+                </a:lnTo>
+                <a:lnTo>
+                  <a:pt x="4059369" y="6841549"/>
+                </a:lnTo>
+                <a:cubicBezTo>
+                  <a:pt x="4147276" y="6614016"/>
+                  <a:pt x="4224193" y="6380817"/>
+                  <a:pt x="4291518" y="6142729"/>
+                </a:cubicBezTo>
+                <a:cubicBezTo>
+                  <a:pt x="4350055" y="5935370"/>
+                  <a:pt x="4393256" y="5723695"/>
+                  <a:pt x="4443357" y="5513923"/>
+                </a:cubicBezTo>
+                <a:cubicBezTo>
+                  <a:pt x="4444541" y="5502788"/>
+                  <a:pt x="4445137" y="5491601"/>
+                  <a:pt x="4445146" y="5480401"/>
+                </a:cubicBezTo>
+                <a:cubicBezTo>
+                  <a:pt x="4408465" y="5607635"/>
+                  <a:pt x="4379196" y="5719759"/>
+                  <a:pt x="4344559" y="5830359"/>
+                </a:cubicBezTo>
+                <a:cubicBezTo>
+                  <a:pt x="4254261" y="6118381"/>
+                  <a:pt x="4150112" y="6398531"/>
+                  <a:pt x="4031702" y="6670527"/>
+                </a:cubicBezTo>
+                <a:lnTo>
+                  <a:pt x="3943824" y="6858000"/>
+                </a:lnTo>
+                <a:lnTo>
+                  <a:pt x="0" y="6858000"/>
+                </a:lnTo>
+                <a:close/>
+              </a:path>
+            </a:pathLst>
+          </a:custGeom>
+        </p:spPr>
+      </p:pic>
+      <p:sp>
+        <p:nvSpPr>
+          <p:cNvPr id="6" name="Slide Number Placeholder 5">
+            <a:extLst>
+              <a:ext uri="{FF2B5EF4-FFF2-40B4-BE49-F238E27FC236}">
+                <a16:creationId xmlns:a16="http://schemas.microsoft.com/office/drawing/2014/main" id="{6A41905E-B56B-DCBB-C0C1-53A1ADB62E0B}"/>
+              </a:ext>
+            </a:extLst>
+          </p:cNvPr>
+          <p:cNvSpPr>
+            <a:spLocks noGrp="1"/>
+          </p:cNvSpPr>
+          <p:nvPr>
+            <p:ph type="sldNum" sz="quarter" idx="12"/>
+          </p:nvPr>
+        </p:nvSpPr>
+        <p:spPr/>
+        <p:txBody>
+          <a:bodyPr/>
+          <a:lstStyle/>
+          <a:p>
+            <a:fld id="{03C731F9-C159-4852-9A74-0BE793153C89}" type="slidenum">
+              <a:rPr lang="en-US" smtClean="0"/>
+              <a:t>1</a:t>
+            </a:fld>
+            <a:endParaRPr lang="en-US"/>
+          </a:p>
+        </p:txBody>
+      </p:sp>
+    </p:spTree>
+    <p:extLst>
+      <p:ext uri="{BB962C8B-B14F-4D97-AF65-F5344CB8AC3E}">
+        <p14:creationId xmlns:p14="http://schemas.microsoft.com/office/powerpoint/2010/main" val="2255806145"/>
+      </p:ext>
+    </p:extLst>
+  </p:cSld>
+  <p:clrMapOvr>
+    <a:masterClrMapping/>
+  </p:clrMapOvr>
+</p:sld>
+</file>
+
+<file path=ppt/slides/slide10.xml><?xml version="1.0" encoding="utf-8"?>
+<p:sld xmlns:a="http://schemas.openxmlformats.org/drawingml/2006/main" xmlns:r="http://schemas.openxmlformats.org/officeDocument/2006/relationships" xmlns:p="http://schemas.openxmlformats.org/presentationml/2006/main">
+  <p:cSld>
+    <p:bg>
+      <p:bgPr>
+        <a:solidFill>
+          <a:schemeClr val="bg1"/>
+        </a:solidFill>
+        <a:effectLst/>
+      </p:bgPr>
+    </p:bg>
+    <p:spTree>
+      <p:nvGrpSpPr>
+        <p:cNvPr id="1" name=""/>
+        <p:cNvGrpSpPr/>
+        <p:nvPr/>
+      </p:nvGrpSpPr>
+      <p:grpSpPr>
+        <a:xfrm>
+          <a:off x="0" y="0"/>
+          <a:ext cx="0" cy="0"/>
+          <a:chOff x="0" y="0"/>
+          <a:chExt cx="0" cy="0"/>
+        </a:xfrm>
+      </p:grpSpPr>
+      <p:sp>
+        <p:nvSpPr>
+          <p:cNvPr id="28" name="Rectangle 27">
+            <a:extLst>
+              <a:ext uri="{FF2B5EF4-FFF2-40B4-BE49-F238E27FC236}">
+                <a16:creationId xmlns:a16="http://schemas.microsoft.com/office/drawing/2014/main" id="{F3060C83-F051-4F0E-ABAD-AA0DFC48B218}"/>
+              </a:ext>
+              <a:ext uri="{C183D7F6-B498-43B3-948B-1728B52AA6E4}">
+                <adec:decorative xmlns:adec="http://schemas.microsoft.com/office/drawing/2017/decorative" val="1"/>
+              </a:ext>
+            </a:extLst>
+          </p:cNvPr>
+          <p:cNvSpPr>
+            <a:spLocks noGrp="1" noRot="1" noChangeAspect="1" noMove="1" noResize="1" noEditPoints="1" noAdjustHandles="1" noChangeArrowheads="1" noChangeShapeType="1" noTextEdit="1"/>
+          </p:cNvSpPr>
+          <p:nvPr>
+            <p:extLst>
+              <p:ext uri="{386F3935-93C4-4BCD-93E2-E3B085C9AB24}">
+                <p16:designElem xmlns:p16="http://schemas.microsoft.com/office/powerpoint/2015/main" val="1"/>
+              </p:ext>
+            </p:extLst>
+          </p:nvPr>
+        </p:nvSpPr>
+        <p:spPr>
+          <a:xfrm>
+            <a:off x="0" y="0"/>
+            <a:ext cx="12192000" cy="6858000"/>
+          </a:xfrm>
+          <a:prstGeom prst="rect">
+            <a:avLst/>
+          </a:prstGeom>
+          <a:solidFill>
+            <a:schemeClr val="bg1"/>
+          </a:solidFill>
+          <a:ln>
+            <a:noFill/>
+          </a:ln>
+        </p:spPr>
+        <p:style>
+          <a:lnRef idx="2">
+            <a:schemeClr val="accent1">
+              <a:shade val="50000"/>
+            </a:schemeClr>
+          </a:lnRef>
+          <a:fillRef idx="1">
+            <a:schemeClr val="accent1"/>
+          </a:fillRef>
+          <a:effectRef idx="0">
+            <a:schemeClr val="accent1"/>
+          </a:effectRef>
+          <a:fontRef idx="minor">
+            <a:schemeClr val="lt1"/>
+          </a:fontRef>
+        </p:style>
+        <p:txBody>
+          <a:bodyPr rtlCol="0" anchor="ctr"/>
+          <a:lstStyle/>
+          <a:p>
+            <a:pPr algn="ctr"/>
+            <a:endParaRPr lang="en-US"/>
+          </a:p>
+        </p:txBody>
+      </p:sp>
+      <p:sp>
+        <p:nvSpPr>
+          <p:cNvPr id="30" name="Freeform: Shape 29">
+            <a:extLst>
+              <a:ext uri="{FF2B5EF4-FFF2-40B4-BE49-F238E27FC236}">
+                <a16:creationId xmlns:a16="http://schemas.microsoft.com/office/drawing/2014/main" id="{83C98ABE-055B-441F-B07E-44F97F083C39}"/>
+              </a:ext>
+              <a:ext uri="{C183D7F6-B498-43B3-948B-1728B52AA6E4}">
+                <adec:decorative xmlns:adec="http://schemas.microsoft.com/office/drawing/2017/decorative" val="1"/>
+              </a:ext>
+            </a:extLst>
+          </p:cNvPr>
+          <p:cNvSpPr>
+            <a:spLocks noGrp="1" noRot="1" noChangeAspect="1" noMove="1" noResize="1" noEditPoints="1" noAdjustHandles="1" noChangeArrowheads="1" noChangeShapeType="1" noTextEdit="1"/>
+          </p:cNvSpPr>
+          <p:nvPr>
+            <p:extLst>
+              <p:ext uri="{386F3935-93C4-4BCD-93E2-E3B085C9AB24}">
+                <p16:designElem xmlns:p16="http://schemas.microsoft.com/office/powerpoint/2015/main" val="1"/>
+              </p:ext>
+            </p:extLst>
+          </p:nvPr>
+        </p:nvSpPr>
+        <p:spPr>
+          <a:xfrm rot="18900000" flipH="1">
+            <a:off x="-376156" y="-253670"/>
+            <a:ext cx="1827638" cy="1376989"/>
+          </a:xfrm>
+          <a:custGeom>
+            <a:avLst/>
+            <a:gdLst>
+              <a:gd name="connsiteX0" fmla="*/ 0 w 1827638"/>
+              <a:gd name="connsiteY0" fmla="*/ 987379 h 1376989"/>
+              <a:gd name="connsiteX1" fmla="*/ 987379 w 1827638"/>
+              <a:gd name="connsiteY1" fmla="*/ 0 h 1376989"/>
+              <a:gd name="connsiteX2" fmla="*/ 1827638 w 1827638"/>
+              <a:gd name="connsiteY2" fmla="*/ 840260 h 1376989"/>
+              <a:gd name="connsiteX3" fmla="*/ 1827638 w 1827638"/>
+              <a:gd name="connsiteY3" fmla="*/ 1376989 h 1376989"/>
+              <a:gd name="connsiteX4" fmla="*/ 0 w 1827638"/>
+              <a:gd name="connsiteY4" fmla="*/ 1376989 h 1376989"/>
+            </a:gdLst>
+            <a:ahLst/>
+            <a:cxnLst>
+              <a:cxn ang="0">
+                <a:pos x="connsiteX0" y="connsiteY0"/>
+              </a:cxn>
+              <a:cxn ang="0">
+                <a:pos x="connsiteX1" y="connsiteY1"/>
+              </a:cxn>
+              <a:cxn ang="0">
+                <a:pos x="connsiteX2" y="connsiteY2"/>
+              </a:cxn>
+              <a:cxn ang="0">
+                <a:pos x="connsiteX3" y="connsiteY3"/>
+              </a:cxn>
+              <a:cxn ang="0">
+                <a:pos x="connsiteX4" y="connsiteY4"/>
+              </a:cxn>
+            </a:cxnLst>
+            <a:rect l="l" t="t" r="r" b="b"/>
+            <a:pathLst>
+              <a:path w="1827638" h="1376989">
+                <a:moveTo>
+                  <a:pt x="0" y="987379"/>
+                </a:moveTo>
+                <a:lnTo>
+                  <a:pt x="987379" y="0"/>
+                </a:lnTo>
+                <a:lnTo>
+                  <a:pt x="1827638" y="840260"/>
+                </a:lnTo>
+                <a:lnTo>
+                  <a:pt x="1827638" y="1376989"/>
+                </a:lnTo>
+                <a:lnTo>
+                  <a:pt x="0" y="1376989"/>
+                </a:lnTo>
+                <a:close/>
+              </a:path>
+            </a:pathLst>
+          </a:custGeom>
+          <a:solidFill>
+            <a:schemeClr val="accent1">
+              <a:alpha val="30000"/>
+            </a:schemeClr>
+          </a:solidFill>
+          <a:ln>
+            <a:noFill/>
+          </a:ln>
+        </p:spPr>
+        <p:style>
+          <a:lnRef idx="2">
+            <a:schemeClr val="accent1">
+              <a:shade val="50000"/>
+            </a:schemeClr>
+          </a:lnRef>
+          <a:fillRef idx="1">
+            <a:schemeClr val="accent1"/>
+          </a:fillRef>
+          <a:effectRef idx="0">
+            <a:schemeClr val="accent1"/>
+          </a:effectRef>
+          <a:fontRef idx="minor">
+            <a:schemeClr val="lt1"/>
+          </a:fontRef>
+        </p:style>
+        <p:txBody>
+          <a:bodyPr rtlCol="0" anchor="ctr"/>
+          <a:lstStyle/>
+          <a:p>
+            <a:pPr algn="ctr"/>
+            <a:endParaRPr lang="en-US"/>
+          </a:p>
+        </p:txBody>
+      </p:sp>
+      <p:sp>
+        <p:nvSpPr>
+          <p:cNvPr id="32" name="Rectangle 31">
+            <a:extLst>
+              <a:ext uri="{FF2B5EF4-FFF2-40B4-BE49-F238E27FC236}">
+                <a16:creationId xmlns:a16="http://schemas.microsoft.com/office/drawing/2014/main" id="{29FDB030-9B49-4CED-8CCD-4D99382388AC}"/>
+              </a:ext>
+              <a:ext uri="{C183D7F6-B498-43B3-948B-1728B52AA6E4}">
+                <adec:decorative xmlns:adec="http://schemas.microsoft.com/office/drawing/2017/decorative" val="1"/>
+              </a:ext>
+            </a:extLst>
+          </p:cNvPr>
+          <p:cNvSpPr>
+            <a:spLocks noGrp="1" noRot="1" noChangeAspect="1" noMove="1" noResize="1" noEditPoints="1" noAdjustHandles="1" noChangeArrowheads="1" noChangeShapeType="1" noTextEdit="1"/>
+          </p:cNvSpPr>
+          <p:nvPr>
+            <p:extLst>
+              <p:ext uri="{386F3935-93C4-4BCD-93E2-E3B085C9AB24}">
+                <p16:designElem xmlns:p16="http://schemas.microsoft.com/office/powerpoint/2015/main" val="1"/>
+              </p:ext>
+            </p:extLst>
+          </p:nvPr>
+        </p:nvSpPr>
+        <p:spPr>
+          <a:xfrm rot="18900000" flipH="1">
+            <a:off x="891641" y="422146"/>
+            <a:ext cx="645368" cy="645368"/>
+          </a:xfrm>
+          <a:prstGeom prst="rect">
+            <a:avLst/>
+          </a:prstGeom>
+          <a:solidFill>
+            <a:schemeClr val="accent1">
+              <a:alpha val="30000"/>
+            </a:schemeClr>
+          </a:solidFill>
+          <a:ln>
+            <a:noFill/>
+          </a:ln>
+        </p:spPr>
+        <p:style>
+          <a:lnRef idx="2">
+            <a:schemeClr val="accent1">
+              <a:shade val="50000"/>
+            </a:schemeClr>
+          </a:lnRef>
+          <a:fillRef idx="1">
+            <a:schemeClr val="accent1"/>
+          </a:fillRef>
+          <a:effectRef idx="0">
+            <a:schemeClr val="accent1"/>
+          </a:effectRef>
+          <a:fontRef idx="minor">
+            <a:schemeClr val="lt1"/>
+          </a:fontRef>
+        </p:style>
+        <p:txBody>
+          <a:bodyPr rtlCol="0" anchor="ctr"/>
+          <a:lstStyle/>
+          <a:p>
+            <a:pPr algn="ctr"/>
+            <a:endParaRPr lang="en-US"/>
+          </a:p>
+        </p:txBody>
+      </p:sp>
+      <p:sp>
+        <p:nvSpPr>
+          <p:cNvPr id="34" name="Rectangle 33">
+            <a:extLst>
+              <a:ext uri="{FF2B5EF4-FFF2-40B4-BE49-F238E27FC236}">
+                <a16:creationId xmlns:a16="http://schemas.microsoft.com/office/drawing/2014/main" id="{3783CA14-24A1-485C-8B30-D6A5D87987AD}"/>
+              </a:ext>
+              <a:ext uri="{C183D7F6-B498-43B3-948B-1728B52AA6E4}">
+                <adec:decorative xmlns:adec="http://schemas.microsoft.com/office/drawing/2017/decorative" val="1"/>
+              </a:ext>
+            </a:extLst>
+          </p:cNvPr>
+          <p:cNvSpPr>
+            <a:spLocks noGrp="1" noRot="1" noChangeAspect="1" noMove="1" noResize="1" noEditPoints="1" noAdjustHandles="1" noChangeArrowheads="1" noChangeShapeType="1" noTextEdit="1"/>
+          </p:cNvSpPr>
+          <p:nvPr>
+            <p:extLst>
+              <p:ext uri="{386F3935-93C4-4BCD-93E2-E3B085C9AB24}">
+                <p16:designElem xmlns:p16="http://schemas.microsoft.com/office/powerpoint/2015/main" val="1"/>
+              </p:ext>
+            </p:extLst>
+          </p:nvPr>
+        </p:nvSpPr>
+        <p:spPr>
+          <a:xfrm rot="18900000" flipH="1">
+            <a:off x="10043482" y="655140"/>
+            <a:ext cx="687472" cy="687472"/>
+          </a:xfrm>
+          <a:prstGeom prst="rect">
+            <a:avLst/>
+          </a:prstGeom>
+          <a:solidFill>
+            <a:schemeClr val="accent4">
+              <a:alpha val="30000"/>
+            </a:schemeClr>
+          </a:solidFill>
+          <a:ln>
+            <a:noFill/>
+          </a:ln>
+        </p:spPr>
+        <p:style>
+          <a:lnRef idx="2">
+            <a:schemeClr val="accent1">
+              <a:shade val="50000"/>
+            </a:schemeClr>
+          </a:lnRef>
+          <a:fillRef idx="1">
+            <a:schemeClr val="accent1"/>
+          </a:fillRef>
+          <a:effectRef idx="0">
+            <a:schemeClr val="accent1"/>
+          </a:effectRef>
+          <a:fontRef idx="minor">
+            <a:schemeClr val="lt1"/>
+          </a:fontRef>
+        </p:style>
+        <p:txBody>
+          <a:bodyPr rtlCol="0" anchor="ctr"/>
+          <a:lstStyle/>
+          <a:p>
+            <a:pPr algn="ctr"/>
+            <a:endParaRPr lang="en-US"/>
+          </a:p>
+        </p:txBody>
+      </p:sp>
+      <p:sp>
+        <p:nvSpPr>
+          <p:cNvPr id="36" name="Freeform: Shape 35">
+            <a:extLst>
+              <a:ext uri="{FF2B5EF4-FFF2-40B4-BE49-F238E27FC236}">
+                <a16:creationId xmlns:a16="http://schemas.microsoft.com/office/drawing/2014/main" id="{9A97C86A-04D6-40F7-AE84-31AB43E6A846}"/>
+              </a:ext>
+              <a:ext uri="{C183D7F6-B498-43B3-948B-1728B52AA6E4}">
+                <adec:decorative xmlns:adec="http://schemas.microsoft.com/office/drawing/2017/decorative" val="1"/>
+              </a:ext>
+            </a:extLst>
+          </p:cNvPr>
+          <p:cNvSpPr>
+            <a:spLocks noGrp="1" noRot="1" noChangeAspect="1" noMove="1" noResize="1" noEditPoints="1" noAdjustHandles="1" noChangeArrowheads="1" noChangeShapeType="1" noTextEdit="1"/>
+          </p:cNvSpPr>
+          <p:nvPr>
+            <p:extLst>
+              <p:ext uri="{386F3935-93C4-4BCD-93E2-E3B085C9AB24}">
+                <p16:designElem xmlns:p16="http://schemas.microsoft.com/office/powerpoint/2015/main" val="1"/>
+              </p:ext>
+            </p:extLst>
+          </p:nvPr>
+        </p:nvSpPr>
+        <p:spPr>
+          <a:xfrm rot="10800000" flipH="1">
+            <a:off x="9356643" y="0"/>
+            <a:ext cx="2835357" cy="1480837"/>
+          </a:xfrm>
+          <a:custGeom>
+            <a:avLst/>
+            <a:gdLst>
+              <a:gd name="connsiteX0" fmla="*/ 2835357 w 2835357"/>
+              <a:gd name="connsiteY0" fmla="*/ 1480837 h 1480837"/>
+              <a:gd name="connsiteX1" fmla="*/ 0 w 2835357"/>
+              <a:gd name="connsiteY1" fmla="*/ 1480837 h 1480837"/>
+              <a:gd name="connsiteX2" fmla="*/ 1552727 w 2835357"/>
+              <a:gd name="connsiteY2" fmla="*/ 0 h 1480837"/>
+              <a:gd name="connsiteX3" fmla="*/ 2835357 w 2835357"/>
+              <a:gd name="connsiteY3" fmla="*/ 1223245 h 1480837"/>
+            </a:gdLst>
+            <a:ahLst/>
+            <a:cxnLst>
+              <a:cxn ang="0">
+                <a:pos x="connsiteX0" y="connsiteY0"/>
+              </a:cxn>
+              <a:cxn ang="0">
+                <a:pos x="connsiteX1" y="connsiteY1"/>
+              </a:cxn>
+              <a:cxn ang="0">
+                <a:pos x="connsiteX2" y="connsiteY2"/>
+              </a:cxn>
+              <a:cxn ang="0">
+                <a:pos x="connsiteX3" y="connsiteY3"/>
+              </a:cxn>
+            </a:cxnLst>
+            <a:rect l="l" t="t" r="r" b="b"/>
+            <a:pathLst>
+              <a:path w="2835357" h="1480837">
+                <a:moveTo>
+                  <a:pt x="2835357" y="1480837"/>
+                </a:moveTo>
+                <a:lnTo>
+                  <a:pt x="0" y="1480837"/>
+                </a:lnTo>
+                <a:lnTo>
+                  <a:pt x="1552727" y="0"/>
+                </a:lnTo>
+                <a:lnTo>
+                  <a:pt x="2835357" y="1223245"/>
+                </a:lnTo>
+                <a:close/>
+              </a:path>
+            </a:pathLst>
+          </a:custGeom>
+          <a:solidFill>
+            <a:schemeClr val="accent4">
+              <a:alpha val="30000"/>
+            </a:schemeClr>
+          </a:solidFill>
+          <a:ln>
+            <a:noFill/>
+          </a:ln>
+        </p:spPr>
+        <p:style>
+          <a:lnRef idx="2">
+            <a:schemeClr val="accent1">
+              <a:shade val="50000"/>
+            </a:schemeClr>
+          </a:lnRef>
+          <a:fillRef idx="1">
+            <a:schemeClr val="accent1"/>
+          </a:fillRef>
+          <a:effectRef idx="0">
+            <a:schemeClr val="accent1"/>
+          </a:effectRef>
+          <a:fontRef idx="minor">
+            <a:schemeClr val="lt1"/>
+          </a:fontRef>
+        </p:style>
+        <p:txBody>
+          <a:bodyPr wrap="square" rtlCol="0" anchor="ctr">
+            <a:noAutofit/>
+          </a:bodyPr>
+          <a:lstStyle/>
+          <a:p>
+            <a:pPr algn="ctr"/>
+            <a:endParaRPr lang="en-US"/>
+          </a:p>
+        </p:txBody>
+      </p:sp>
+      <p:sp>
+        <p:nvSpPr>
+          <p:cNvPr id="38" name="Isosceles Triangle 37">
+            <a:extLst>
+              <a:ext uri="{FF2B5EF4-FFF2-40B4-BE49-F238E27FC236}">
+                <a16:creationId xmlns:a16="http://schemas.microsoft.com/office/drawing/2014/main" id="{FF9F2414-84E8-453E-B1F3-389FDE8192D9}"/>
+              </a:ext>
+              <a:ext uri="{C183D7F6-B498-43B3-948B-1728B52AA6E4}">
+                <adec:decorative xmlns:adec="http://schemas.microsoft.com/office/drawing/2017/decorative" val="1"/>
+              </a:ext>
+            </a:extLst>
+          </p:cNvPr>
+          <p:cNvSpPr>
+            <a:spLocks noGrp="1" noRot="1" noChangeAspect="1" noMove="1" noResize="1" noEditPoints="1" noAdjustHandles="1" noChangeArrowheads="1" noChangeShapeType="1" noTextEdit="1"/>
+          </p:cNvSpPr>
+          <p:nvPr>
+            <p:extLst>
+              <p:ext uri="{386F3935-93C4-4BCD-93E2-E3B085C9AB24}">
+                <p16:designElem xmlns:p16="http://schemas.microsoft.com/office/powerpoint/2015/main" val="1"/>
+              </p:ext>
+            </p:extLst>
+          </p:nvPr>
+        </p:nvSpPr>
+        <p:spPr>
+          <a:xfrm flipH="1">
+            <a:off x="7976344" y="6115501"/>
+            <a:ext cx="1494513" cy="742499"/>
+          </a:xfrm>
+          <a:prstGeom prst="triangle">
+            <a:avLst/>
+          </a:prstGeom>
+          <a:solidFill>
+            <a:schemeClr val="accent1">
+              <a:alpha val="30000"/>
+            </a:schemeClr>
+          </a:solidFill>
+          <a:ln>
+            <a:noFill/>
+          </a:ln>
+        </p:spPr>
+        <p:style>
+          <a:lnRef idx="2">
+            <a:schemeClr val="accent1">
+              <a:shade val="50000"/>
+            </a:schemeClr>
+          </a:lnRef>
+          <a:fillRef idx="1">
+            <a:schemeClr val="accent1"/>
+          </a:fillRef>
+          <a:effectRef idx="0">
+            <a:schemeClr val="accent1"/>
+          </a:effectRef>
+          <a:fontRef idx="minor">
+            <a:schemeClr val="lt1"/>
+          </a:fontRef>
+        </p:style>
+        <p:txBody>
+          <a:bodyPr rtlCol="0" anchor="ctr"/>
+          <a:lstStyle/>
+          <a:p>
+            <a:pPr algn="ctr"/>
+            <a:endParaRPr lang="en-US"/>
+          </a:p>
+        </p:txBody>
+      </p:sp>
+      <p:pic>
+        <p:nvPicPr>
+          <p:cNvPr id="23" name="Picture 22">
+            <a:extLst>
+              <a:ext uri="{FF2B5EF4-FFF2-40B4-BE49-F238E27FC236}">
+                <a16:creationId xmlns:a16="http://schemas.microsoft.com/office/drawing/2014/main" id="{C6AD9238-36FE-8688-48DE-A1BBF5C85AA1}"/>
+              </a:ext>
+            </a:extLst>
+          </p:cNvPr>
+          <p:cNvPicPr>
+            <a:picLocks noChangeAspect="1"/>
+          </p:cNvPicPr>
+          <p:nvPr/>
+        </p:nvPicPr>
+        <p:blipFill>
+          <a:blip r:embed="rId3"/>
+          <a:stretch>
+            <a:fillRect/>
+          </a:stretch>
+        </p:blipFill>
+        <p:spPr>
+          <a:xfrm>
+            <a:off x="643467" y="1302512"/>
+            <a:ext cx="10905066" cy="4252975"/>
+          </a:xfrm>
+          <a:prstGeom prst="rect">
+            <a:avLst/>
+          </a:prstGeom>
+          <a:ln>
+            <a:noFill/>
+          </a:ln>
+        </p:spPr>
+      </p:pic>
+      <p:sp>
+        <p:nvSpPr>
+          <p:cNvPr id="40" name="Isosceles Triangle 39">
+            <a:extLst>
+              <a:ext uri="{FF2B5EF4-FFF2-40B4-BE49-F238E27FC236}">
+                <a16:creationId xmlns:a16="http://schemas.microsoft.com/office/drawing/2014/main" id="{3ECA69A1-7536-43AC-85EF-C7106179F5ED}"/>
+              </a:ext>
+              <a:ext uri="{C183D7F6-B498-43B3-948B-1728B52AA6E4}">
+                <adec:decorative xmlns:adec="http://schemas.microsoft.com/office/drawing/2017/decorative" val="1"/>
+              </a:ext>
+            </a:extLst>
+          </p:cNvPr>
+          <p:cNvSpPr>
+            <a:spLocks noGrp="1" noRot="1" noChangeAspect="1" noMove="1" noResize="1" noEditPoints="1" noAdjustHandles="1" noChangeArrowheads="1" noChangeShapeType="1" noTextEdit="1"/>
+          </p:cNvSpPr>
+          <p:nvPr>
+            <p:extLst>
+              <p:ext uri="{386F3935-93C4-4BCD-93E2-E3B085C9AB24}">
+                <p16:designElem xmlns:p16="http://schemas.microsoft.com/office/powerpoint/2015/main" val="1"/>
+              </p:ext>
+            </p:extLst>
+          </p:nvPr>
+        </p:nvSpPr>
+        <p:spPr>
+          <a:xfrm flipH="1">
+            <a:off x="7604080" y="6453143"/>
+            <a:ext cx="814903" cy="404857"/>
+          </a:xfrm>
+          <a:prstGeom prst="triangle">
+            <a:avLst/>
+          </a:prstGeom>
+          <a:solidFill>
+            <a:schemeClr val="accent1">
+              <a:alpha val="30000"/>
+            </a:schemeClr>
+          </a:solidFill>
+          <a:ln>
+            <a:noFill/>
+          </a:ln>
+        </p:spPr>
+        <p:style>
+          <a:lnRef idx="2">
+            <a:schemeClr val="accent1">
+              <a:shade val="50000"/>
+            </a:schemeClr>
+          </a:lnRef>
+          <a:fillRef idx="1">
+            <a:schemeClr val="accent1"/>
+          </a:fillRef>
+          <a:effectRef idx="0">
+            <a:schemeClr val="accent1"/>
+          </a:effectRef>
+          <a:fontRef idx="minor">
+            <a:schemeClr val="lt1"/>
+          </a:fontRef>
+        </p:style>
+        <p:txBody>
+          <a:bodyPr rtlCol="0" anchor="ctr"/>
+          <a:lstStyle/>
+          <a:p>
+            <a:pPr algn="ctr"/>
+            <a:endParaRPr lang="en-US"/>
+          </a:p>
+        </p:txBody>
+      </p:sp>
+    </p:spTree>
+    <p:extLst>
+      <p:ext uri="{BB962C8B-B14F-4D97-AF65-F5344CB8AC3E}">
+        <p14:creationId xmlns:p14="http://schemas.microsoft.com/office/powerpoint/2010/main" val="3902131348"/>
+      </p:ext>
+    </p:extLst>
+  </p:cSld>
+  <p:clrMapOvr>
+    <a:masterClrMapping/>
+  </p:clrMapOvr>
+</p:sld>
+</file>
+
+<file path=ppt/slides/slide11.xml><?xml version="1.0" encoding="utf-8"?>
+<p:sld xmlns:a="http://schemas.openxmlformats.org/drawingml/2006/main" xmlns:r="http://schemas.openxmlformats.org/officeDocument/2006/relationships" xmlns:p="http://schemas.openxmlformats.org/presentationml/2006/main">
+  <p:cSld>
+    <p:spTree>
+      <p:nvGrpSpPr>
+        <p:cNvPr id="1" name=""/>
+        <p:cNvGrpSpPr/>
+        <p:nvPr/>
+      </p:nvGrpSpPr>
+      <p:grpSpPr>
+        <a:xfrm>
+          <a:off x="0" y="0"/>
+          <a:ext cx="0" cy="0"/>
+          <a:chOff x="0" y="0"/>
+          <a:chExt cx="0" cy="0"/>
+        </a:xfrm>
+      </p:grpSpPr>
+      <p:pic>
+        <p:nvPicPr>
+          <p:cNvPr id="2" name="Image 0" descr="preencoded.png"/>
+          <p:cNvPicPr>
+            <a:picLocks noChangeAspect="1"/>
+          </p:cNvPicPr>
+          <p:nvPr/>
+        </p:nvPicPr>
+        <p:blipFill>
+          <a:blip r:embed="rId3"/>
+          <a:stretch>
+            <a:fillRect/>
+          </a:stretch>
+        </p:blipFill>
+        <p:spPr>
+          <a:xfrm>
+            <a:off x="0" y="0"/>
+            <a:ext cx="12192000" cy="6807573"/>
+          </a:xfrm>
+          <a:prstGeom prst="rect">
+            <a:avLst/>
+          </a:prstGeom>
+        </p:spPr>
+      </p:pic>
+      <p:sp>
+        <p:nvSpPr>
+          <p:cNvPr id="3" name="Shape 0"/>
+          <p:cNvSpPr/>
+          <p:nvPr/>
+        </p:nvSpPr>
+        <p:spPr>
+          <a:xfrm>
+            <a:off x="0" y="15902"/>
+            <a:ext cx="12192000" cy="6858000"/>
+          </a:xfrm>
+          <a:prstGeom prst="rect">
+            <a:avLst/>
+          </a:prstGeom>
+          <a:solidFill>
+            <a:srgbClr val="FFFFFF">
+              <a:alpha val="75000"/>
+            </a:srgbClr>
+          </a:solidFill>
+          <a:ln w="7620">
+            <a:solidFill>
+              <a:srgbClr val="FFFFFF">
+                <a:alpha val="64000"/>
+              </a:srgbClr>
+            </a:solidFill>
+            <a:prstDash val="solid"/>
+          </a:ln>
+        </p:spPr>
+        <p:txBody>
+          <a:bodyPr/>
+          <a:lstStyle/>
+          <a:p>
+            <a:endParaRPr lang="en-US"/>
+          </a:p>
+        </p:txBody>
+      </p:sp>
+      <p:sp>
+        <p:nvSpPr>
+          <p:cNvPr id="4" name="Text 1"/>
+          <p:cNvSpPr/>
+          <p:nvPr/>
+        </p:nvSpPr>
+        <p:spPr>
+          <a:xfrm>
+            <a:off x="694333" y="1819391"/>
+            <a:ext cx="3703241" cy="597337"/>
+          </a:xfrm>
+          <a:prstGeom prst="rect">
+            <a:avLst/>
+          </a:prstGeom>
+          <a:noFill/>
+          <a:ln/>
+        </p:spPr>
+        <p:txBody>
+          <a:bodyPr wrap="none" rtlCol="0" anchor="t"/>
+          <a:lstStyle/>
+          <a:p>
+            <a:pPr>
+              <a:lnSpc>
+                <a:spcPts val="4738"/>
+              </a:lnSpc>
+            </a:pPr>
+            <a:r>
+              <a:rPr lang="en-US" sz="3645">
+                <a:solidFill>
+                  <a:srgbClr val="312F2B"/>
+                </a:solidFill>
+                <a:latin typeface="Georgia" pitchFamily="34" charset="0"/>
+                <a:ea typeface="Georgia" pitchFamily="34" charset="-122"/>
+                <a:cs typeface="Georgia" pitchFamily="34" charset="-120"/>
+              </a:rPr>
+              <a:t>Responsibilities</a:t>
+            </a:r>
+            <a:endParaRPr lang="en-US" sz="3645"/>
+          </a:p>
+        </p:txBody>
+      </p:sp>
+      <p:sp>
+        <p:nvSpPr>
+          <p:cNvPr id="5" name="Shape 2"/>
+          <p:cNvSpPr/>
+          <p:nvPr/>
+        </p:nvSpPr>
+        <p:spPr>
+          <a:xfrm>
+            <a:off x="694332" y="2821025"/>
+            <a:ext cx="3477717" cy="2363223"/>
+          </a:xfrm>
+          <a:prstGeom prst="roundRect">
+            <a:avLst>
+              <a:gd name="adj" fmla="val 2110"/>
+            </a:avLst>
+          </a:prstGeom>
+          <a:solidFill>
+            <a:srgbClr val="E8E8E3"/>
+          </a:solidFill>
+          <a:ln w="7620">
+            <a:solidFill>
+              <a:srgbClr val="D1D1C7"/>
+            </a:solidFill>
+            <a:prstDash val="solid"/>
+          </a:ln>
+        </p:spPr>
+        <p:txBody>
+          <a:bodyPr/>
+          <a:lstStyle/>
+          <a:p>
+            <a:endParaRPr lang="en-US"/>
+          </a:p>
+        </p:txBody>
+      </p:sp>
+      <p:sp>
+        <p:nvSpPr>
+          <p:cNvPr id="6" name="Text 3"/>
+          <p:cNvSpPr/>
+          <p:nvPr/>
+        </p:nvSpPr>
+        <p:spPr>
+          <a:xfrm>
+            <a:off x="885825" y="3011111"/>
+            <a:ext cx="1851620" cy="298619"/>
+          </a:xfrm>
+          <a:prstGeom prst="rect">
+            <a:avLst/>
+          </a:prstGeom>
+          <a:noFill/>
+          <a:ln/>
+        </p:spPr>
+        <p:txBody>
+          <a:bodyPr wrap="none" rtlCol="0" anchor="t"/>
+          <a:lstStyle/>
+          <a:p>
+            <a:pPr>
+              <a:lnSpc>
+                <a:spcPts val="2369"/>
+              </a:lnSpc>
+            </a:pPr>
+            <a:r>
+              <a:rPr lang="en-US" sz="1822">
+                <a:solidFill>
+                  <a:srgbClr val="272525"/>
+                </a:solidFill>
+                <a:latin typeface="Georgia" pitchFamily="34" charset="0"/>
+                <a:ea typeface="Georgia" pitchFamily="34" charset="-122"/>
+                <a:cs typeface="Georgia" pitchFamily="34" charset="-120"/>
+              </a:rPr>
+              <a:t>Stay Informed</a:t>
+            </a:r>
+            <a:endParaRPr lang="en-US" sz="1822"/>
+          </a:p>
+        </p:txBody>
+      </p:sp>
+      <p:sp>
+        <p:nvSpPr>
+          <p:cNvPr id="7" name="Text 4"/>
+          <p:cNvSpPr/>
+          <p:nvPr/>
+        </p:nvSpPr>
+        <p:spPr>
+          <a:xfrm>
+            <a:off x="885825" y="3475093"/>
+            <a:ext cx="3094732" cy="992180"/>
+          </a:xfrm>
+          <a:prstGeom prst="rect">
+            <a:avLst/>
+          </a:prstGeom>
+          <a:noFill/>
+          <a:ln/>
+        </p:spPr>
+        <p:txBody>
+          <a:bodyPr wrap="square" rtlCol="0" anchor="t"/>
+          <a:lstStyle/>
+          <a:p>
+            <a:pPr>
+              <a:lnSpc>
+                <a:spcPts val="2624"/>
+              </a:lnSpc>
+            </a:pPr>
+            <a:r>
+              <a:rPr lang="en-US" sz="1458">
+                <a:solidFill>
+                  <a:srgbClr val="272525"/>
+                </a:solidFill>
+                <a:latin typeface="Lato" pitchFamily="34" charset="0"/>
+                <a:ea typeface="Lato" pitchFamily="34" charset="-122"/>
+                <a:cs typeface="Lato" pitchFamily="34" charset="-120"/>
+              </a:rPr>
+              <a:t>Be aware of AQI updates in your area and how they might impact your health and daily routine.</a:t>
+            </a:r>
+            <a:endParaRPr lang="en-US" sz="1458"/>
+          </a:p>
+        </p:txBody>
+      </p:sp>
+      <p:sp>
+        <p:nvSpPr>
+          <p:cNvPr id="8" name="Shape 5"/>
+          <p:cNvSpPr/>
+          <p:nvPr/>
+        </p:nvSpPr>
+        <p:spPr>
+          <a:xfrm>
+            <a:off x="4357192" y="2821026"/>
+            <a:ext cx="3477717" cy="2363224"/>
+          </a:xfrm>
+          <a:prstGeom prst="roundRect">
+            <a:avLst>
+              <a:gd name="adj" fmla="val 2110"/>
+            </a:avLst>
+          </a:prstGeom>
+          <a:solidFill>
+            <a:srgbClr val="E8E8E3"/>
+          </a:solidFill>
+          <a:ln w="7620">
+            <a:solidFill>
+              <a:srgbClr val="D1D1C7"/>
+            </a:solidFill>
+            <a:prstDash val="solid"/>
+          </a:ln>
+        </p:spPr>
+        <p:txBody>
+          <a:bodyPr/>
+          <a:lstStyle/>
+          <a:p>
+            <a:endParaRPr lang="en-US"/>
+          </a:p>
+        </p:txBody>
+      </p:sp>
+      <p:sp>
+        <p:nvSpPr>
+          <p:cNvPr id="9" name="Text 6"/>
+          <p:cNvSpPr/>
+          <p:nvPr/>
+        </p:nvSpPr>
+        <p:spPr>
+          <a:xfrm>
+            <a:off x="4548683" y="3011111"/>
+            <a:ext cx="1851620" cy="298619"/>
+          </a:xfrm>
+          <a:prstGeom prst="rect">
+            <a:avLst/>
+          </a:prstGeom>
+          <a:noFill/>
+          <a:ln/>
+        </p:spPr>
+        <p:txBody>
+          <a:bodyPr wrap="none" rtlCol="0" anchor="t"/>
+          <a:lstStyle/>
+          <a:p>
+            <a:pPr>
+              <a:lnSpc>
+                <a:spcPts val="2369"/>
+              </a:lnSpc>
+            </a:pPr>
+            <a:r>
+              <a:rPr lang="en-US" sz="1822">
+                <a:solidFill>
+                  <a:srgbClr val="272525"/>
+                </a:solidFill>
+                <a:latin typeface="Georgia" pitchFamily="34" charset="0"/>
+                <a:ea typeface="Georgia" pitchFamily="34" charset="-122"/>
+                <a:cs typeface="Georgia" pitchFamily="34" charset="-120"/>
+              </a:rPr>
+              <a:t>Take Action</a:t>
+            </a:r>
+            <a:endParaRPr lang="en-US" sz="1822"/>
+          </a:p>
+        </p:txBody>
+      </p:sp>
+      <p:sp>
+        <p:nvSpPr>
+          <p:cNvPr id="10" name="Text 7"/>
+          <p:cNvSpPr/>
+          <p:nvPr/>
+        </p:nvSpPr>
+        <p:spPr>
+          <a:xfrm>
+            <a:off x="4548683" y="3475093"/>
+            <a:ext cx="3094732" cy="1322907"/>
+          </a:xfrm>
+          <a:prstGeom prst="rect">
+            <a:avLst/>
+          </a:prstGeom>
+          <a:noFill/>
+          <a:ln/>
+        </p:spPr>
+        <p:txBody>
+          <a:bodyPr wrap="square" rtlCol="0" anchor="t"/>
+          <a:lstStyle/>
+          <a:p>
+            <a:pPr>
+              <a:lnSpc>
+                <a:spcPts val="2624"/>
+              </a:lnSpc>
+            </a:pPr>
+            <a:r>
+              <a:rPr lang="en-US" sz="1458">
+                <a:solidFill>
+                  <a:srgbClr val="272525"/>
+                </a:solidFill>
+                <a:latin typeface="Lato" pitchFamily="34" charset="0"/>
+                <a:ea typeface="Lato" pitchFamily="34" charset="-122"/>
+                <a:cs typeface="Lato" pitchFamily="34" charset="-120"/>
+              </a:rPr>
+              <a:t>Take steps to reduce your personal contribution to air pollution, such as recycling, using public transport, and running your home energy efficiently.</a:t>
+            </a:r>
+            <a:endParaRPr lang="en-US" sz="1458"/>
+          </a:p>
+        </p:txBody>
+      </p:sp>
+      <p:sp>
+        <p:nvSpPr>
+          <p:cNvPr id="11" name="Shape 8"/>
+          <p:cNvSpPr/>
+          <p:nvPr/>
+        </p:nvSpPr>
+        <p:spPr>
+          <a:xfrm>
+            <a:off x="8020050" y="2821026"/>
+            <a:ext cx="3477717" cy="2363222"/>
+          </a:xfrm>
+          <a:prstGeom prst="roundRect">
+            <a:avLst>
+              <a:gd name="adj" fmla="val 2110"/>
+            </a:avLst>
+          </a:prstGeom>
+          <a:solidFill>
+            <a:srgbClr val="E8E8E3"/>
+          </a:solidFill>
+          <a:ln w="7620">
+            <a:solidFill>
+              <a:srgbClr val="D1D1C7"/>
+            </a:solidFill>
+            <a:prstDash val="solid"/>
+          </a:ln>
+        </p:spPr>
+        <p:txBody>
+          <a:bodyPr/>
+          <a:lstStyle/>
+          <a:p>
+            <a:endParaRPr lang="en-US"/>
+          </a:p>
+        </p:txBody>
+      </p:sp>
+      <p:sp>
+        <p:nvSpPr>
+          <p:cNvPr id="12" name="Text 9"/>
+          <p:cNvSpPr/>
+          <p:nvPr/>
+        </p:nvSpPr>
+        <p:spPr>
+          <a:xfrm>
+            <a:off x="8211543" y="3011111"/>
+            <a:ext cx="1851620" cy="298619"/>
+          </a:xfrm>
+          <a:prstGeom prst="rect">
+            <a:avLst/>
+          </a:prstGeom>
+          <a:noFill/>
+          <a:ln/>
+        </p:spPr>
+        <p:txBody>
+          <a:bodyPr wrap="none" rtlCol="0" anchor="t"/>
+          <a:lstStyle/>
+          <a:p>
+            <a:pPr>
+              <a:lnSpc>
+                <a:spcPts val="2369"/>
+              </a:lnSpc>
+            </a:pPr>
+            <a:r>
+              <a:rPr lang="en-US" sz="1822">
+                <a:solidFill>
+                  <a:srgbClr val="272525"/>
+                </a:solidFill>
+                <a:latin typeface="Georgia" pitchFamily="34" charset="0"/>
+                <a:ea typeface="Georgia" pitchFamily="34" charset="-122"/>
+                <a:cs typeface="Georgia" pitchFamily="34" charset="-120"/>
+              </a:rPr>
+              <a:t>Spread the Word</a:t>
+            </a:r>
+            <a:endParaRPr lang="en-US" sz="1822"/>
+          </a:p>
+        </p:txBody>
+      </p:sp>
+      <p:sp>
+        <p:nvSpPr>
+          <p:cNvPr id="13" name="Text 10"/>
+          <p:cNvSpPr/>
+          <p:nvPr/>
+        </p:nvSpPr>
+        <p:spPr>
+          <a:xfrm>
+            <a:off x="8211542" y="3475093"/>
+            <a:ext cx="3094732" cy="992180"/>
+          </a:xfrm>
+          <a:prstGeom prst="rect">
+            <a:avLst/>
+          </a:prstGeom>
+          <a:noFill/>
+          <a:ln/>
+        </p:spPr>
+        <p:txBody>
+          <a:bodyPr wrap="square" rtlCol="0" anchor="t"/>
+          <a:lstStyle/>
+          <a:p>
+            <a:pPr>
+              <a:lnSpc>
+                <a:spcPts val="2624"/>
+              </a:lnSpc>
+            </a:pPr>
+            <a:r>
+              <a:rPr lang="en-US" sz="1458">
+                <a:solidFill>
+                  <a:srgbClr val="272525"/>
+                </a:solidFill>
+                <a:latin typeface="Lato" pitchFamily="34" charset="0"/>
+                <a:ea typeface="Lato" pitchFamily="34" charset="-122"/>
+                <a:cs typeface="Lato" pitchFamily="34" charset="-120"/>
+              </a:rPr>
+              <a:t>Help raise awareness about AQI and its impact on human health and the environment.</a:t>
+            </a:r>
+            <a:endParaRPr lang="en-US" sz="1458"/>
+          </a:p>
+        </p:txBody>
+      </p:sp>
+    </p:spTree>
+  </p:cSld>
+  <p:clrMapOvr>
+    <a:masterClrMapping/>
+  </p:clrMapOvr>
+</p:sld>
+</file>
+
+<file path=ppt/slides/slide2.xml><?xml version="1.0" encoding="utf-8"?>
+<p:sld xmlns:a="http://schemas.openxmlformats.org/drawingml/2006/main" xmlns:r="http://schemas.openxmlformats.org/officeDocument/2006/relationships" xmlns:p="http://schemas.openxmlformats.org/presentationml/2006/main">
+  <p:cSld>
+    <p:spTree>
+      <p:nvGrpSpPr>
+        <p:cNvPr id="1" name="">
+          <a:extLst>
+            <a:ext uri="{FF2B5EF4-FFF2-40B4-BE49-F238E27FC236}">
+              <a16:creationId xmlns:a16="http://schemas.microsoft.com/office/drawing/2014/main" id="{FED22B29-E1F8-1820-72B6-FAD0F556822F}"/>
+            </a:ext>
+          </a:extLst>
+        </p:cNvPr>
+        <p:cNvGrpSpPr/>
+        <p:nvPr/>
+      </p:nvGrpSpPr>
+      <p:grpSpPr>
+        <a:xfrm>
+          <a:off x="0" y="0"/>
+          <a:ext cx="0" cy="0"/>
+          <a:chOff x="0" y="0"/>
+          <a:chExt cx="0" cy="0"/>
+        </a:xfrm>
+      </p:grpSpPr>
+      <p:sp>
+        <p:nvSpPr>
+          <p:cNvPr id="2" name="Title 1">
+            <a:extLst>
+              <a:ext uri="{FF2B5EF4-FFF2-40B4-BE49-F238E27FC236}">
+                <a16:creationId xmlns:a16="http://schemas.microsoft.com/office/drawing/2014/main" id="{8842C5DB-F9E9-BD85-2F40-4F92C1B71526}"/>
+              </a:ext>
+            </a:extLst>
+          </p:cNvPr>
+          <p:cNvSpPr>
+            <a:spLocks noGrp="1"/>
+          </p:cNvSpPr>
+          <p:nvPr>
+            <p:ph type="title"/>
+          </p:nvPr>
+        </p:nvSpPr>
+        <p:spPr>
+          <a:xfrm>
+            <a:off x="5297762" y="640080"/>
+            <a:ext cx="6251110" cy="3566160"/>
+          </a:xfrm>
+        </p:spPr>
+        <p:txBody>
+          <a:bodyPr vert="horz" lIns="91440" tIns="45720" rIns="91440" bIns="45720" rtlCol="0" anchor="b">
+            <a:normAutofit/>
+          </a:bodyPr>
+          <a:lstStyle/>
+          <a:p>
+            <a:r>
+              <a:rPr lang="en-US" sz="5400"/>
+              <a:t>Let’s play a game</a:t>
+            </a:r>
+          </a:p>
+        </p:txBody>
+      </p:sp>
+      <p:sp>
+        <p:nvSpPr>
+          <p:cNvPr id="3" name="Content Placeholder 2">
+            <a:extLst>
+              <a:ext uri="{FF2B5EF4-FFF2-40B4-BE49-F238E27FC236}">
+                <a16:creationId xmlns:a16="http://schemas.microsoft.com/office/drawing/2014/main" id="{BE96B901-7D1C-21D3-E94D-D4DD51A8E5F9}"/>
+              </a:ext>
+            </a:extLst>
+          </p:cNvPr>
+          <p:cNvSpPr>
+            <a:spLocks noGrp="1"/>
+          </p:cNvSpPr>
+          <p:nvPr>
+            <p:ph type="body" idx="1"/>
+          </p:nvPr>
+        </p:nvSpPr>
+        <p:spPr>
+          <a:xfrm>
+            <a:off x="5297760" y="4636008"/>
+            <a:ext cx="6251111" cy="1572768"/>
+          </a:xfrm>
+        </p:spPr>
+        <p:txBody>
+          <a:bodyPr vert="horz" lIns="91440" tIns="45720" rIns="91440" bIns="45720" rtlCol="0">
+            <a:normAutofit/>
+          </a:bodyPr>
+          <a:lstStyle/>
+          <a:p>
+            <a:r>
+              <a:rPr lang="en-US" dirty="0">
+                <a:solidFill>
+                  <a:schemeClr val="tx1"/>
+                </a:solidFill>
+              </a:rPr>
+              <a:t>Everyone write your name on a sticky note and then place it on the paper in the next empty box</a:t>
+            </a:r>
+          </a:p>
+        </p:txBody>
+      </p:sp>
+      <p:pic>
+        <p:nvPicPr>
+          <p:cNvPr id="5" name="Picture 4" descr="A stack of dice on a boardgame">
+            <a:extLst>
+              <a:ext uri="{FF2B5EF4-FFF2-40B4-BE49-F238E27FC236}">
+                <a16:creationId xmlns:a16="http://schemas.microsoft.com/office/drawing/2014/main" id="{210C529F-E339-2F2A-F71E-3C4DF799C67A}"/>
+              </a:ext>
+            </a:extLst>
+          </p:cNvPr>
+          <p:cNvPicPr>
+            <a:picLocks noChangeAspect="1"/>
+          </p:cNvPicPr>
+          <p:nvPr/>
+        </p:nvPicPr>
+        <p:blipFill rotWithShape="1">
+          <a:blip r:embed="rId2"/>
+          <a:srcRect l="10190" r="21899"/>
+          <a:stretch/>
+        </p:blipFill>
+        <p:spPr>
+          <a:xfrm>
+            <a:off x="1" y="10"/>
+            <a:ext cx="4657344" cy="6857990"/>
+          </a:xfrm>
+          <a:custGeom>
+            <a:avLst/>
+            <a:gdLst/>
+            <a:ahLst/>
+            <a:cxnLst/>
+            <a:rect l="l" t="t" r="r" b="b"/>
+            <a:pathLst>
+              <a:path w="4657344" h="6858000">
+                <a:moveTo>
+                  <a:pt x="0" y="0"/>
+                </a:moveTo>
+                <a:lnTo>
+                  <a:pt x="3429755" y="0"/>
+                </a:lnTo>
+                <a:lnTo>
+                  <a:pt x="3526016" y="148742"/>
+                </a:lnTo>
+                <a:cubicBezTo>
+                  <a:pt x="3657740" y="365513"/>
+                  <a:pt x="3777402" y="589569"/>
+                  <a:pt x="3886489" y="819975"/>
+                </a:cubicBezTo>
+                <a:cubicBezTo>
+                  <a:pt x="3891856" y="833492"/>
+                  <a:pt x="3900663" y="845393"/>
+                  <a:pt x="3912049" y="854514"/>
+                </a:cubicBezTo>
+                <a:cubicBezTo>
+                  <a:pt x="3897352" y="819849"/>
+                  <a:pt x="3883037" y="784928"/>
+                  <a:pt x="3868083" y="750263"/>
+                </a:cubicBezTo>
+                <a:cubicBezTo>
+                  <a:pt x="3806989" y="608712"/>
+                  <a:pt x="3742478" y="469145"/>
+                  <a:pt x="3674155" y="331786"/>
+                </a:cubicBezTo>
+                <a:lnTo>
+                  <a:pt x="3496656" y="0"/>
+                </a:lnTo>
+                <a:lnTo>
+                  <a:pt x="3554371" y="0"/>
+                </a:lnTo>
+                <a:lnTo>
+                  <a:pt x="3661621" y="196614"/>
+                </a:lnTo>
+                <a:cubicBezTo>
+                  <a:pt x="3856899" y="573253"/>
+                  <a:pt x="4021071" y="966066"/>
+                  <a:pt x="4161279" y="1371196"/>
+                </a:cubicBezTo>
+                <a:cubicBezTo>
+                  <a:pt x="4379525" y="2007265"/>
+                  <a:pt x="4530141" y="2664286"/>
+                  <a:pt x="4610660" y="3331516"/>
+                </a:cubicBezTo>
+                <a:cubicBezTo>
+                  <a:pt x="4652837" y="3672965"/>
+                  <a:pt x="4671625" y="4013908"/>
+                  <a:pt x="4645040" y="4357388"/>
+                </a:cubicBezTo>
+                <a:cubicBezTo>
+                  <a:pt x="4613599" y="4758899"/>
+                  <a:pt x="4566181" y="5157998"/>
+                  <a:pt x="4485789" y="5552906"/>
+                </a:cubicBezTo>
+                <a:cubicBezTo>
+                  <a:pt x="4397121" y="5988893"/>
+                  <a:pt x="4276748" y="6414594"/>
+                  <a:pt x="4117769" y="6828295"/>
+                </a:cubicBezTo>
+                <a:lnTo>
+                  <a:pt x="4105288" y="6858000"/>
+                </a:lnTo>
+                <a:lnTo>
+                  <a:pt x="4052520" y="6858000"/>
+                </a:lnTo>
+                <a:lnTo>
+                  <a:pt x="4059369" y="6841549"/>
+                </a:lnTo>
+                <a:cubicBezTo>
+                  <a:pt x="4147276" y="6614016"/>
+                  <a:pt x="4224193" y="6380817"/>
+                  <a:pt x="4291518" y="6142729"/>
+                </a:cubicBezTo>
+                <a:cubicBezTo>
+                  <a:pt x="4350055" y="5935370"/>
+                  <a:pt x="4393256" y="5723695"/>
+                  <a:pt x="4443357" y="5513923"/>
+                </a:cubicBezTo>
+                <a:cubicBezTo>
+                  <a:pt x="4444541" y="5502788"/>
+                  <a:pt x="4445137" y="5491601"/>
+                  <a:pt x="4445146" y="5480401"/>
+                </a:cubicBezTo>
+                <a:cubicBezTo>
+                  <a:pt x="4408465" y="5607635"/>
+                  <a:pt x="4379196" y="5719759"/>
+                  <a:pt x="4344559" y="5830359"/>
+                </a:cubicBezTo>
+                <a:cubicBezTo>
+                  <a:pt x="4254261" y="6118381"/>
+                  <a:pt x="4150112" y="6398531"/>
+                  <a:pt x="4031702" y="6670527"/>
+                </a:cubicBezTo>
+                <a:lnTo>
+                  <a:pt x="3943824" y="6858000"/>
+                </a:lnTo>
+                <a:lnTo>
+                  <a:pt x="0" y="6858000"/>
+                </a:lnTo>
+                <a:close/>
+              </a:path>
+            </a:pathLst>
+          </a:custGeom>
+        </p:spPr>
+      </p:pic>
+      <p:sp>
+        <p:nvSpPr>
+          <p:cNvPr id="6" name="Slide Number Placeholder 5">
+            <a:extLst>
+              <a:ext uri="{FF2B5EF4-FFF2-40B4-BE49-F238E27FC236}">
+                <a16:creationId xmlns:a16="http://schemas.microsoft.com/office/drawing/2014/main" id="{1CCA047C-40C2-3CA3-598E-AC5C9775C55F}"/>
+              </a:ext>
+            </a:extLst>
+          </p:cNvPr>
+          <p:cNvSpPr>
+            <a:spLocks noGrp="1"/>
+          </p:cNvSpPr>
+          <p:nvPr>
+            <p:ph type="sldNum" sz="quarter" idx="12"/>
+          </p:nvPr>
+        </p:nvSpPr>
+        <p:spPr/>
+        <p:txBody>
+          <a:bodyPr/>
+          <a:lstStyle/>
+          <a:p>
+            <a:fld id="{03C731F9-C159-4852-9A74-0BE793153C89}" type="slidenum">
+              <a:rPr lang="en-US" smtClean="0"/>
+              <a:t>2</a:t>
+            </a:fld>
+            <a:endParaRPr lang="en-US"/>
+          </a:p>
+        </p:txBody>
+      </p:sp>
+    </p:spTree>
+    <p:extLst>
+      <p:ext uri="{BB962C8B-B14F-4D97-AF65-F5344CB8AC3E}">
+        <p14:creationId xmlns:p14="http://schemas.microsoft.com/office/powerpoint/2010/main" val="279799347"/>
+      </p:ext>
+    </p:extLst>
+  </p:cSld>
+  <p:clrMapOvr>
+    <a:masterClrMapping/>
+  </p:clrMapOvr>
+</p:sld>
+</file>
+
+<file path=ppt/slides/slide3.xml><?xml version="1.0" encoding="utf-8"?>
+<p:sld xmlns:a="http://schemas.openxmlformats.org/drawingml/2006/main" xmlns:r="http://schemas.openxmlformats.org/officeDocument/2006/relationships" xmlns:p="http://schemas.openxmlformats.org/presentationml/2006/main">
+  <p:cSld>
+    <p:spTree>
+      <p:nvGrpSpPr>
+        <p:cNvPr id="1" name="">
+          <a:extLst>
+            <a:ext uri="{FF2B5EF4-FFF2-40B4-BE49-F238E27FC236}">
+              <a16:creationId xmlns:a16="http://schemas.microsoft.com/office/drawing/2014/main" id="{E4D6BDCA-090F-DA44-EC64-4CCAE888C55A}"/>
+            </a:ext>
+          </a:extLst>
+        </p:cNvPr>
+        <p:cNvGrpSpPr/>
+        <p:nvPr/>
+      </p:nvGrpSpPr>
+      <p:grpSpPr>
+        <a:xfrm>
+          <a:off x="0" y="0"/>
+          <a:ext cx="0" cy="0"/>
+          <a:chOff x="0" y="0"/>
+          <a:chExt cx="0" cy="0"/>
+        </a:xfrm>
+      </p:grpSpPr>
+      <p:sp>
+        <p:nvSpPr>
+          <p:cNvPr id="2" name="Title 1">
+            <a:extLst>
+              <a:ext uri="{FF2B5EF4-FFF2-40B4-BE49-F238E27FC236}">
+                <a16:creationId xmlns:a16="http://schemas.microsoft.com/office/drawing/2014/main" id="{BBFFA0F8-919A-5628-C8BA-BC2ED90059DE}"/>
+              </a:ext>
+            </a:extLst>
+          </p:cNvPr>
+          <p:cNvSpPr>
+            <a:spLocks noGrp="1"/>
+          </p:cNvSpPr>
+          <p:nvPr>
+            <p:ph type="title"/>
+          </p:nvPr>
+        </p:nvSpPr>
+        <p:spPr>
+          <a:xfrm>
+            <a:off x="5297762" y="640080"/>
+            <a:ext cx="6251110" cy="3566160"/>
+          </a:xfrm>
+        </p:spPr>
+        <p:txBody>
+          <a:bodyPr vert="horz" lIns="91440" tIns="45720" rIns="91440" bIns="45720" rtlCol="0" anchor="b">
+            <a:normAutofit/>
+          </a:bodyPr>
+          <a:lstStyle/>
+          <a:p>
+            <a:r>
+              <a:rPr lang="en-US" sz="5400"/>
+              <a:t>Let’s play a game</a:t>
+            </a:r>
+          </a:p>
+        </p:txBody>
+      </p:sp>
+      <p:sp>
+        <p:nvSpPr>
+          <p:cNvPr id="3" name="Content Placeholder 2">
+            <a:extLst>
+              <a:ext uri="{FF2B5EF4-FFF2-40B4-BE49-F238E27FC236}">
+                <a16:creationId xmlns:a16="http://schemas.microsoft.com/office/drawing/2014/main" id="{62F81375-11D7-A626-AD39-8DE87DA45411}"/>
+              </a:ext>
+            </a:extLst>
+          </p:cNvPr>
+          <p:cNvSpPr>
+            <a:spLocks noGrp="1"/>
+          </p:cNvSpPr>
+          <p:nvPr>
+            <p:ph type="body" idx="1"/>
+          </p:nvPr>
+        </p:nvSpPr>
+        <p:spPr>
+          <a:xfrm>
+            <a:off x="5297760" y="4636008"/>
+            <a:ext cx="6251111" cy="1572768"/>
+          </a:xfrm>
+        </p:spPr>
+        <p:txBody>
+          <a:bodyPr vert="horz" lIns="91440" tIns="45720" rIns="91440" bIns="45720" rtlCol="0">
+            <a:normAutofit/>
+          </a:bodyPr>
+          <a:lstStyle/>
+          <a:p>
+            <a:r>
+              <a:rPr lang="en-US" dirty="0">
+                <a:solidFill>
+                  <a:schemeClr val="tx1"/>
+                </a:solidFill>
+              </a:rPr>
+              <a:t>When it is your turn, put your sticky note in the box</a:t>
+            </a:r>
+          </a:p>
+        </p:txBody>
+      </p:sp>
+      <p:pic>
+        <p:nvPicPr>
+          <p:cNvPr id="5" name="Picture 4" descr="A stack of dice on a boardgame">
+            <a:extLst>
+              <a:ext uri="{FF2B5EF4-FFF2-40B4-BE49-F238E27FC236}">
+                <a16:creationId xmlns:a16="http://schemas.microsoft.com/office/drawing/2014/main" id="{A37C4DA1-0958-3E25-93D6-C0A69E3D4C93}"/>
+              </a:ext>
+            </a:extLst>
+          </p:cNvPr>
+          <p:cNvPicPr>
+            <a:picLocks noChangeAspect="1"/>
+          </p:cNvPicPr>
+          <p:nvPr/>
+        </p:nvPicPr>
+        <p:blipFill rotWithShape="1">
+          <a:blip r:embed="rId2"/>
+          <a:srcRect l="10190" r="21899"/>
+          <a:stretch/>
+        </p:blipFill>
+        <p:spPr>
+          <a:xfrm>
+            <a:off x="1" y="10"/>
+            <a:ext cx="4657344" cy="6857990"/>
+          </a:xfrm>
+          <a:custGeom>
+            <a:avLst/>
+            <a:gdLst/>
+            <a:ahLst/>
+            <a:cxnLst/>
+            <a:rect l="l" t="t" r="r" b="b"/>
+            <a:pathLst>
+              <a:path w="4657344" h="6858000">
+                <a:moveTo>
+                  <a:pt x="0" y="0"/>
+                </a:moveTo>
+                <a:lnTo>
+                  <a:pt x="3429755" y="0"/>
+                </a:lnTo>
+                <a:lnTo>
+                  <a:pt x="3526016" y="148742"/>
+                </a:lnTo>
+                <a:cubicBezTo>
+                  <a:pt x="3657740" y="365513"/>
+                  <a:pt x="3777402" y="589569"/>
+                  <a:pt x="3886489" y="819975"/>
+                </a:cubicBezTo>
+                <a:cubicBezTo>
+                  <a:pt x="3891856" y="833492"/>
+                  <a:pt x="3900663" y="845393"/>
+                  <a:pt x="3912049" y="854514"/>
+                </a:cubicBezTo>
+                <a:cubicBezTo>
+                  <a:pt x="3897352" y="819849"/>
+                  <a:pt x="3883037" y="784928"/>
+                  <a:pt x="3868083" y="750263"/>
+                </a:cubicBezTo>
+                <a:cubicBezTo>
+                  <a:pt x="3806989" y="608712"/>
+                  <a:pt x="3742478" y="469145"/>
+                  <a:pt x="3674155" y="331786"/>
+                </a:cubicBezTo>
+                <a:lnTo>
+                  <a:pt x="3496656" y="0"/>
+                </a:lnTo>
+                <a:lnTo>
+                  <a:pt x="3554371" y="0"/>
+                </a:lnTo>
+                <a:lnTo>
+                  <a:pt x="3661621" y="196614"/>
+                </a:lnTo>
+                <a:cubicBezTo>
+                  <a:pt x="3856899" y="573253"/>
+                  <a:pt x="4021071" y="966066"/>
+                  <a:pt x="4161279" y="1371196"/>
+                </a:cubicBezTo>
+                <a:cubicBezTo>
+                  <a:pt x="4379525" y="2007265"/>
+                  <a:pt x="4530141" y="2664286"/>
+                  <a:pt x="4610660" y="3331516"/>
+                </a:cubicBezTo>
+                <a:cubicBezTo>
+                  <a:pt x="4652837" y="3672965"/>
+                  <a:pt x="4671625" y="4013908"/>
+                  <a:pt x="4645040" y="4357388"/>
+                </a:cubicBezTo>
+                <a:cubicBezTo>
+                  <a:pt x="4613599" y="4758899"/>
+                  <a:pt x="4566181" y="5157998"/>
+                  <a:pt x="4485789" y="5552906"/>
+                </a:cubicBezTo>
+                <a:cubicBezTo>
+                  <a:pt x="4397121" y="5988893"/>
+                  <a:pt x="4276748" y="6414594"/>
+                  <a:pt x="4117769" y="6828295"/>
+                </a:cubicBezTo>
+                <a:lnTo>
+                  <a:pt x="4105288" y="6858000"/>
+                </a:lnTo>
+                <a:lnTo>
+                  <a:pt x="4052520" y="6858000"/>
+                </a:lnTo>
+                <a:lnTo>
+                  <a:pt x="4059369" y="6841549"/>
+                </a:lnTo>
+                <a:cubicBezTo>
+                  <a:pt x="4147276" y="6614016"/>
+                  <a:pt x="4224193" y="6380817"/>
+                  <a:pt x="4291518" y="6142729"/>
+                </a:cubicBezTo>
+                <a:cubicBezTo>
+                  <a:pt x="4350055" y="5935370"/>
+                  <a:pt x="4393256" y="5723695"/>
+                  <a:pt x="4443357" y="5513923"/>
+                </a:cubicBezTo>
+                <a:cubicBezTo>
+                  <a:pt x="4444541" y="5502788"/>
+                  <a:pt x="4445137" y="5491601"/>
+                  <a:pt x="4445146" y="5480401"/>
+                </a:cubicBezTo>
+                <a:cubicBezTo>
+                  <a:pt x="4408465" y="5607635"/>
+                  <a:pt x="4379196" y="5719759"/>
+                  <a:pt x="4344559" y="5830359"/>
+                </a:cubicBezTo>
+                <a:cubicBezTo>
+                  <a:pt x="4254261" y="6118381"/>
+                  <a:pt x="4150112" y="6398531"/>
+                  <a:pt x="4031702" y="6670527"/>
+                </a:cubicBezTo>
+                <a:lnTo>
+                  <a:pt x="3943824" y="6858000"/>
+                </a:lnTo>
+                <a:lnTo>
+                  <a:pt x="0" y="6858000"/>
+                </a:lnTo>
+                <a:close/>
+              </a:path>
+            </a:pathLst>
+          </a:custGeom>
+        </p:spPr>
+      </p:pic>
+      <p:sp>
+        <p:nvSpPr>
+          <p:cNvPr id="6" name="Slide Number Placeholder 5">
+            <a:extLst>
+              <a:ext uri="{FF2B5EF4-FFF2-40B4-BE49-F238E27FC236}">
+                <a16:creationId xmlns:a16="http://schemas.microsoft.com/office/drawing/2014/main" id="{B3753F7D-4321-0F56-EE49-C9CD0B0AB311}"/>
+              </a:ext>
+            </a:extLst>
+          </p:cNvPr>
+          <p:cNvSpPr>
+            <a:spLocks noGrp="1"/>
+          </p:cNvSpPr>
+          <p:nvPr>
+            <p:ph type="sldNum" sz="quarter" idx="12"/>
+          </p:nvPr>
+        </p:nvSpPr>
+        <p:spPr/>
+        <p:txBody>
+          <a:bodyPr/>
+          <a:lstStyle/>
+          <a:p>
+            <a:fld id="{03C731F9-C159-4852-9A74-0BE793153C89}" type="slidenum">
+              <a:rPr lang="en-US" smtClean="0"/>
+              <a:t>3</a:t>
+            </a:fld>
+            <a:endParaRPr lang="en-US"/>
+          </a:p>
+        </p:txBody>
+      </p:sp>
+    </p:spTree>
+    <p:extLst>
+      <p:ext uri="{BB962C8B-B14F-4D97-AF65-F5344CB8AC3E}">
+        <p14:creationId xmlns:p14="http://schemas.microsoft.com/office/powerpoint/2010/main" val="2955633954"/>
+      </p:ext>
+    </p:extLst>
+  </p:cSld>
+  <p:clrMapOvr>
+    <a:masterClrMapping/>
+  </p:clrMapOvr>
+</p:sld>
+</file>
+
+<file path=ppt/slides/slide4.xml><?xml version="1.0" encoding="utf-8"?>
+<p:sld xmlns:a="http://schemas.openxmlformats.org/drawingml/2006/main" xmlns:r="http://schemas.openxmlformats.org/officeDocument/2006/relationships" xmlns:p="http://schemas.openxmlformats.org/presentationml/2006/main">
+  <p:cSld>
     <p:bg>
       <p:bgPr>
         <a:solidFill>
@@ -3429,7 +5636,7 @@
 </p:sld>
 </file>
 
-<file path=ppt/slides/slide2.xml><?xml version="1.0" encoding="utf-8"?>
+<file path=ppt/slides/slide5.xml><?xml version="1.0" encoding="utf-8"?>
 <p:sld xmlns:a="http://schemas.openxmlformats.org/drawingml/2006/main" xmlns:r="http://schemas.openxmlformats.org/officeDocument/2006/relationships" xmlns:p="http://schemas.openxmlformats.org/presentationml/2006/main">
   <p:cSld>
     <p:bg>
@@ -3570,7 +5777,7 @@
 </p:sld>
 </file>
 
-<file path=ppt/slides/slide3.xml><?xml version="1.0" encoding="utf-8"?>
+<file path=ppt/slides/slide6.xml><?xml version="1.0" encoding="utf-8"?>
 <p:sld xmlns:a="http://schemas.openxmlformats.org/drawingml/2006/main" xmlns:r="http://schemas.openxmlformats.org/officeDocument/2006/relationships" xmlns:p="http://schemas.openxmlformats.org/presentationml/2006/main">
   <p:cSld>
     <p:spTree>
@@ -4191,7 +6398,7 @@
 </p:sld>
 </file>
 
-<file path=ppt/slides/slide4.xml><?xml version="1.0" encoding="utf-8"?>
+<file path=ppt/slides/slide7.xml><?xml version="1.0" encoding="utf-8"?>
 <p:sld xmlns:a="http://schemas.openxmlformats.org/drawingml/2006/main" xmlns:r="http://schemas.openxmlformats.org/officeDocument/2006/relationships" xmlns:p="http://schemas.openxmlformats.org/presentationml/2006/main">
   <p:cSld>
     <p:spTree>
@@ -4649,7 +6856,7 @@
 </p:sld>
 </file>
 
-<file path=ppt/slides/slide5.xml><?xml version="1.0" encoding="utf-8"?>
+<file path=ppt/slides/slide8.xml><?xml version="1.0" encoding="utf-8"?>
 <p:sld xmlns:a="http://schemas.openxmlformats.org/drawingml/2006/main" xmlns:r="http://schemas.openxmlformats.org/officeDocument/2006/relationships" xmlns:p="http://schemas.openxmlformats.org/presentationml/2006/main">
   <p:cSld>
     <p:spTree>
@@ -4825,7 +7032,7 @@
 </p:sld>
 </file>
 
-<file path=ppt/slides/slide6.xml><?xml version="1.0" encoding="utf-8"?>
+<file path=ppt/slides/slide9.xml><?xml version="1.0" encoding="utf-8"?>
 <p:sld xmlns:a="http://schemas.openxmlformats.org/drawingml/2006/main" xmlns:r="http://schemas.openxmlformats.org/officeDocument/2006/relationships" xmlns:p="http://schemas.openxmlformats.org/presentationml/2006/main">
   <p:cSld>
     <p:bg>
@@ -4977,73 +7184,73 @@
           <a:custGeom>
             <a:avLst/>
             <a:gdLst>
-              <a:gd name="connsiteX0" fmla="*/ 0 w 3291840"/>
-              <a:gd name="connsiteY0" fmla="*/ 0 h 18288"/>
-              <a:gd name="connsiteX1" fmla="*/ 658368 w 3291840"/>
-              <a:gd name="connsiteY1" fmla="*/ 0 h 18288"/>
-              <a:gd name="connsiteX2" fmla="*/ 1283818 w 3291840"/>
-              <a:gd name="connsiteY2" fmla="*/ 0 h 18288"/>
-              <a:gd name="connsiteX3" fmla="*/ 1909267 w 3291840"/>
-              <a:gd name="connsiteY3" fmla="*/ 0 h 18288"/>
-              <a:gd name="connsiteX4" fmla="*/ 2633472 w 3291840"/>
-              <a:gd name="connsiteY4" fmla="*/ 0 h 18288"/>
-              <a:gd name="connsiteX5" fmla="*/ 3291840 w 3291840"/>
-              <a:gd name="connsiteY5" fmla="*/ 0 h 18288"/>
-              <a:gd name="connsiteX6" fmla="*/ 3291840 w 3291840"/>
-              <a:gd name="connsiteY6" fmla="*/ 18288 h 18288"/>
-              <a:gd name="connsiteX7" fmla="*/ 2633472 w 3291840"/>
-              <a:gd name="connsiteY7" fmla="*/ 18288 h 18288"/>
-              <a:gd name="connsiteX8" fmla="*/ 2073859 w 3291840"/>
-              <a:gd name="connsiteY8" fmla="*/ 18288 h 18288"/>
-              <a:gd name="connsiteX9" fmla="*/ 1448410 w 3291840"/>
-              <a:gd name="connsiteY9" fmla="*/ 18288 h 18288"/>
-              <a:gd name="connsiteX10" fmla="*/ 822960 w 3291840"/>
-              <a:gd name="connsiteY10" fmla="*/ 18288 h 18288"/>
-              <a:gd name="connsiteX11" fmla="*/ 0 w 3291840"/>
-              <a:gd name="connsiteY11" fmla="*/ 18288 h 18288"/>
-              <a:gd name="connsiteX12" fmla="*/ 0 w 3291840"/>
-              <a:gd name="connsiteY12" fmla="*/ 0 h 18288"/>
+              <a:gd name="csX0" fmla="*/ 0 w 3291840"/>
+              <a:gd name="csY0" fmla="*/ 0 h 18288"/>
+              <a:gd name="csX1" fmla="*/ 658368 w 3291840"/>
+              <a:gd name="csY1" fmla="*/ 0 h 18288"/>
+              <a:gd name="csX2" fmla="*/ 1283818 w 3291840"/>
+              <a:gd name="csY2" fmla="*/ 0 h 18288"/>
+              <a:gd name="csX3" fmla="*/ 1909267 w 3291840"/>
+              <a:gd name="csY3" fmla="*/ 0 h 18288"/>
+              <a:gd name="csX4" fmla="*/ 2633472 w 3291840"/>
+              <a:gd name="csY4" fmla="*/ 0 h 18288"/>
+              <a:gd name="csX5" fmla="*/ 3291840 w 3291840"/>
+              <a:gd name="csY5" fmla="*/ 0 h 18288"/>
+              <a:gd name="csX6" fmla="*/ 3291840 w 3291840"/>
+              <a:gd name="csY6" fmla="*/ 18288 h 18288"/>
+              <a:gd name="csX7" fmla="*/ 2633472 w 3291840"/>
+              <a:gd name="csY7" fmla="*/ 18288 h 18288"/>
+              <a:gd name="csX8" fmla="*/ 2073859 w 3291840"/>
+              <a:gd name="csY8" fmla="*/ 18288 h 18288"/>
+              <a:gd name="csX9" fmla="*/ 1448410 w 3291840"/>
+              <a:gd name="csY9" fmla="*/ 18288 h 18288"/>
+              <a:gd name="csX10" fmla="*/ 822960 w 3291840"/>
+              <a:gd name="csY10" fmla="*/ 18288 h 18288"/>
+              <a:gd name="csX11" fmla="*/ 0 w 3291840"/>
+              <a:gd name="csY11" fmla="*/ 18288 h 18288"/>
+              <a:gd name="csX12" fmla="*/ 0 w 3291840"/>
+              <a:gd name="csY12" fmla="*/ 0 h 18288"/>
             </a:gdLst>
             <a:ahLst/>
             <a:cxnLst>
               <a:cxn ang="0">
-                <a:pos x="connsiteX0" y="connsiteY0"/>
+                <a:pos x="csX0" y="csY0"/>
               </a:cxn>
               <a:cxn ang="0">
-                <a:pos x="connsiteX1" y="connsiteY1"/>
+                <a:pos x="csX1" y="csY1"/>
               </a:cxn>
               <a:cxn ang="0">
-                <a:pos x="connsiteX2" y="connsiteY2"/>
+                <a:pos x="csX2" y="csY2"/>
               </a:cxn>
               <a:cxn ang="0">
-                <a:pos x="connsiteX3" y="connsiteY3"/>
+                <a:pos x="csX3" y="csY3"/>
               </a:cxn>
               <a:cxn ang="0">
-                <a:pos x="connsiteX4" y="connsiteY4"/>
+                <a:pos x="csX4" y="csY4"/>
               </a:cxn>
               <a:cxn ang="0">
-                <a:pos x="connsiteX5" y="connsiteY5"/>
+                <a:pos x="csX5" y="csY5"/>
               </a:cxn>
               <a:cxn ang="0">
-                <a:pos x="connsiteX6" y="connsiteY6"/>
+                <a:pos x="csX6" y="csY6"/>
               </a:cxn>
               <a:cxn ang="0">
-                <a:pos x="connsiteX7" y="connsiteY7"/>
+                <a:pos x="csX7" y="csY7"/>
               </a:cxn>
               <a:cxn ang="0">
-                <a:pos x="connsiteX8" y="connsiteY8"/>
+                <a:pos x="csX8" y="csY8"/>
               </a:cxn>
               <a:cxn ang="0">
-                <a:pos x="connsiteX9" y="connsiteY9"/>
+                <a:pos x="csX9" y="csY9"/>
               </a:cxn>
               <a:cxn ang="0">
-                <a:pos x="connsiteX10" y="connsiteY10"/>
+                <a:pos x="csX10" y="csY10"/>
               </a:cxn>
               <a:cxn ang="0">
-                <a:pos x="connsiteX11" y="connsiteY11"/>
+                <a:pos x="csX11" y="csY11"/>
               </a:cxn>
               <a:cxn ang="0">
-                <a:pos x="connsiteX12" y="connsiteY12"/>
+                <a:pos x="csX12" y="csY12"/>
               </a:cxn>
             </a:cxnLst>
             <a:rect l="l" t="t" r="r" b="b"/>
@@ -5297,1100 +7504,6 @@
         <p14:creationId xmlns:p14="http://schemas.microsoft.com/office/powerpoint/2010/main" val="423554484"/>
       </p:ext>
     </p:extLst>
-  </p:cSld>
-  <p:clrMapOvr>
-    <a:masterClrMapping/>
-  </p:clrMapOvr>
-</p:sld>
-</file>
-
-<file path=ppt/slides/slide7.xml><?xml version="1.0" encoding="utf-8"?>
-<p:sld xmlns:a="http://schemas.openxmlformats.org/drawingml/2006/main" xmlns:r="http://schemas.openxmlformats.org/officeDocument/2006/relationships" xmlns:p="http://schemas.openxmlformats.org/presentationml/2006/main">
-  <p:cSld>
-    <p:bg>
-      <p:bgPr>
-        <a:solidFill>
-          <a:schemeClr val="bg1"/>
-        </a:solidFill>
-        <a:effectLst/>
-      </p:bgPr>
-    </p:bg>
-    <p:spTree>
-      <p:nvGrpSpPr>
-        <p:cNvPr id="1" name=""/>
-        <p:cNvGrpSpPr/>
-        <p:nvPr/>
-      </p:nvGrpSpPr>
-      <p:grpSpPr>
-        <a:xfrm>
-          <a:off x="0" y="0"/>
-          <a:ext cx="0" cy="0"/>
-          <a:chOff x="0" y="0"/>
-          <a:chExt cx="0" cy="0"/>
-        </a:xfrm>
-      </p:grpSpPr>
-      <p:sp>
-        <p:nvSpPr>
-          <p:cNvPr id="28" name="Rectangle 27">
-            <a:extLst>
-              <a:ext uri="{FF2B5EF4-FFF2-40B4-BE49-F238E27FC236}">
-                <a16:creationId xmlns:a16="http://schemas.microsoft.com/office/drawing/2014/main" id="{F3060C83-F051-4F0E-ABAD-AA0DFC48B218}"/>
-              </a:ext>
-              <a:ext uri="{C183D7F6-B498-43B3-948B-1728B52AA6E4}">
-                <adec:decorative xmlns:adec="http://schemas.microsoft.com/office/drawing/2017/decorative" val="1"/>
-              </a:ext>
-            </a:extLst>
-          </p:cNvPr>
-          <p:cNvSpPr>
-            <a:spLocks noGrp="1" noRot="1" noChangeAspect="1" noMove="1" noResize="1" noEditPoints="1" noAdjustHandles="1" noChangeArrowheads="1" noChangeShapeType="1" noTextEdit="1"/>
-          </p:cNvSpPr>
-          <p:nvPr>
-            <p:extLst>
-              <p:ext uri="{386F3935-93C4-4BCD-93E2-E3B085C9AB24}">
-                <p16:designElem xmlns:p16="http://schemas.microsoft.com/office/powerpoint/2015/main" val="1"/>
-              </p:ext>
-            </p:extLst>
-          </p:nvPr>
-        </p:nvSpPr>
-        <p:spPr>
-          <a:xfrm>
-            <a:off x="0" y="0"/>
-            <a:ext cx="12192000" cy="6858000"/>
-          </a:xfrm>
-          <a:prstGeom prst="rect">
-            <a:avLst/>
-          </a:prstGeom>
-          <a:solidFill>
-            <a:schemeClr val="bg1"/>
-          </a:solidFill>
-          <a:ln>
-            <a:noFill/>
-          </a:ln>
-        </p:spPr>
-        <p:style>
-          <a:lnRef idx="2">
-            <a:schemeClr val="accent1">
-              <a:shade val="50000"/>
-            </a:schemeClr>
-          </a:lnRef>
-          <a:fillRef idx="1">
-            <a:schemeClr val="accent1"/>
-          </a:fillRef>
-          <a:effectRef idx="0">
-            <a:schemeClr val="accent1"/>
-          </a:effectRef>
-          <a:fontRef idx="minor">
-            <a:schemeClr val="lt1"/>
-          </a:fontRef>
-        </p:style>
-        <p:txBody>
-          <a:bodyPr rtlCol="0" anchor="ctr"/>
-          <a:lstStyle/>
-          <a:p>
-            <a:pPr algn="ctr"/>
-            <a:endParaRPr lang="en-US"/>
-          </a:p>
-        </p:txBody>
-      </p:sp>
-      <p:sp>
-        <p:nvSpPr>
-          <p:cNvPr id="30" name="Freeform: Shape 29">
-            <a:extLst>
-              <a:ext uri="{FF2B5EF4-FFF2-40B4-BE49-F238E27FC236}">
-                <a16:creationId xmlns:a16="http://schemas.microsoft.com/office/drawing/2014/main" id="{83C98ABE-055B-441F-B07E-44F97F083C39}"/>
-              </a:ext>
-              <a:ext uri="{C183D7F6-B498-43B3-948B-1728B52AA6E4}">
-                <adec:decorative xmlns:adec="http://schemas.microsoft.com/office/drawing/2017/decorative" val="1"/>
-              </a:ext>
-            </a:extLst>
-          </p:cNvPr>
-          <p:cNvSpPr>
-            <a:spLocks noGrp="1" noRot="1" noChangeAspect="1" noMove="1" noResize="1" noEditPoints="1" noAdjustHandles="1" noChangeArrowheads="1" noChangeShapeType="1" noTextEdit="1"/>
-          </p:cNvSpPr>
-          <p:nvPr>
-            <p:extLst>
-              <p:ext uri="{386F3935-93C4-4BCD-93E2-E3B085C9AB24}">
-                <p16:designElem xmlns:p16="http://schemas.microsoft.com/office/powerpoint/2015/main" val="1"/>
-              </p:ext>
-            </p:extLst>
-          </p:nvPr>
-        </p:nvSpPr>
-        <p:spPr>
-          <a:xfrm rot="18900000" flipH="1">
-            <a:off x="-376156" y="-253670"/>
-            <a:ext cx="1827638" cy="1376989"/>
-          </a:xfrm>
-          <a:custGeom>
-            <a:avLst/>
-            <a:gdLst>
-              <a:gd name="connsiteX0" fmla="*/ 0 w 1827638"/>
-              <a:gd name="connsiteY0" fmla="*/ 987379 h 1376989"/>
-              <a:gd name="connsiteX1" fmla="*/ 987379 w 1827638"/>
-              <a:gd name="connsiteY1" fmla="*/ 0 h 1376989"/>
-              <a:gd name="connsiteX2" fmla="*/ 1827638 w 1827638"/>
-              <a:gd name="connsiteY2" fmla="*/ 840260 h 1376989"/>
-              <a:gd name="connsiteX3" fmla="*/ 1827638 w 1827638"/>
-              <a:gd name="connsiteY3" fmla="*/ 1376989 h 1376989"/>
-              <a:gd name="connsiteX4" fmla="*/ 0 w 1827638"/>
-              <a:gd name="connsiteY4" fmla="*/ 1376989 h 1376989"/>
-            </a:gdLst>
-            <a:ahLst/>
-            <a:cxnLst>
-              <a:cxn ang="0">
-                <a:pos x="connsiteX0" y="connsiteY0"/>
-              </a:cxn>
-              <a:cxn ang="0">
-                <a:pos x="connsiteX1" y="connsiteY1"/>
-              </a:cxn>
-              <a:cxn ang="0">
-                <a:pos x="connsiteX2" y="connsiteY2"/>
-              </a:cxn>
-              <a:cxn ang="0">
-                <a:pos x="connsiteX3" y="connsiteY3"/>
-              </a:cxn>
-              <a:cxn ang="0">
-                <a:pos x="connsiteX4" y="connsiteY4"/>
-              </a:cxn>
-            </a:cxnLst>
-            <a:rect l="l" t="t" r="r" b="b"/>
-            <a:pathLst>
-              <a:path w="1827638" h="1376989">
-                <a:moveTo>
-                  <a:pt x="0" y="987379"/>
-                </a:moveTo>
-                <a:lnTo>
-                  <a:pt x="987379" y="0"/>
-                </a:lnTo>
-                <a:lnTo>
-                  <a:pt x="1827638" y="840260"/>
-                </a:lnTo>
-                <a:lnTo>
-                  <a:pt x="1827638" y="1376989"/>
-                </a:lnTo>
-                <a:lnTo>
-                  <a:pt x="0" y="1376989"/>
-                </a:lnTo>
-                <a:close/>
-              </a:path>
-            </a:pathLst>
-          </a:custGeom>
-          <a:solidFill>
-            <a:schemeClr val="accent1">
-              <a:alpha val="30000"/>
-            </a:schemeClr>
-          </a:solidFill>
-          <a:ln>
-            <a:noFill/>
-          </a:ln>
-        </p:spPr>
-        <p:style>
-          <a:lnRef idx="2">
-            <a:schemeClr val="accent1">
-              <a:shade val="50000"/>
-            </a:schemeClr>
-          </a:lnRef>
-          <a:fillRef idx="1">
-            <a:schemeClr val="accent1"/>
-          </a:fillRef>
-          <a:effectRef idx="0">
-            <a:schemeClr val="accent1"/>
-          </a:effectRef>
-          <a:fontRef idx="minor">
-            <a:schemeClr val="lt1"/>
-          </a:fontRef>
-        </p:style>
-        <p:txBody>
-          <a:bodyPr rtlCol="0" anchor="ctr"/>
-          <a:lstStyle/>
-          <a:p>
-            <a:pPr algn="ctr"/>
-            <a:endParaRPr lang="en-US"/>
-          </a:p>
-        </p:txBody>
-      </p:sp>
-      <p:sp>
-        <p:nvSpPr>
-          <p:cNvPr id="32" name="Rectangle 31">
-            <a:extLst>
-              <a:ext uri="{FF2B5EF4-FFF2-40B4-BE49-F238E27FC236}">
-                <a16:creationId xmlns:a16="http://schemas.microsoft.com/office/drawing/2014/main" id="{29FDB030-9B49-4CED-8CCD-4D99382388AC}"/>
-              </a:ext>
-              <a:ext uri="{C183D7F6-B498-43B3-948B-1728B52AA6E4}">
-                <adec:decorative xmlns:adec="http://schemas.microsoft.com/office/drawing/2017/decorative" val="1"/>
-              </a:ext>
-            </a:extLst>
-          </p:cNvPr>
-          <p:cNvSpPr>
-            <a:spLocks noGrp="1" noRot="1" noChangeAspect="1" noMove="1" noResize="1" noEditPoints="1" noAdjustHandles="1" noChangeArrowheads="1" noChangeShapeType="1" noTextEdit="1"/>
-          </p:cNvSpPr>
-          <p:nvPr>
-            <p:extLst>
-              <p:ext uri="{386F3935-93C4-4BCD-93E2-E3B085C9AB24}">
-                <p16:designElem xmlns:p16="http://schemas.microsoft.com/office/powerpoint/2015/main" val="1"/>
-              </p:ext>
-            </p:extLst>
-          </p:nvPr>
-        </p:nvSpPr>
-        <p:spPr>
-          <a:xfrm rot="18900000" flipH="1">
-            <a:off x="891641" y="422146"/>
-            <a:ext cx="645368" cy="645368"/>
-          </a:xfrm>
-          <a:prstGeom prst="rect">
-            <a:avLst/>
-          </a:prstGeom>
-          <a:solidFill>
-            <a:schemeClr val="accent1">
-              <a:alpha val="30000"/>
-            </a:schemeClr>
-          </a:solidFill>
-          <a:ln>
-            <a:noFill/>
-          </a:ln>
-        </p:spPr>
-        <p:style>
-          <a:lnRef idx="2">
-            <a:schemeClr val="accent1">
-              <a:shade val="50000"/>
-            </a:schemeClr>
-          </a:lnRef>
-          <a:fillRef idx="1">
-            <a:schemeClr val="accent1"/>
-          </a:fillRef>
-          <a:effectRef idx="0">
-            <a:schemeClr val="accent1"/>
-          </a:effectRef>
-          <a:fontRef idx="minor">
-            <a:schemeClr val="lt1"/>
-          </a:fontRef>
-        </p:style>
-        <p:txBody>
-          <a:bodyPr rtlCol="0" anchor="ctr"/>
-          <a:lstStyle/>
-          <a:p>
-            <a:pPr algn="ctr"/>
-            <a:endParaRPr lang="en-US"/>
-          </a:p>
-        </p:txBody>
-      </p:sp>
-      <p:sp>
-        <p:nvSpPr>
-          <p:cNvPr id="34" name="Rectangle 33">
-            <a:extLst>
-              <a:ext uri="{FF2B5EF4-FFF2-40B4-BE49-F238E27FC236}">
-                <a16:creationId xmlns:a16="http://schemas.microsoft.com/office/drawing/2014/main" id="{3783CA14-24A1-485C-8B30-D6A5D87987AD}"/>
-              </a:ext>
-              <a:ext uri="{C183D7F6-B498-43B3-948B-1728B52AA6E4}">
-                <adec:decorative xmlns:adec="http://schemas.microsoft.com/office/drawing/2017/decorative" val="1"/>
-              </a:ext>
-            </a:extLst>
-          </p:cNvPr>
-          <p:cNvSpPr>
-            <a:spLocks noGrp="1" noRot="1" noChangeAspect="1" noMove="1" noResize="1" noEditPoints="1" noAdjustHandles="1" noChangeArrowheads="1" noChangeShapeType="1" noTextEdit="1"/>
-          </p:cNvSpPr>
-          <p:nvPr>
-            <p:extLst>
-              <p:ext uri="{386F3935-93C4-4BCD-93E2-E3B085C9AB24}">
-                <p16:designElem xmlns:p16="http://schemas.microsoft.com/office/powerpoint/2015/main" val="1"/>
-              </p:ext>
-            </p:extLst>
-          </p:nvPr>
-        </p:nvSpPr>
-        <p:spPr>
-          <a:xfrm rot="18900000" flipH="1">
-            <a:off x="10043482" y="655140"/>
-            <a:ext cx="687472" cy="687472"/>
-          </a:xfrm>
-          <a:prstGeom prst="rect">
-            <a:avLst/>
-          </a:prstGeom>
-          <a:solidFill>
-            <a:schemeClr val="accent4">
-              <a:alpha val="30000"/>
-            </a:schemeClr>
-          </a:solidFill>
-          <a:ln>
-            <a:noFill/>
-          </a:ln>
-        </p:spPr>
-        <p:style>
-          <a:lnRef idx="2">
-            <a:schemeClr val="accent1">
-              <a:shade val="50000"/>
-            </a:schemeClr>
-          </a:lnRef>
-          <a:fillRef idx="1">
-            <a:schemeClr val="accent1"/>
-          </a:fillRef>
-          <a:effectRef idx="0">
-            <a:schemeClr val="accent1"/>
-          </a:effectRef>
-          <a:fontRef idx="minor">
-            <a:schemeClr val="lt1"/>
-          </a:fontRef>
-        </p:style>
-        <p:txBody>
-          <a:bodyPr rtlCol="0" anchor="ctr"/>
-          <a:lstStyle/>
-          <a:p>
-            <a:pPr algn="ctr"/>
-            <a:endParaRPr lang="en-US"/>
-          </a:p>
-        </p:txBody>
-      </p:sp>
-      <p:sp>
-        <p:nvSpPr>
-          <p:cNvPr id="36" name="Freeform: Shape 35">
-            <a:extLst>
-              <a:ext uri="{FF2B5EF4-FFF2-40B4-BE49-F238E27FC236}">
-                <a16:creationId xmlns:a16="http://schemas.microsoft.com/office/drawing/2014/main" id="{9A97C86A-04D6-40F7-AE84-31AB43E6A846}"/>
-              </a:ext>
-              <a:ext uri="{C183D7F6-B498-43B3-948B-1728B52AA6E4}">
-                <adec:decorative xmlns:adec="http://schemas.microsoft.com/office/drawing/2017/decorative" val="1"/>
-              </a:ext>
-            </a:extLst>
-          </p:cNvPr>
-          <p:cNvSpPr>
-            <a:spLocks noGrp="1" noRot="1" noChangeAspect="1" noMove="1" noResize="1" noEditPoints="1" noAdjustHandles="1" noChangeArrowheads="1" noChangeShapeType="1" noTextEdit="1"/>
-          </p:cNvSpPr>
-          <p:nvPr>
-            <p:extLst>
-              <p:ext uri="{386F3935-93C4-4BCD-93E2-E3B085C9AB24}">
-                <p16:designElem xmlns:p16="http://schemas.microsoft.com/office/powerpoint/2015/main" val="1"/>
-              </p:ext>
-            </p:extLst>
-          </p:nvPr>
-        </p:nvSpPr>
-        <p:spPr>
-          <a:xfrm rot="10800000" flipH="1">
-            <a:off x="9356643" y="0"/>
-            <a:ext cx="2835357" cy="1480837"/>
-          </a:xfrm>
-          <a:custGeom>
-            <a:avLst/>
-            <a:gdLst>
-              <a:gd name="connsiteX0" fmla="*/ 2835357 w 2835357"/>
-              <a:gd name="connsiteY0" fmla="*/ 1480837 h 1480837"/>
-              <a:gd name="connsiteX1" fmla="*/ 0 w 2835357"/>
-              <a:gd name="connsiteY1" fmla="*/ 1480837 h 1480837"/>
-              <a:gd name="connsiteX2" fmla="*/ 1552727 w 2835357"/>
-              <a:gd name="connsiteY2" fmla="*/ 0 h 1480837"/>
-              <a:gd name="connsiteX3" fmla="*/ 2835357 w 2835357"/>
-              <a:gd name="connsiteY3" fmla="*/ 1223245 h 1480837"/>
-            </a:gdLst>
-            <a:ahLst/>
-            <a:cxnLst>
-              <a:cxn ang="0">
-                <a:pos x="connsiteX0" y="connsiteY0"/>
-              </a:cxn>
-              <a:cxn ang="0">
-                <a:pos x="connsiteX1" y="connsiteY1"/>
-              </a:cxn>
-              <a:cxn ang="0">
-                <a:pos x="connsiteX2" y="connsiteY2"/>
-              </a:cxn>
-              <a:cxn ang="0">
-                <a:pos x="connsiteX3" y="connsiteY3"/>
-              </a:cxn>
-            </a:cxnLst>
-            <a:rect l="l" t="t" r="r" b="b"/>
-            <a:pathLst>
-              <a:path w="2835357" h="1480837">
-                <a:moveTo>
-                  <a:pt x="2835357" y="1480837"/>
-                </a:moveTo>
-                <a:lnTo>
-                  <a:pt x="0" y="1480837"/>
-                </a:lnTo>
-                <a:lnTo>
-                  <a:pt x="1552727" y="0"/>
-                </a:lnTo>
-                <a:lnTo>
-                  <a:pt x="2835357" y="1223245"/>
-                </a:lnTo>
-                <a:close/>
-              </a:path>
-            </a:pathLst>
-          </a:custGeom>
-          <a:solidFill>
-            <a:schemeClr val="accent4">
-              <a:alpha val="30000"/>
-            </a:schemeClr>
-          </a:solidFill>
-          <a:ln>
-            <a:noFill/>
-          </a:ln>
-        </p:spPr>
-        <p:style>
-          <a:lnRef idx="2">
-            <a:schemeClr val="accent1">
-              <a:shade val="50000"/>
-            </a:schemeClr>
-          </a:lnRef>
-          <a:fillRef idx="1">
-            <a:schemeClr val="accent1"/>
-          </a:fillRef>
-          <a:effectRef idx="0">
-            <a:schemeClr val="accent1"/>
-          </a:effectRef>
-          <a:fontRef idx="minor">
-            <a:schemeClr val="lt1"/>
-          </a:fontRef>
-        </p:style>
-        <p:txBody>
-          <a:bodyPr wrap="square" rtlCol="0" anchor="ctr">
-            <a:noAutofit/>
-          </a:bodyPr>
-          <a:lstStyle/>
-          <a:p>
-            <a:pPr algn="ctr"/>
-            <a:endParaRPr lang="en-US"/>
-          </a:p>
-        </p:txBody>
-      </p:sp>
-      <p:sp>
-        <p:nvSpPr>
-          <p:cNvPr id="38" name="Isosceles Triangle 37">
-            <a:extLst>
-              <a:ext uri="{FF2B5EF4-FFF2-40B4-BE49-F238E27FC236}">
-                <a16:creationId xmlns:a16="http://schemas.microsoft.com/office/drawing/2014/main" id="{FF9F2414-84E8-453E-B1F3-389FDE8192D9}"/>
-              </a:ext>
-              <a:ext uri="{C183D7F6-B498-43B3-948B-1728B52AA6E4}">
-                <adec:decorative xmlns:adec="http://schemas.microsoft.com/office/drawing/2017/decorative" val="1"/>
-              </a:ext>
-            </a:extLst>
-          </p:cNvPr>
-          <p:cNvSpPr>
-            <a:spLocks noGrp="1" noRot="1" noChangeAspect="1" noMove="1" noResize="1" noEditPoints="1" noAdjustHandles="1" noChangeArrowheads="1" noChangeShapeType="1" noTextEdit="1"/>
-          </p:cNvSpPr>
-          <p:nvPr>
-            <p:extLst>
-              <p:ext uri="{386F3935-93C4-4BCD-93E2-E3B085C9AB24}">
-                <p16:designElem xmlns:p16="http://schemas.microsoft.com/office/powerpoint/2015/main" val="1"/>
-              </p:ext>
-            </p:extLst>
-          </p:nvPr>
-        </p:nvSpPr>
-        <p:spPr>
-          <a:xfrm flipH="1">
-            <a:off x="7976344" y="6115501"/>
-            <a:ext cx="1494513" cy="742499"/>
-          </a:xfrm>
-          <a:prstGeom prst="triangle">
-            <a:avLst/>
-          </a:prstGeom>
-          <a:solidFill>
-            <a:schemeClr val="accent1">
-              <a:alpha val="30000"/>
-            </a:schemeClr>
-          </a:solidFill>
-          <a:ln>
-            <a:noFill/>
-          </a:ln>
-        </p:spPr>
-        <p:style>
-          <a:lnRef idx="2">
-            <a:schemeClr val="accent1">
-              <a:shade val="50000"/>
-            </a:schemeClr>
-          </a:lnRef>
-          <a:fillRef idx="1">
-            <a:schemeClr val="accent1"/>
-          </a:fillRef>
-          <a:effectRef idx="0">
-            <a:schemeClr val="accent1"/>
-          </a:effectRef>
-          <a:fontRef idx="minor">
-            <a:schemeClr val="lt1"/>
-          </a:fontRef>
-        </p:style>
-        <p:txBody>
-          <a:bodyPr rtlCol="0" anchor="ctr"/>
-          <a:lstStyle/>
-          <a:p>
-            <a:pPr algn="ctr"/>
-            <a:endParaRPr lang="en-US"/>
-          </a:p>
-        </p:txBody>
-      </p:sp>
-      <p:pic>
-        <p:nvPicPr>
-          <p:cNvPr id="23" name="Picture 22">
-            <a:extLst>
-              <a:ext uri="{FF2B5EF4-FFF2-40B4-BE49-F238E27FC236}">
-                <a16:creationId xmlns:a16="http://schemas.microsoft.com/office/drawing/2014/main" id="{C6AD9238-36FE-8688-48DE-A1BBF5C85AA1}"/>
-              </a:ext>
-            </a:extLst>
-          </p:cNvPr>
-          <p:cNvPicPr>
-            <a:picLocks noChangeAspect="1"/>
-          </p:cNvPicPr>
-          <p:nvPr/>
-        </p:nvPicPr>
-        <p:blipFill>
-          <a:blip r:embed="rId3"/>
-          <a:stretch>
-            <a:fillRect/>
-          </a:stretch>
-        </p:blipFill>
-        <p:spPr>
-          <a:xfrm>
-            <a:off x="643467" y="1302512"/>
-            <a:ext cx="10905066" cy="4252975"/>
-          </a:xfrm>
-          <a:prstGeom prst="rect">
-            <a:avLst/>
-          </a:prstGeom>
-          <a:ln>
-            <a:noFill/>
-          </a:ln>
-        </p:spPr>
-      </p:pic>
-      <p:sp>
-        <p:nvSpPr>
-          <p:cNvPr id="40" name="Isosceles Triangle 39">
-            <a:extLst>
-              <a:ext uri="{FF2B5EF4-FFF2-40B4-BE49-F238E27FC236}">
-                <a16:creationId xmlns:a16="http://schemas.microsoft.com/office/drawing/2014/main" id="{3ECA69A1-7536-43AC-85EF-C7106179F5ED}"/>
-              </a:ext>
-              <a:ext uri="{C183D7F6-B498-43B3-948B-1728B52AA6E4}">
-                <adec:decorative xmlns:adec="http://schemas.microsoft.com/office/drawing/2017/decorative" val="1"/>
-              </a:ext>
-            </a:extLst>
-          </p:cNvPr>
-          <p:cNvSpPr>
-            <a:spLocks noGrp="1" noRot="1" noChangeAspect="1" noMove="1" noResize="1" noEditPoints="1" noAdjustHandles="1" noChangeArrowheads="1" noChangeShapeType="1" noTextEdit="1"/>
-          </p:cNvSpPr>
-          <p:nvPr>
-            <p:extLst>
-              <p:ext uri="{386F3935-93C4-4BCD-93E2-E3B085C9AB24}">
-                <p16:designElem xmlns:p16="http://schemas.microsoft.com/office/powerpoint/2015/main" val="1"/>
-              </p:ext>
-            </p:extLst>
-          </p:nvPr>
-        </p:nvSpPr>
-        <p:spPr>
-          <a:xfrm flipH="1">
-            <a:off x="7604080" y="6453143"/>
-            <a:ext cx="814903" cy="404857"/>
-          </a:xfrm>
-          <a:prstGeom prst="triangle">
-            <a:avLst/>
-          </a:prstGeom>
-          <a:solidFill>
-            <a:schemeClr val="accent1">
-              <a:alpha val="30000"/>
-            </a:schemeClr>
-          </a:solidFill>
-          <a:ln>
-            <a:noFill/>
-          </a:ln>
-        </p:spPr>
-        <p:style>
-          <a:lnRef idx="2">
-            <a:schemeClr val="accent1">
-              <a:shade val="50000"/>
-            </a:schemeClr>
-          </a:lnRef>
-          <a:fillRef idx="1">
-            <a:schemeClr val="accent1"/>
-          </a:fillRef>
-          <a:effectRef idx="0">
-            <a:schemeClr val="accent1"/>
-          </a:effectRef>
-          <a:fontRef idx="minor">
-            <a:schemeClr val="lt1"/>
-          </a:fontRef>
-        </p:style>
-        <p:txBody>
-          <a:bodyPr rtlCol="0" anchor="ctr"/>
-          <a:lstStyle/>
-          <a:p>
-            <a:pPr algn="ctr"/>
-            <a:endParaRPr lang="en-US"/>
-          </a:p>
-        </p:txBody>
-      </p:sp>
-    </p:spTree>
-    <p:extLst>
-      <p:ext uri="{BB962C8B-B14F-4D97-AF65-F5344CB8AC3E}">
-        <p14:creationId xmlns:p14="http://schemas.microsoft.com/office/powerpoint/2010/main" val="3902131348"/>
-      </p:ext>
-    </p:extLst>
-  </p:cSld>
-  <p:clrMapOvr>
-    <a:masterClrMapping/>
-  </p:clrMapOvr>
-</p:sld>
-</file>
-
-<file path=ppt/slides/slide8.xml><?xml version="1.0" encoding="utf-8"?>
-<p:sld xmlns:a="http://schemas.openxmlformats.org/drawingml/2006/main" xmlns:r="http://schemas.openxmlformats.org/officeDocument/2006/relationships" xmlns:p="http://schemas.openxmlformats.org/presentationml/2006/main">
-  <p:cSld>
-    <p:spTree>
-      <p:nvGrpSpPr>
-        <p:cNvPr id="1" name=""/>
-        <p:cNvGrpSpPr/>
-        <p:nvPr/>
-      </p:nvGrpSpPr>
-      <p:grpSpPr>
-        <a:xfrm>
-          <a:off x="0" y="0"/>
-          <a:ext cx="0" cy="0"/>
-          <a:chOff x="0" y="0"/>
-          <a:chExt cx="0" cy="0"/>
-        </a:xfrm>
-      </p:grpSpPr>
-      <p:pic>
-        <p:nvPicPr>
-          <p:cNvPr id="2" name="Image 0" descr="preencoded.png"/>
-          <p:cNvPicPr>
-            <a:picLocks noChangeAspect="1"/>
-          </p:cNvPicPr>
-          <p:nvPr/>
-        </p:nvPicPr>
-        <p:blipFill>
-          <a:blip r:embed="rId3"/>
-          <a:stretch>
-            <a:fillRect/>
-          </a:stretch>
-        </p:blipFill>
-        <p:spPr>
-          <a:xfrm>
-            <a:off x="0" y="0"/>
-            <a:ext cx="12192000" cy="6807573"/>
-          </a:xfrm>
-          <a:prstGeom prst="rect">
-            <a:avLst/>
-          </a:prstGeom>
-        </p:spPr>
-      </p:pic>
-      <p:sp>
-        <p:nvSpPr>
-          <p:cNvPr id="3" name="Shape 0"/>
-          <p:cNvSpPr/>
-          <p:nvPr/>
-        </p:nvSpPr>
-        <p:spPr>
-          <a:xfrm>
-            <a:off x="0" y="15902"/>
-            <a:ext cx="12192000" cy="6858000"/>
-          </a:xfrm>
-          <a:prstGeom prst="rect">
-            <a:avLst/>
-          </a:prstGeom>
-          <a:solidFill>
-            <a:srgbClr val="FFFFFF">
-              <a:alpha val="75000"/>
-            </a:srgbClr>
-          </a:solidFill>
-          <a:ln w="7620">
-            <a:solidFill>
-              <a:srgbClr val="FFFFFF">
-                <a:alpha val="64000"/>
-              </a:srgbClr>
-            </a:solidFill>
-            <a:prstDash val="solid"/>
-          </a:ln>
-        </p:spPr>
-        <p:txBody>
-          <a:bodyPr/>
-          <a:lstStyle/>
-          <a:p>
-            <a:endParaRPr lang="en-US"/>
-          </a:p>
-        </p:txBody>
-      </p:sp>
-      <p:sp>
-        <p:nvSpPr>
-          <p:cNvPr id="4" name="Text 1"/>
-          <p:cNvSpPr/>
-          <p:nvPr/>
-        </p:nvSpPr>
-        <p:spPr>
-          <a:xfrm>
-            <a:off x="694333" y="1819391"/>
-            <a:ext cx="3703241" cy="597337"/>
-          </a:xfrm>
-          <a:prstGeom prst="rect">
-            <a:avLst/>
-          </a:prstGeom>
-          <a:noFill/>
-          <a:ln/>
-        </p:spPr>
-        <p:txBody>
-          <a:bodyPr wrap="none" rtlCol="0" anchor="t"/>
-          <a:lstStyle/>
-          <a:p>
-            <a:pPr>
-              <a:lnSpc>
-                <a:spcPts val="4738"/>
-              </a:lnSpc>
-            </a:pPr>
-            <a:r>
-              <a:rPr lang="en-US" sz="3645">
-                <a:solidFill>
-                  <a:srgbClr val="312F2B"/>
-                </a:solidFill>
-                <a:latin typeface="Georgia" pitchFamily="34" charset="0"/>
-                <a:ea typeface="Georgia" pitchFamily="34" charset="-122"/>
-                <a:cs typeface="Georgia" pitchFamily="34" charset="-120"/>
-              </a:rPr>
-              <a:t>Responsibilities</a:t>
-            </a:r>
-            <a:endParaRPr lang="en-US" sz="3645"/>
-          </a:p>
-        </p:txBody>
-      </p:sp>
-      <p:sp>
-        <p:nvSpPr>
-          <p:cNvPr id="5" name="Shape 2"/>
-          <p:cNvSpPr/>
-          <p:nvPr/>
-        </p:nvSpPr>
-        <p:spPr>
-          <a:xfrm>
-            <a:off x="694332" y="2821025"/>
-            <a:ext cx="3477717" cy="2363223"/>
-          </a:xfrm>
-          <a:prstGeom prst="roundRect">
-            <a:avLst>
-              <a:gd name="adj" fmla="val 2110"/>
-            </a:avLst>
-          </a:prstGeom>
-          <a:solidFill>
-            <a:srgbClr val="E8E8E3"/>
-          </a:solidFill>
-          <a:ln w="7620">
-            <a:solidFill>
-              <a:srgbClr val="D1D1C7"/>
-            </a:solidFill>
-            <a:prstDash val="solid"/>
-          </a:ln>
-        </p:spPr>
-        <p:txBody>
-          <a:bodyPr/>
-          <a:lstStyle/>
-          <a:p>
-            <a:endParaRPr lang="en-US"/>
-          </a:p>
-        </p:txBody>
-      </p:sp>
-      <p:sp>
-        <p:nvSpPr>
-          <p:cNvPr id="6" name="Text 3"/>
-          <p:cNvSpPr/>
-          <p:nvPr/>
-        </p:nvSpPr>
-        <p:spPr>
-          <a:xfrm>
-            <a:off x="885825" y="3011111"/>
-            <a:ext cx="1851620" cy="298619"/>
-          </a:xfrm>
-          <a:prstGeom prst="rect">
-            <a:avLst/>
-          </a:prstGeom>
-          <a:noFill/>
-          <a:ln/>
-        </p:spPr>
-        <p:txBody>
-          <a:bodyPr wrap="none" rtlCol="0" anchor="t"/>
-          <a:lstStyle/>
-          <a:p>
-            <a:pPr>
-              <a:lnSpc>
-                <a:spcPts val="2369"/>
-              </a:lnSpc>
-            </a:pPr>
-            <a:r>
-              <a:rPr lang="en-US" sz="1822">
-                <a:solidFill>
-                  <a:srgbClr val="272525"/>
-                </a:solidFill>
-                <a:latin typeface="Georgia" pitchFamily="34" charset="0"/>
-                <a:ea typeface="Georgia" pitchFamily="34" charset="-122"/>
-                <a:cs typeface="Georgia" pitchFamily="34" charset="-120"/>
-              </a:rPr>
-              <a:t>Stay Informed</a:t>
-            </a:r>
-            <a:endParaRPr lang="en-US" sz="1822"/>
-          </a:p>
-        </p:txBody>
-      </p:sp>
-      <p:sp>
-        <p:nvSpPr>
-          <p:cNvPr id="7" name="Text 4"/>
-          <p:cNvSpPr/>
-          <p:nvPr/>
-        </p:nvSpPr>
-        <p:spPr>
-          <a:xfrm>
-            <a:off x="885825" y="3475093"/>
-            <a:ext cx="3094732" cy="992180"/>
-          </a:xfrm>
-          <a:prstGeom prst="rect">
-            <a:avLst/>
-          </a:prstGeom>
-          <a:noFill/>
-          <a:ln/>
-        </p:spPr>
-        <p:txBody>
-          <a:bodyPr wrap="square" rtlCol="0" anchor="t"/>
-          <a:lstStyle/>
-          <a:p>
-            <a:pPr>
-              <a:lnSpc>
-                <a:spcPts val="2624"/>
-              </a:lnSpc>
-            </a:pPr>
-            <a:r>
-              <a:rPr lang="en-US" sz="1458">
-                <a:solidFill>
-                  <a:srgbClr val="272525"/>
-                </a:solidFill>
-                <a:latin typeface="Lato" pitchFamily="34" charset="0"/>
-                <a:ea typeface="Lato" pitchFamily="34" charset="-122"/>
-                <a:cs typeface="Lato" pitchFamily="34" charset="-120"/>
-              </a:rPr>
-              <a:t>Be aware of AQI updates in your area and how they might impact your health and daily routine.</a:t>
-            </a:r>
-            <a:endParaRPr lang="en-US" sz="1458"/>
-          </a:p>
-        </p:txBody>
-      </p:sp>
-      <p:sp>
-        <p:nvSpPr>
-          <p:cNvPr id="8" name="Shape 5"/>
-          <p:cNvSpPr/>
-          <p:nvPr/>
-        </p:nvSpPr>
-        <p:spPr>
-          <a:xfrm>
-            <a:off x="4357192" y="2821026"/>
-            <a:ext cx="3477717" cy="2363224"/>
-          </a:xfrm>
-          <a:prstGeom prst="roundRect">
-            <a:avLst>
-              <a:gd name="adj" fmla="val 2110"/>
-            </a:avLst>
-          </a:prstGeom>
-          <a:solidFill>
-            <a:srgbClr val="E8E8E3"/>
-          </a:solidFill>
-          <a:ln w="7620">
-            <a:solidFill>
-              <a:srgbClr val="D1D1C7"/>
-            </a:solidFill>
-            <a:prstDash val="solid"/>
-          </a:ln>
-        </p:spPr>
-        <p:txBody>
-          <a:bodyPr/>
-          <a:lstStyle/>
-          <a:p>
-            <a:endParaRPr lang="en-US"/>
-          </a:p>
-        </p:txBody>
-      </p:sp>
-      <p:sp>
-        <p:nvSpPr>
-          <p:cNvPr id="9" name="Text 6"/>
-          <p:cNvSpPr/>
-          <p:nvPr/>
-        </p:nvSpPr>
-        <p:spPr>
-          <a:xfrm>
-            <a:off x="4548683" y="3011111"/>
-            <a:ext cx="1851620" cy="298619"/>
-          </a:xfrm>
-          <a:prstGeom prst="rect">
-            <a:avLst/>
-          </a:prstGeom>
-          <a:noFill/>
-          <a:ln/>
-        </p:spPr>
-        <p:txBody>
-          <a:bodyPr wrap="none" rtlCol="0" anchor="t"/>
-          <a:lstStyle/>
-          <a:p>
-            <a:pPr>
-              <a:lnSpc>
-                <a:spcPts val="2369"/>
-              </a:lnSpc>
-            </a:pPr>
-            <a:r>
-              <a:rPr lang="en-US" sz="1822">
-                <a:solidFill>
-                  <a:srgbClr val="272525"/>
-                </a:solidFill>
-                <a:latin typeface="Georgia" pitchFamily="34" charset="0"/>
-                <a:ea typeface="Georgia" pitchFamily="34" charset="-122"/>
-                <a:cs typeface="Georgia" pitchFamily="34" charset="-120"/>
-              </a:rPr>
-              <a:t>Take Action</a:t>
-            </a:r>
-            <a:endParaRPr lang="en-US" sz="1822"/>
-          </a:p>
-        </p:txBody>
-      </p:sp>
-      <p:sp>
-        <p:nvSpPr>
-          <p:cNvPr id="10" name="Text 7"/>
-          <p:cNvSpPr/>
-          <p:nvPr/>
-        </p:nvSpPr>
-        <p:spPr>
-          <a:xfrm>
-            <a:off x="4548683" y="3475093"/>
-            <a:ext cx="3094732" cy="1322907"/>
-          </a:xfrm>
-          <a:prstGeom prst="rect">
-            <a:avLst/>
-          </a:prstGeom>
-          <a:noFill/>
-          <a:ln/>
-        </p:spPr>
-        <p:txBody>
-          <a:bodyPr wrap="square" rtlCol="0" anchor="t"/>
-          <a:lstStyle/>
-          <a:p>
-            <a:pPr>
-              <a:lnSpc>
-                <a:spcPts val="2624"/>
-              </a:lnSpc>
-            </a:pPr>
-            <a:r>
-              <a:rPr lang="en-US" sz="1458">
-                <a:solidFill>
-                  <a:srgbClr val="272525"/>
-                </a:solidFill>
-                <a:latin typeface="Lato" pitchFamily="34" charset="0"/>
-                <a:ea typeface="Lato" pitchFamily="34" charset="-122"/>
-                <a:cs typeface="Lato" pitchFamily="34" charset="-120"/>
-              </a:rPr>
-              <a:t>Take steps to reduce your personal contribution to air pollution, such as recycling, using public transport, and running your home energy efficiently.</a:t>
-            </a:r>
-            <a:endParaRPr lang="en-US" sz="1458"/>
-          </a:p>
-        </p:txBody>
-      </p:sp>
-      <p:sp>
-        <p:nvSpPr>
-          <p:cNvPr id="11" name="Shape 8"/>
-          <p:cNvSpPr/>
-          <p:nvPr/>
-        </p:nvSpPr>
-        <p:spPr>
-          <a:xfrm>
-            <a:off x="8020050" y="2821026"/>
-            <a:ext cx="3477717" cy="2363222"/>
-          </a:xfrm>
-          <a:prstGeom prst="roundRect">
-            <a:avLst>
-              <a:gd name="adj" fmla="val 2110"/>
-            </a:avLst>
-          </a:prstGeom>
-          <a:solidFill>
-            <a:srgbClr val="E8E8E3"/>
-          </a:solidFill>
-          <a:ln w="7620">
-            <a:solidFill>
-              <a:srgbClr val="D1D1C7"/>
-            </a:solidFill>
-            <a:prstDash val="solid"/>
-          </a:ln>
-        </p:spPr>
-        <p:txBody>
-          <a:bodyPr/>
-          <a:lstStyle/>
-          <a:p>
-            <a:endParaRPr lang="en-US"/>
-          </a:p>
-        </p:txBody>
-      </p:sp>
-      <p:sp>
-        <p:nvSpPr>
-          <p:cNvPr id="12" name="Text 9"/>
-          <p:cNvSpPr/>
-          <p:nvPr/>
-        </p:nvSpPr>
-        <p:spPr>
-          <a:xfrm>
-            <a:off x="8211543" y="3011111"/>
-            <a:ext cx="1851620" cy="298619"/>
-          </a:xfrm>
-          <a:prstGeom prst="rect">
-            <a:avLst/>
-          </a:prstGeom>
-          <a:noFill/>
-          <a:ln/>
-        </p:spPr>
-        <p:txBody>
-          <a:bodyPr wrap="none" rtlCol="0" anchor="t"/>
-          <a:lstStyle/>
-          <a:p>
-            <a:pPr>
-              <a:lnSpc>
-                <a:spcPts val="2369"/>
-              </a:lnSpc>
-            </a:pPr>
-            <a:r>
-              <a:rPr lang="en-US" sz="1822">
-                <a:solidFill>
-                  <a:srgbClr val="272525"/>
-                </a:solidFill>
-                <a:latin typeface="Georgia" pitchFamily="34" charset="0"/>
-                <a:ea typeface="Georgia" pitchFamily="34" charset="-122"/>
-                <a:cs typeface="Georgia" pitchFamily="34" charset="-120"/>
-              </a:rPr>
-              <a:t>Spread the Word</a:t>
-            </a:r>
-            <a:endParaRPr lang="en-US" sz="1822"/>
-          </a:p>
-        </p:txBody>
-      </p:sp>
-      <p:sp>
-        <p:nvSpPr>
-          <p:cNvPr id="13" name="Text 10"/>
-          <p:cNvSpPr/>
-          <p:nvPr/>
-        </p:nvSpPr>
-        <p:spPr>
-          <a:xfrm>
-            <a:off x="8211542" y="3475093"/>
-            <a:ext cx="3094732" cy="992180"/>
-          </a:xfrm>
-          <a:prstGeom prst="rect">
-            <a:avLst/>
-          </a:prstGeom>
-          <a:noFill/>
-          <a:ln/>
-        </p:spPr>
-        <p:txBody>
-          <a:bodyPr wrap="square" rtlCol="0" anchor="t"/>
-          <a:lstStyle/>
-          <a:p>
-            <a:pPr>
-              <a:lnSpc>
-                <a:spcPts val="2624"/>
-              </a:lnSpc>
-            </a:pPr>
-            <a:r>
-              <a:rPr lang="en-US" sz="1458">
-                <a:solidFill>
-                  <a:srgbClr val="272525"/>
-                </a:solidFill>
-                <a:latin typeface="Lato" pitchFamily="34" charset="0"/>
-                <a:ea typeface="Lato" pitchFamily="34" charset="-122"/>
-                <a:cs typeface="Lato" pitchFamily="34" charset="-120"/>
-              </a:rPr>
-              <a:t>Help raise awareness about AQI and its impact on human health and the environment.</a:t>
-            </a:r>
-            <a:endParaRPr lang="en-US" sz="1458"/>
-          </a:p>
-        </p:txBody>
-      </p:sp>
-    </p:spTree>
   </p:cSld>
   <p:clrMapOvr>
     <a:masterClrMapping/>
@@ -7304,6 +8417,15 @@
 </file>
 
 <file path=customXml/item1.xml><?xml version="1.0" encoding="utf-8"?>
+<?mso-contentType ?>
+<FormTemplates xmlns="http://schemas.microsoft.com/sharepoint/v3/contenttype/forms">
+  <Display>DocumentLibraryForm</Display>
+  <Edit>DocumentLibraryForm</Edit>
+  <New>DocumentLibraryForm</New>
+</FormTemplates>
+</file>
+
+<file path=customXml/item2.xml><?xml version="1.0" encoding="utf-8"?>
 <ct:contentTypeSchema xmlns:ct="http://schemas.microsoft.com/office/2006/metadata/contentType" xmlns:ma="http://schemas.microsoft.com/office/2006/metadata/properties/metaAttributes" ct:_="" ma:_="" ma:contentTypeName="Document" ma:contentTypeID="0x01010094CC46574F3EEC40A862D99E7E1B949E" ma:contentTypeVersion="18" ma:contentTypeDescription="Create a new document." ma:contentTypeScope="" ma:versionID="82888ad49c5437257f05d93ecf2c77e6">
   <xsd:schema xmlns:xsd="http://www.w3.org/2001/XMLSchema" xmlns:xs="http://www.w3.org/2001/XMLSchema" xmlns:p="http://schemas.microsoft.com/office/2006/metadata/properties" xmlns:ns2="25c2ebd5-bc2d-4e39-894a-d1d0e7647b08" xmlns:ns3="440f622b-d608-4c0a-8042-7ba907e25cbd" targetNamespace="http://schemas.microsoft.com/office/2006/metadata/properties" ma:root="true" ma:fieldsID="6f11db444bc84aed0370f2ca66d582ef" ns2:_="" ns3:_="">
     <xsd:import namespace="25c2ebd5-bc2d-4e39-894a-d1d0e7647b08"/>
@@ -7558,15 +8680,6 @@
 </ct:contentTypeSchema>
 </file>
 
-<file path=customXml/item2.xml><?xml version="1.0" encoding="utf-8"?>
-<?mso-contentType ?>
-<FormTemplates xmlns="http://schemas.microsoft.com/sharepoint/v3/contenttype/forms">
-  <Display>DocumentLibraryForm</Display>
-  <Edit>DocumentLibraryForm</Edit>
-  <New>DocumentLibraryForm</New>
-</FormTemplates>
-</file>
-
 <file path=customXml/item3.xml><?xml version="1.0" encoding="utf-8"?>
 <p:properties xmlns:p="http://schemas.microsoft.com/office/2006/metadata/properties" xmlns:xsi="http://www.w3.org/2001/XMLSchema-instance" xmlns:pc="http://schemas.microsoft.com/office/infopath/2007/PartnerControls">
   <documentManagement>
@@ -7579,6 +8692,14 @@
 </file>
 
 <file path=customXml/itemProps1.xml><?xml version="1.0" encoding="utf-8"?>
+<ds:datastoreItem xmlns:ds="http://schemas.openxmlformats.org/officeDocument/2006/customXml" ds:itemID="{0CD6E676-D598-495D-8B4A-25C23EB2B412}">
+  <ds:schemaRefs>
+    <ds:schemaRef ds:uri="http://schemas.microsoft.com/sharepoint/v3/contenttype/forms"/>
+  </ds:schemaRefs>
+</ds:datastoreItem>
+</file>
+
+<file path=customXml/itemProps2.xml><?xml version="1.0" encoding="utf-8"?>
 <ds:datastoreItem xmlns:ds="http://schemas.openxmlformats.org/officeDocument/2006/customXml" ds:itemID="{024D592D-641A-4CD1-B87E-8D3A845915B0}">
   <ds:schemaRefs>
     <ds:schemaRef ds:uri="http://schemas.microsoft.com/office/2006/metadata/contentType"/>
@@ -7593,14 +8714,6 @@
     <ds:schemaRef ds:uri="http://purl.org/dc/elements/1.1/"/>
     <ds:schemaRef ds:uri="http://purl.org/dc/terms/"/>
     <ds:schemaRef ds:uri="http://schemas.microsoft.com/internal/obd"/>
-  </ds:schemaRefs>
-</ds:datastoreItem>
-</file>
-
-<file path=customXml/itemProps2.xml><?xml version="1.0" encoding="utf-8"?>
-<ds:datastoreItem xmlns:ds="http://schemas.openxmlformats.org/officeDocument/2006/customXml" ds:itemID="{0CD6E676-D598-495D-8B4A-25C23EB2B412}">
-  <ds:schemaRefs>
-    <ds:schemaRef ds:uri="http://schemas.microsoft.com/sharepoint/v3/contenttype/forms"/>
   </ds:schemaRefs>
 </ds:datastoreItem>
 </file>

--- a/tuesday/Code4Climate_Tuesday_AQImeaning.pptx
+++ b/tuesday/Code4Climate_Tuesday_AQImeaning.pptx
@@ -6,20 +6,21 @@
     <p:sldMasterId id="2147483648" r:id="rId5"/>
   </p:sldMasterIdLst>
   <p:notesMasterIdLst>
-    <p:notesMasterId r:id="rId17"/>
+    <p:notesMasterId r:id="rId18"/>
   </p:notesMasterIdLst>
   <p:sldIdLst>
-    <p:sldId id="300" r:id="rId6"/>
-    <p:sldId id="301" r:id="rId7"/>
-    <p:sldId id="302" r:id="rId8"/>
-    <p:sldId id="298" r:id="rId9"/>
-    <p:sldId id="294" r:id="rId10"/>
-    <p:sldId id="281" r:id="rId11"/>
-    <p:sldId id="282" r:id="rId12"/>
-    <p:sldId id="296" r:id="rId13"/>
-    <p:sldId id="297" r:id="rId14"/>
-    <p:sldId id="293" r:id="rId15"/>
-    <p:sldId id="286" r:id="rId16"/>
+    <p:sldId id="267" r:id="rId6"/>
+    <p:sldId id="300" r:id="rId7"/>
+    <p:sldId id="301" r:id="rId8"/>
+    <p:sldId id="302" r:id="rId9"/>
+    <p:sldId id="298" r:id="rId10"/>
+    <p:sldId id="294" r:id="rId11"/>
+    <p:sldId id="281" r:id="rId12"/>
+    <p:sldId id="282" r:id="rId13"/>
+    <p:sldId id="296" r:id="rId14"/>
+    <p:sldId id="297" r:id="rId15"/>
+    <p:sldId id="293" r:id="rId16"/>
+    <p:sldId id="286" r:id="rId17"/>
   </p:sldIdLst>
   <p:sldSz cx="12192000" cy="6858000"/>
   <p:notesSz cx="6858000" cy="9144000"/>
@@ -160,29 +161,6 @@
     </pc:docChg>
   </pc:docChgLst>
   <pc:docChgLst>
-    <pc:chgData name="Roy, Somesh" userId="1acabf4b-f33c-4133-9f27-9eb78ba0ac66" providerId="ADAL" clId="{1D6AC2EB-F712-4211-8004-4938C3240DC1}"/>
-    <pc:docChg chg="custSel modSld">
-      <pc:chgData name="Roy, Somesh" userId="1acabf4b-f33c-4133-9f27-9eb78ba0ac66" providerId="ADAL" clId="{1D6AC2EB-F712-4211-8004-4938C3240DC1}" dt="2023-07-24T22:17:12.865" v="4" actId="404"/>
-      <pc:docMkLst>
-        <pc:docMk/>
-      </pc:docMkLst>
-      <pc:sldChg chg="delSp mod delAnim">
-        <pc:chgData name="Roy, Somesh" userId="1acabf4b-f33c-4133-9f27-9eb78ba0ac66" providerId="ADAL" clId="{1D6AC2EB-F712-4211-8004-4938C3240DC1}" dt="2023-07-24T22:16:09.385" v="0" actId="478"/>
-        <pc:sldMkLst>
-          <pc:docMk/>
-          <pc:sldMk cId="4221095728" sldId="257"/>
-        </pc:sldMkLst>
-      </pc:sldChg>
-      <pc:sldChg chg="addSp modSp mod">
-        <pc:chgData name="Roy, Somesh" userId="1acabf4b-f33c-4133-9f27-9eb78ba0ac66" providerId="ADAL" clId="{1D6AC2EB-F712-4211-8004-4938C3240DC1}" dt="2023-07-24T22:17:12.865" v="4" actId="404"/>
-        <pc:sldMkLst>
-          <pc:docMk/>
-          <pc:sldMk cId="7928765" sldId="292"/>
-        </pc:sldMkLst>
-      </pc:sldChg>
-    </pc:docChg>
-  </pc:docChgLst>
-  <pc:docChgLst>
     <pc:chgData name="Roy, Somesh" userId="1acabf4b-f33c-4133-9f27-9eb78ba0ac66" providerId="ADAL" clId="{AADABD7A-FECC-4C96-98C3-06B2943E3085}"/>
     <pc:docChg chg="custSel addSld delSld modSld sldOrd addMainMaster delMainMaster modMainMaster">
       <pc:chgData name="Roy, Somesh" userId="1acabf4b-f33c-4133-9f27-9eb78ba0ac66" providerId="ADAL" clId="{AADABD7A-FECC-4C96-98C3-06B2943E3085}" dt="2025-07-29T02:01:20.964" v="27"/>
@@ -597,6 +575,29 @@
           </pc:sldLayoutMkLst>
         </pc:sldLayoutChg>
       </pc:sldMasterChg>
+    </pc:docChg>
+  </pc:docChgLst>
+  <pc:docChgLst>
+    <pc:chgData name="Roy, Somesh" userId="1acabf4b-f33c-4133-9f27-9eb78ba0ac66" providerId="ADAL" clId="{1D6AC2EB-F712-4211-8004-4938C3240DC1}"/>
+    <pc:docChg chg="custSel modSld">
+      <pc:chgData name="Roy, Somesh" userId="1acabf4b-f33c-4133-9f27-9eb78ba0ac66" providerId="ADAL" clId="{1D6AC2EB-F712-4211-8004-4938C3240DC1}" dt="2023-07-24T22:17:12.865" v="4" actId="404"/>
+      <pc:docMkLst>
+        <pc:docMk/>
+      </pc:docMkLst>
+      <pc:sldChg chg="delSp mod delAnim">
+        <pc:chgData name="Roy, Somesh" userId="1acabf4b-f33c-4133-9f27-9eb78ba0ac66" providerId="ADAL" clId="{1D6AC2EB-F712-4211-8004-4938C3240DC1}" dt="2023-07-24T22:16:09.385" v="0" actId="478"/>
+        <pc:sldMkLst>
+          <pc:docMk/>
+          <pc:sldMk cId="4221095728" sldId="257"/>
+        </pc:sldMkLst>
+      </pc:sldChg>
+      <pc:sldChg chg="addSp modSp mod">
+        <pc:chgData name="Roy, Somesh" userId="1acabf4b-f33c-4133-9f27-9eb78ba0ac66" providerId="ADAL" clId="{1D6AC2EB-F712-4211-8004-4938C3240DC1}" dt="2023-07-24T22:17:12.865" v="4" actId="404"/>
+        <pc:sldMkLst>
+          <pc:docMk/>
+          <pc:sldMk cId="7928765" sldId="292"/>
+        </pc:sldMkLst>
+      </pc:sldChg>
     </pc:docChg>
   </pc:docChgLst>
   <pc:docChgLst>
@@ -1459,7 +1460,7 @@
           <a:p>
             <a:fld id="{82D275FB-3023-4CE2-97CF-EB95DA1A3B15}" type="datetimeFigureOut">
               <a:rPr lang="en-US" smtClean="0"/>
-              <a:t>7/21/2026</a:t>
+              <a:t>7/26/2026</a:t>
             </a:fld>
             <a:endParaRPr lang="en-US"/>
           </a:p>
@@ -1838,7 +1839,7 @@
                 <a:tabLst/>
                 <a:defRPr/>
               </a:pPr>
-              <a:t>6</a:t>
+              <a:t>7</a:t>
             </a:fld>
             <a:endParaRPr kumimoji="0" lang="en-US" sz="1800" b="0" i="0" u="none" strike="noStrike" kern="1200" cap="none" spc="0" normalizeH="0" baseline="0" noProof="0">
               <a:ln>
@@ -1935,7 +1936,7 @@
           <a:p>
             <a:fld id="{F7021451-1387-4CA6-816F-3879F97B5CBC}" type="slidenum">
               <a:rPr lang="en-US"/>
-              <a:t>7</a:t>
+              <a:t>8</a:t>
             </a:fld>
             <a:endParaRPr lang="en-US"/>
           </a:p>
@@ -2019,7 +2020,7 @@
           <a:p>
             <a:fld id="{F7021451-1387-4CA6-816F-3879F97B5CBC}" type="slidenum">
               <a:rPr lang="en-US"/>
-              <a:t>10</a:t>
+              <a:t>11</a:t>
             </a:fld>
             <a:endParaRPr lang="en-US"/>
           </a:p>
@@ -2103,7 +2104,7 @@
           <a:p>
             <a:fld id="{F7021451-1387-4CA6-816F-3879F97B5CBC}" type="slidenum">
               <a:rPr lang="en-US"/>
-              <a:t>11</a:t>
+              <a:t>12</a:t>
             </a:fld>
             <a:endParaRPr lang="en-US"/>
           </a:p>
@@ -2277,7 +2278,7 @@
           <a:p>
             <a:fld id="{30650893-92C0-41BB-B843-C71662A9E31B}" type="datetimeFigureOut">
               <a:rPr lang="en-US" smtClean="0"/>
-              <a:t>7/21/2026</a:t>
+              <a:t>7/26/2026</a:t>
             </a:fld>
             <a:endParaRPr lang="en-US"/>
           </a:p>
@@ -2552,7 +2553,7 @@
           <a:p>
             <a:fld id="{54FDF642-009D-4294-9E1E-7F2B05CB1E7C}" type="datetime1">
               <a:rPr lang="en-US" smtClean="0"/>
-              <a:t>7/21/2026</a:t>
+              <a:t>7/26/2026</a:t>
             </a:fld>
             <a:endParaRPr lang="en-US"/>
           </a:p>
@@ -3075,7 +3076,7 @@
           <a:p>
             <a:fld id="{30650893-92C0-41BB-B843-C71662A9E31B}" type="datetimeFigureOut">
               <a:rPr lang="en-US" smtClean="0"/>
-              <a:t>7/21/2026</a:t>
+              <a:t>7/26/2026</a:t>
             </a:fld>
             <a:endParaRPr lang="en-US"/>
           </a:p>
@@ -3483,6 +3484,1945 @@
           <a:chExt cx="0" cy="0"/>
         </a:xfrm>
       </p:grpSpPr>
+      <p:sp useBgFill="1">
+        <p:nvSpPr>
+          <p:cNvPr id="10" name="Rectangle 9">
+            <a:extLst>
+              <a:ext uri="{FF2B5EF4-FFF2-40B4-BE49-F238E27FC236}">
+                <a16:creationId xmlns:a16="http://schemas.microsoft.com/office/drawing/2014/main" id="{BAD76F3E-3A97-486B-B402-44400A8B9173}"/>
+              </a:ext>
+              <a:ext uri="{C183D7F6-B498-43B3-948B-1728B52AA6E4}">
+                <adec:decorative xmlns:adec="http://schemas.microsoft.com/office/drawing/2017/decorative" val="1"/>
+              </a:ext>
+            </a:extLst>
+          </p:cNvPr>
+          <p:cNvSpPr>
+            <a:spLocks noGrp="1" noRot="1" noChangeAspect="1" noMove="1" noResize="1" noEditPoints="1" noAdjustHandles="1" noChangeArrowheads="1" noChangeShapeType="1" noTextEdit="1"/>
+          </p:cNvSpPr>
+          <p:nvPr>
+            <p:extLst>
+              <p:ext uri="{386F3935-93C4-4BCD-93E2-E3B085C9AB24}">
+                <p16:designElem xmlns:p16="http://schemas.microsoft.com/office/powerpoint/2015/main" val="1"/>
+              </p:ext>
+            </p:extLst>
+          </p:nvPr>
+        </p:nvSpPr>
+        <p:spPr>
+          <a:xfrm>
+            <a:off x="0" y="0"/>
+            <a:ext cx="12192000" cy="6858000"/>
+          </a:xfrm>
+          <a:prstGeom prst="rect">
+            <a:avLst/>
+          </a:prstGeom>
+          <a:ln>
+            <a:noFill/>
+          </a:ln>
+        </p:spPr>
+        <p:style>
+          <a:lnRef idx="2">
+            <a:schemeClr val="accent1">
+              <a:shade val="50000"/>
+            </a:schemeClr>
+          </a:lnRef>
+          <a:fillRef idx="1">
+            <a:schemeClr val="accent1"/>
+          </a:fillRef>
+          <a:effectRef idx="0">
+            <a:schemeClr val="accent1"/>
+          </a:effectRef>
+          <a:fontRef idx="minor">
+            <a:schemeClr val="lt1"/>
+          </a:fontRef>
+        </p:style>
+        <p:txBody>
+          <a:bodyPr rtlCol="0" anchor="ctr"/>
+          <a:lstStyle/>
+          <a:p>
+            <a:pPr algn="ctr"/>
+            <a:endParaRPr lang="en-US" dirty="0"/>
+          </a:p>
+        </p:txBody>
+      </p:sp>
+      <p:sp>
+        <p:nvSpPr>
+          <p:cNvPr id="4" name="Title 3">
+            <a:extLst>
+              <a:ext uri="{FF2B5EF4-FFF2-40B4-BE49-F238E27FC236}">
+                <a16:creationId xmlns:a16="http://schemas.microsoft.com/office/drawing/2014/main" id="{7BD07A21-E14F-A59A-23C8-54C473F84C7B}"/>
+              </a:ext>
+            </a:extLst>
+          </p:cNvPr>
+          <p:cNvSpPr>
+            <a:spLocks noGrp="1"/>
+          </p:cNvSpPr>
+          <p:nvPr>
+            <p:ph type="title"/>
+          </p:nvPr>
+        </p:nvSpPr>
+        <p:spPr>
+          <a:xfrm>
+            <a:off x="838199" y="1093788"/>
+            <a:ext cx="10506455" cy="2967208"/>
+          </a:xfrm>
+        </p:spPr>
+        <p:txBody>
+          <a:bodyPr vert="horz" lIns="91440" tIns="45720" rIns="91440" bIns="45720" rtlCol="0" anchor="b">
+            <a:normAutofit/>
+          </a:bodyPr>
+          <a:lstStyle/>
+          <a:p>
+            <a:r>
+              <a:rPr lang="en-US" sz="8000" dirty="0"/>
+              <a:t>Welcome Back</a:t>
+            </a:r>
+            <a:endParaRPr lang="en-US" sz="8000" kern="1200" dirty="0">
+              <a:solidFill>
+                <a:schemeClr val="tx1"/>
+              </a:solidFill>
+              <a:latin typeface="+mj-lt"/>
+              <a:ea typeface="+mj-ea"/>
+              <a:cs typeface="+mj-cs"/>
+            </a:endParaRPr>
+          </a:p>
+        </p:txBody>
+      </p:sp>
+      <p:sp>
+        <p:nvSpPr>
+          <p:cNvPr id="5" name="Text Placeholder 4">
+            <a:extLst>
+              <a:ext uri="{FF2B5EF4-FFF2-40B4-BE49-F238E27FC236}">
+                <a16:creationId xmlns:a16="http://schemas.microsoft.com/office/drawing/2014/main" id="{D8253BF0-7C47-6B7B-3089-C08E8BB90478}"/>
+              </a:ext>
+            </a:extLst>
+          </p:cNvPr>
+          <p:cNvSpPr>
+            <a:spLocks noGrp="1"/>
+          </p:cNvSpPr>
+          <p:nvPr>
+            <p:ph type="body" idx="1"/>
+          </p:nvPr>
+        </p:nvSpPr>
+        <p:spPr>
+          <a:xfrm>
+            <a:off x="7400924" y="4619624"/>
+            <a:ext cx="3946779" cy="1038225"/>
+          </a:xfrm>
+        </p:spPr>
+        <p:txBody>
+          <a:bodyPr vert="horz" lIns="91440" tIns="45720" rIns="91440" bIns="45720" rtlCol="0">
+            <a:normAutofit lnSpcReduction="10000"/>
+          </a:bodyPr>
+          <a:lstStyle/>
+          <a:p>
+            <a:pPr algn="r"/>
+            <a:r>
+              <a:rPr lang="en-US" kern="1200" dirty="0">
+                <a:solidFill>
+                  <a:schemeClr val="tx1"/>
+                </a:solidFill>
+                <a:latin typeface="+mn-lt"/>
+                <a:ea typeface="+mn-ea"/>
+                <a:cs typeface="+mn-cs"/>
+              </a:rPr>
+              <a:t>Today we will review before learning some new concepts</a:t>
+            </a:r>
+          </a:p>
+        </p:txBody>
+      </p:sp>
+      <p:sp>
+        <p:nvSpPr>
+          <p:cNvPr id="12" name="Rectangle 11">
+            <a:extLst>
+              <a:ext uri="{FF2B5EF4-FFF2-40B4-BE49-F238E27FC236}">
+                <a16:creationId xmlns:a16="http://schemas.microsoft.com/office/drawing/2014/main" id="{391F6B52-91F4-4AEB-B6DB-29FEBCF28C8B}"/>
+              </a:ext>
+              <a:ext uri="{C183D7F6-B498-43B3-948B-1728B52AA6E4}">
+                <adec:decorative xmlns:adec="http://schemas.microsoft.com/office/drawing/2017/decorative" val="1"/>
+              </a:ext>
+            </a:extLst>
+          </p:cNvPr>
+          <p:cNvSpPr>
+            <a:spLocks noGrp="1" noRot="1" noChangeAspect="1" noMove="1" noResize="1" noEditPoints="1" noAdjustHandles="1" noChangeArrowheads="1" noChangeShapeType="1" noTextEdit="1"/>
+          </p:cNvSpPr>
+          <p:nvPr>
+            <p:extLst>
+              <p:ext uri="{386F3935-93C4-4BCD-93E2-E3B085C9AB24}">
+                <p16:designElem xmlns:p16="http://schemas.microsoft.com/office/powerpoint/2015/main" val="1"/>
+              </p:ext>
+            </p:extLst>
+          </p:nvPr>
+        </p:nvSpPr>
+        <p:spPr>
+          <a:xfrm>
+            <a:off x="841248" y="4331166"/>
+            <a:ext cx="10506456" cy="18288"/>
+          </a:xfrm>
+          <a:prstGeom prst="rect">
+            <a:avLst/>
+          </a:prstGeom>
+          <a:solidFill>
+            <a:srgbClr val="D5D5D5"/>
+          </a:solidFill>
+          <a:ln w="3175">
+            <a:noFill/>
+          </a:ln>
+          <a:effectLst/>
+        </p:spPr>
+        <p:style>
+          <a:lnRef idx="2">
+            <a:schemeClr val="accent1">
+              <a:shade val="50000"/>
+            </a:schemeClr>
+          </a:lnRef>
+          <a:fillRef idx="1">
+            <a:schemeClr val="accent1"/>
+          </a:fillRef>
+          <a:effectRef idx="0">
+            <a:schemeClr val="accent1"/>
+          </a:effectRef>
+          <a:fontRef idx="minor">
+            <a:schemeClr val="lt1"/>
+          </a:fontRef>
+        </p:style>
+        <p:txBody>
+          <a:bodyPr rtlCol="0" anchor="ctr"/>
+          <a:lstStyle/>
+          <a:p>
+            <a:pPr algn="ctr"/>
+            <a:endParaRPr lang="en-US" dirty="0">
+              <a:solidFill>
+                <a:prstClr val="white"/>
+              </a:solidFill>
+              <a:latin typeface="Calibri" panose="020F0502020204030204"/>
+            </a:endParaRPr>
+          </a:p>
+        </p:txBody>
+      </p:sp>
+      <p:sp>
+        <p:nvSpPr>
+          <p:cNvPr id="14" name="Rectangle 13">
+            <a:extLst>
+              <a:ext uri="{FF2B5EF4-FFF2-40B4-BE49-F238E27FC236}">
+                <a16:creationId xmlns:a16="http://schemas.microsoft.com/office/drawing/2014/main" id="{2CD6F061-7C53-44F4-9794-953DB70A451B}"/>
+              </a:ext>
+              <a:ext uri="{C183D7F6-B498-43B3-948B-1728B52AA6E4}">
+                <adec:decorative xmlns:adec="http://schemas.microsoft.com/office/drawing/2017/decorative" val="1"/>
+              </a:ext>
+            </a:extLst>
+          </p:cNvPr>
+          <p:cNvSpPr>
+            <a:spLocks noGrp="1" noRot="1" noChangeAspect="1" noMove="1" noResize="1" noEditPoints="1" noAdjustHandles="1" noChangeArrowheads="1" noChangeShapeType="1" noTextEdit="1"/>
+          </p:cNvSpPr>
+          <p:nvPr>
+            <p:extLst>
+              <p:ext uri="{386F3935-93C4-4BCD-93E2-E3B085C9AB24}">
+                <p16:designElem xmlns:p16="http://schemas.microsoft.com/office/powerpoint/2015/main" val="1"/>
+              </p:ext>
+            </p:extLst>
+          </p:nvPr>
+        </p:nvSpPr>
+        <p:spPr>
+          <a:xfrm rot="5400000">
+            <a:off x="9346882" y="2348839"/>
+            <a:ext cx="54864" cy="3946779"/>
+          </a:xfrm>
+          <a:prstGeom prst="rect">
+            <a:avLst/>
+          </a:prstGeom>
+          <a:solidFill>
+            <a:schemeClr val="accent2"/>
+          </a:solidFill>
+          <a:ln>
+            <a:noFill/>
+          </a:ln>
+        </p:spPr>
+        <p:style>
+          <a:lnRef idx="2">
+            <a:schemeClr val="accent1">
+              <a:shade val="50000"/>
+            </a:schemeClr>
+          </a:lnRef>
+          <a:fillRef idx="1">
+            <a:schemeClr val="accent1"/>
+          </a:fillRef>
+          <a:effectRef idx="0">
+            <a:schemeClr val="accent1"/>
+          </a:effectRef>
+          <a:fontRef idx="minor">
+            <a:schemeClr val="lt1"/>
+          </a:fontRef>
+        </p:style>
+        <p:txBody>
+          <a:bodyPr rtlCol="0" anchor="ctr"/>
+          <a:lstStyle/>
+          <a:p>
+            <a:pPr marL="0" marR="0" lvl="0" indent="0" algn="ctr" defTabSz="914400" rtl="0" eaLnBrk="1" fontAlgn="auto" latinLnBrk="0" hangingPunct="1">
+              <a:lnSpc>
+                <a:spcPct val="100000"/>
+              </a:lnSpc>
+              <a:spcBef>
+                <a:spcPts val="0"/>
+              </a:spcBef>
+              <a:spcAft>
+                <a:spcPts val="0"/>
+              </a:spcAft>
+              <a:buClrTx/>
+              <a:buSzTx/>
+              <a:buFontTx/>
+              <a:buNone/>
+              <a:tabLst/>
+              <a:defRPr/>
+            </a:pPr>
+            <a:endParaRPr kumimoji="0" lang="en-US" sz="1800" b="0" i="0" u="none" strike="noStrike" kern="1200" cap="none" spc="0" normalizeH="0" baseline="0" noProof="0" dirty="0">
+              <a:ln>
+                <a:noFill/>
+              </a:ln>
+              <a:solidFill>
+                <a:prstClr val="white"/>
+              </a:solidFill>
+              <a:effectLst/>
+              <a:uLnTx/>
+              <a:uFillTx/>
+              <a:latin typeface="Calibri" panose="020F0502020204030204"/>
+              <a:ea typeface="+mn-ea"/>
+              <a:cs typeface="+mn-cs"/>
+            </a:endParaRPr>
+          </a:p>
+        </p:txBody>
+      </p:sp>
+      <p:sp>
+        <p:nvSpPr>
+          <p:cNvPr id="2" name="Slide Number Placeholder 1">
+            <a:extLst>
+              <a:ext uri="{FF2B5EF4-FFF2-40B4-BE49-F238E27FC236}">
+                <a16:creationId xmlns:a16="http://schemas.microsoft.com/office/drawing/2014/main" id="{94C169B5-CFFC-DCB6-29BA-341CED932CEC}"/>
+              </a:ext>
+            </a:extLst>
+          </p:cNvPr>
+          <p:cNvSpPr>
+            <a:spLocks noGrp="1"/>
+          </p:cNvSpPr>
+          <p:nvPr>
+            <p:ph type="sldNum" sz="quarter" idx="12"/>
+          </p:nvPr>
+        </p:nvSpPr>
+        <p:spPr/>
+        <p:txBody>
+          <a:bodyPr/>
+          <a:lstStyle/>
+          <a:p>
+            <a:fld id="{03C731F9-C159-4852-9A74-0BE793153C89}" type="slidenum">
+              <a:rPr lang="en-US" smtClean="0"/>
+              <a:t>1</a:t>
+            </a:fld>
+            <a:endParaRPr lang="en-US" dirty="0"/>
+          </a:p>
+        </p:txBody>
+      </p:sp>
+    </p:spTree>
+    <p:extLst>
+      <p:ext uri="{BB962C8B-B14F-4D97-AF65-F5344CB8AC3E}">
+        <p14:creationId xmlns:p14="http://schemas.microsoft.com/office/powerpoint/2010/main" val="3820841645"/>
+      </p:ext>
+    </p:extLst>
+  </p:cSld>
+  <p:clrMapOvr>
+    <a:masterClrMapping/>
+  </p:clrMapOvr>
+</p:sld>
+</file>
+
+<file path=ppt/slides/slide10.xml><?xml version="1.0" encoding="utf-8"?>
+<p:sld xmlns:a="http://schemas.openxmlformats.org/drawingml/2006/main" xmlns:r="http://schemas.openxmlformats.org/officeDocument/2006/relationships" xmlns:p="http://schemas.openxmlformats.org/presentationml/2006/main">
+  <p:cSld>
+    <p:bg>
+      <p:bgPr>
+        <a:solidFill>
+          <a:schemeClr val="bg1"/>
+        </a:solidFill>
+        <a:effectLst/>
+      </p:bgPr>
+    </p:bg>
+    <p:spTree>
+      <p:nvGrpSpPr>
+        <p:cNvPr id="1" name=""/>
+        <p:cNvGrpSpPr/>
+        <p:nvPr/>
+      </p:nvGrpSpPr>
+      <p:grpSpPr>
+        <a:xfrm>
+          <a:off x="0" y="0"/>
+          <a:ext cx="0" cy="0"/>
+          <a:chOff x="0" y="0"/>
+          <a:chExt cx="0" cy="0"/>
+        </a:xfrm>
+      </p:grpSpPr>
+      <p:sp useBgFill="1">
+        <p:nvSpPr>
+          <p:cNvPr id="12" name="Rectangle 11">
+            <a:extLst>
+              <a:ext uri="{FF2B5EF4-FFF2-40B4-BE49-F238E27FC236}">
+                <a16:creationId xmlns:a16="http://schemas.microsoft.com/office/drawing/2014/main" id="{C4879EFC-8E62-4E00-973C-C45EE9EC676D}"/>
+              </a:ext>
+              <a:ext uri="{C183D7F6-B498-43B3-948B-1728B52AA6E4}">
+                <adec:decorative xmlns:adec="http://schemas.microsoft.com/office/drawing/2017/decorative" val="1"/>
+              </a:ext>
+            </a:extLst>
+          </p:cNvPr>
+          <p:cNvSpPr>
+            <a:spLocks noGrp="1" noRot="1" noChangeAspect="1" noMove="1" noResize="1" noEditPoints="1" noAdjustHandles="1" noChangeArrowheads="1" noChangeShapeType="1" noTextEdit="1"/>
+          </p:cNvSpPr>
+          <p:nvPr>
+            <p:extLst>
+              <p:ext uri="{386F3935-93C4-4BCD-93E2-E3B085C9AB24}">
+                <p16:designElem xmlns:p16="http://schemas.microsoft.com/office/powerpoint/2015/main" val="1"/>
+              </p:ext>
+            </p:extLst>
+          </p:nvPr>
+        </p:nvSpPr>
+        <p:spPr>
+          <a:xfrm>
+            <a:off x="0" y="0"/>
+            <a:ext cx="12188952" cy="6858000"/>
+          </a:xfrm>
+          <a:prstGeom prst="rect">
+            <a:avLst/>
+          </a:prstGeom>
+          <a:ln>
+            <a:noFill/>
+          </a:ln>
+        </p:spPr>
+        <p:style>
+          <a:lnRef idx="2">
+            <a:schemeClr val="accent1">
+              <a:shade val="50000"/>
+            </a:schemeClr>
+          </a:lnRef>
+          <a:fillRef idx="1">
+            <a:schemeClr val="accent1"/>
+          </a:fillRef>
+          <a:effectRef idx="0">
+            <a:schemeClr val="accent1"/>
+          </a:effectRef>
+          <a:fontRef idx="minor">
+            <a:schemeClr val="lt1"/>
+          </a:fontRef>
+        </p:style>
+        <p:txBody>
+          <a:bodyPr rtlCol="0" anchor="ctr"/>
+          <a:lstStyle/>
+          <a:p>
+            <a:pPr algn="ctr"/>
+            <a:endParaRPr lang="en-US"/>
+          </a:p>
+        </p:txBody>
+      </p:sp>
+      <p:sp>
+        <p:nvSpPr>
+          <p:cNvPr id="2" name="Title 1">
+            <a:extLst>
+              <a:ext uri="{FF2B5EF4-FFF2-40B4-BE49-F238E27FC236}">
+                <a16:creationId xmlns:a16="http://schemas.microsoft.com/office/drawing/2014/main" id="{99A5B8BD-DF01-044B-C37E-0E8B21A4D5FD}"/>
+              </a:ext>
+            </a:extLst>
+          </p:cNvPr>
+          <p:cNvSpPr>
+            <a:spLocks noGrp="1"/>
+          </p:cNvSpPr>
+          <p:nvPr>
+            <p:ph type="title"/>
+          </p:nvPr>
+        </p:nvSpPr>
+        <p:spPr>
+          <a:xfrm>
+            <a:off x="638881" y="457200"/>
+            <a:ext cx="10909640" cy="1368614"/>
+          </a:xfrm>
+        </p:spPr>
+        <p:txBody>
+          <a:bodyPr vert="horz" lIns="91440" tIns="45720" rIns="91440" bIns="45720" rtlCol="0" anchor="ctr">
+            <a:normAutofit/>
+          </a:bodyPr>
+          <a:lstStyle/>
+          <a:p>
+            <a:pPr algn="ctr"/>
+            <a:r>
+              <a:rPr lang="en-US" sz="6600" dirty="0"/>
+              <a:t>We had a high AQI</a:t>
+            </a:r>
+          </a:p>
+        </p:txBody>
+      </p:sp>
+      <p:sp>
+        <p:nvSpPr>
+          <p:cNvPr id="14" name="sketch line">
+            <a:extLst>
+              <a:ext uri="{FF2B5EF4-FFF2-40B4-BE49-F238E27FC236}">
+                <a16:creationId xmlns:a16="http://schemas.microsoft.com/office/drawing/2014/main" id="{D6A9C53F-5F90-40A5-8C85-5412D39C8C68}"/>
+              </a:ext>
+              <a:ext uri="{C183D7F6-B498-43B3-948B-1728B52AA6E4}">
+                <adec:decorative xmlns:adec="http://schemas.microsoft.com/office/drawing/2017/decorative" val="1"/>
+              </a:ext>
+            </a:extLst>
+          </p:cNvPr>
+          <p:cNvSpPr>
+            <a:spLocks noGrp="1" noRot="1" noChangeAspect="1" noMove="1" noResize="1" noEditPoints="1" noAdjustHandles="1" noChangeArrowheads="1" noChangeShapeType="1" noTextEdit="1"/>
+          </p:cNvSpPr>
+          <p:nvPr>
+            <p:extLst>
+              <p:ext uri="{386F3935-93C4-4BCD-93E2-E3B085C9AB24}">
+                <p16:designElem xmlns:p16="http://schemas.microsoft.com/office/powerpoint/2015/main" val="1"/>
+              </p:ext>
+            </p:extLst>
+          </p:nvPr>
+        </p:nvSpPr>
+        <p:spPr>
+          <a:xfrm>
+            <a:off x="4450080" y="1850683"/>
+            <a:ext cx="3291840" cy="18288"/>
+          </a:xfrm>
+          <a:custGeom>
+            <a:avLst/>
+            <a:gdLst>
+              <a:gd name="csX0" fmla="*/ 0 w 3291840"/>
+              <a:gd name="csY0" fmla="*/ 0 h 18288"/>
+              <a:gd name="csX1" fmla="*/ 658368 w 3291840"/>
+              <a:gd name="csY1" fmla="*/ 0 h 18288"/>
+              <a:gd name="csX2" fmla="*/ 1283818 w 3291840"/>
+              <a:gd name="csY2" fmla="*/ 0 h 18288"/>
+              <a:gd name="csX3" fmla="*/ 1909267 w 3291840"/>
+              <a:gd name="csY3" fmla="*/ 0 h 18288"/>
+              <a:gd name="csX4" fmla="*/ 2633472 w 3291840"/>
+              <a:gd name="csY4" fmla="*/ 0 h 18288"/>
+              <a:gd name="csX5" fmla="*/ 3291840 w 3291840"/>
+              <a:gd name="csY5" fmla="*/ 0 h 18288"/>
+              <a:gd name="csX6" fmla="*/ 3291840 w 3291840"/>
+              <a:gd name="csY6" fmla="*/ 18288 h 18288"/>
+              <a:gd name="csX7" fmla="*/ 2633472 w 3291840"/>
+              <a:gd name="csY7" fmla="*/ 18288 h 18288"/>
+              <a:gd name="csX8" fmla="*/ 2073859 w 3291840"/>
+              <a:gd name="csY8" fmla="*/ 18288 h 18288"/>
+              <a:gd name="csX9" fmla="*/ 1448410 w 3291840"/>
+              <a:gd name="csY9" fmla="*/ 18288 h 18288"/>
+              <a:gd name="csX10" fmla="*/ 822960 w 3291840"/>
+              <a:gd name="csY10" fmla="*/ 18288 h 18288"/>
+              <a:gd name="csX11" fmla="*/ 0 w 3291840"/>
+              <a:gd name="csY11" fmla="*/ 18288 h 18288"/>
+              <a:gd name="csX12" fmla="*/ 0 w 3291840"/>
+              <a:gd name="csY12" fmla="*/ 0 h 18288"/>
+            </a:gdLst>
+            <a:ahLst/>
+            <a:cxnLst>
+              <a:cxn ang="0">
+                <a:pos x="csX0" y="csY0"/>
+              </a:cxn>
+              <a:cxn ang="0">
+                <a:pos x="csX1" y="csY1"/>
+              </a:cxn>
+              <a:cxn ang="0">
+                <a:pos x="csX2" y="csY2"/>
+              </a:cxn>
+              <a:cxn ang="0">
+                <a:pos x="csX3" y="csY3"/>
+              </a:cxn>
+              <a:cxn ang="0">
+                <a:pos x="csX4" y="csY4"/>
+              </a:cxn>
+              <a:cxn ang="0">
+                <a:pos x="csX5" y="csY5"/>
+              </a:cxn>
+              <a:cxn ang="0">
+                <a:pos x="csX6" y="csY6"/>
+              </a:cxn>
+              <a:cxn ang="0">
+                <a:pos x="csX7" y="csY7"/>
+              </a:cxn>
+              <a:cxn ang="0">
+                <a:pos x="csX8" y="csY8"/>
+              </a:cxn>
+              <a:cxn ang="0">
+                <a:pos x="csX9" y="csY9"/>
+              </a:cxn>
+              <a:cxn ang="0">
+                <a:pos x="csX10" y="csY10"/>
+              </a:cxn>
+              <a:cxn ang="0">
+                <a:pos x="csX11" y="csY11"/>
+              </a:cxn>
+              <a:cxn ang="0">
+                <a:pos x="csX12" y="csY12"/>
+              </a:cxn>
+            </a:cxnLst>
+            <a:rect l="l" t="t" r="r" b="b"/>
+            <a:pathLst>
+              <a:path w="3291840" h="18288" fill="none" extrusionOk="0">
+                <a:moveTo>
+                  <a:pt x="0" y="0"/>
+                </a:moveTo>
+                <a:cubicBezTo>
+                  <a:pt x="173077" y="-20031"/>
+                  <a:pt x="443104" y="6424"/>
+                  <a:pt x="658368" y="0"/>
+                </a:cubicBezTo>
+                <a:cubicBezTo>
+                  <a:pt x="873632" y="-6424"/>
+                  <a:pt x="1034028" y="11764"/>
+                  <a:pt x="1283818" y="0"/>
+                </a:cubicBezTo>
+                <a:cubicBezTo>
+                  <a:pt x="1533608" y="-11764"/>
+                  <a:pt x="1691227" y="-30112"/>
+                  <a:pt x="1909267" y="0"/>
+                </a:cubicBezTo>
+                <a:cubicBezTo>
+                  <a:pt x="2127307" y="30112"/>
+                  <a:pt x="2272465" y="-18735"/>
+                  <a:pt x="2633472" y="0"/>
+                </a:cubicBezTo>
+                <a:cubicBezTo>
+                  <a:pt x="2994479" y="18735"/>
+                  <a:pt x="3023324" y="-32030"/>
+                  <a:pt x="3291840" y="0"/>
+                </a:cubicBezTo>
+                <a:cubicBezTo>
+                  <a:pt x="3291406" y="7551"/>
+                  <a:pt x="3291373" y="9822"/>
+                  <a:pt x="3291840" y="18288"/>
+                </a:cubicBezTo>
+                <a:cubicBezTo>
+                  <a:pt x="3048445" y="38989"/>
+                  <a:pt x="2846548" y="-14400"/>
+                  <a:pt x="2633472" y="18288"/>
+                </a:cubicBezTo>
+                <a:cubicBezTo>
+                  <a:pt x="2420396" y="50976"/>
+                  <a:pt x="2304099" y="6336"/>
+                  <a:pt x="2073859" y="18288"/>
+                </a:cubicBezTo>
+                <a:cubicBezTo>
+                  <a:pt x="1843619" y="30240"/>
+                  <a:pt x="1706926" y="10778"/>
+                  <a:pt x="1448410" y="18288"/>
+                </a:cubicBezTo>
+                <a:cubicBezTo>
+                  <a:pt x="1189894" y="25798"/>
+                  <a:pt x="1002278" y="8992"/>
+                  <a:pt x="822960" y="18288"/>
+                </a:cubicBezTo>
+                <a:cubicBezTo>
+                  <a:pt x="643642" y="27585"/>
+                  <a:pt x="307039" y="38051"/>
+                  <a:pt x="0" y="18288"/>
+                </a:cubicBezTo>
+                <a:cubicBezTo>
+                  <a:pt x="60" y="11696"/>
+                  <a:pt x="66" y="3758"/>
+                  <a:pt x="0" y="0"/>
+                </a:cubicBezTo>
+                <a:close/>
+              </a:path>
+              <a:path w="3291840" h="18288" stroke="0" extrusionOk="0">
+                <a:moveTo>
+                  <a:pt x="0" y="0"/>
+                </a:moveTo>
+                <a:cubicBezTo>
+                  <a:pt x="195850" y="28018"/>
+                  <a:pt x="434891" y="17390"/>
+                  <a:pt x="592531" y="0"/>
+                </a:cubicBezTo>
+                <a:cubicBezTo>
+                  <a:pt x="750171" y="-17390"/>
+                  <a:pt x="1018709" y="32200"/>
+                  <a:pt x="1316736" y="0"/>
+                </a:cubicBezTo>
+                <a:cubicBezTo>
+                  <a:pt x="1614763" y="-32200"/>
+                  <a:pt x="1696480" y="-11367"/>
+                  <a:pt x="1876349" y="0"/>
+                </a:cubicBezTo>
+                <a:cubicBezTo>
+                  <a:pt x="2056218" y="11367"/>
+                  <a:pt x="2193364" y="13433"/>
+                  <a:pt x="2435962" y="0"/>
+                </a:cubicBezTo>
+                <a:cubicBezTo>
+                  <a:pt x="2678560" y="-13433"/>
+                  <a:pt x="3010901" y="-42367"/>
+                  <a:pt x="3291840" y="0"/>
+                </a:cubicBezTo>
+                <a:cubicBezTo>
+                  <a:pt x="3291758" y="4406"/>
+                  <a:pt x="3291751" y="9982"/>
+                  <a:pt x="3291840" y="18288"/>
+                </a:cubicBezTo>
+                <a:cubicBezTo>
+                  <a:pt x="3108993" y="14228"/>
+                  <a:pt x="2952658" y="46900"/>
+                  <a:pt x="2666390" y="18288"/>
+                </a:cubicBezTo>
+                <a:cubicBezTo>
+                  <a:pt x="2380122" y="-10324"/>
+                  <a:pt x="2263855" y="41055"/>
+                  <a:pt x="2040941" y="18288"/>
+                </a:cubicBezTo>
+                <a:cubicBezTo>
+                  <a:pt x="1818027" y="-4479"/>
+                  <a:pt x="1675097" y="6509"/>
+                  <a:pt x="1415491" y="18288"/>
+                </a:cubicBezTo>
+                <a:cubicBezTo>
+                  <a:pt x="1155885" y="30068"/>
+                  <a:pt x="852976" y="36210"/>
+                  <a:pt x="691286" y="18288"/>
+                </a:cubicBezTo>
+                <a:cubicBezTo>
+                  <a:pt x="529596" y="366"/>
+                  <a:pt x="187183" y="13912"/>
+                  <a:pt x="0" y="18288"/>
+                </a:cubicBezTo>
+                <a:cubicBezTo>
+                  <a:pt x="189" y="14288"/>
+                  <a:pt x="-703" y="3747"/>
+                  <a:pt x="0" y="0"/>
+                </a:cubicBezTo>
+                <a:close/>
+              </a:path>
+            </a:pathLst>
+          </a:custGeom>
+          <a:solidFill>
+            <a:schemeClr val="accent2"/>
+          </a:solidFill>
+          <a:ln w="41275" cap="rnd">
+            <a:solidFill>
+              <a:schemeClr val="accent2"/>
+            </a:solidFill>
+            <a:round/>
+            <a:extLst>
+              <a:ext uri="{C807C97D-BFC1-408E-A445-0C87EB9F89A2}">
+                <ask:lineSketchStyleProps xmlns:ask="http://schemas.microsoft.com/office/drawing/2018/sketchyshapes" sd="2863741219">
+                  <a:prstGeom prst="rect">
+                    <a:avLst/>
+                  </a:prstGeom>
+                  <ask:type>
+                    <ask:lineSketchFreehand/>
+                  </ask:type>
+                </ask:lineSketchStyleProps>
+              </a:ext>
+            </a:extLst>
+          </a:ln>
+        </p:spPr>
+        <p:style>
+          <a:lnRef idx="2">
+            <a:schemeClr val="accent1">
+              <a:shade val="50000"/>
+            </a:schemeClr>
+          </a:lnRef>
+          <a:fillRef idx="1">
+            <a:schemeClr val="accent1"/>
+          </a:fillRef>
+          <a:effectRef idx="0">
+            <a:schemeClr val="accent1"/>
+          </a:effectRef>
+          <a:fontRef idx="minor">
+            <a:schemeClr val="lt1"/>
+          </a:fontRef>
+        </p:style>
+        <p:txBody>
+          <a:bodyPr rtlCol="0" anchor="ctr"/>
+          <a:lstStyle/>
+          <a:p>
+            <a:pPr algn="ctr"/>
+            <a:endParaRPr lang="en-US"/>
+          </a:p>
+        </p:txBody>
+      </p:sp>
+      <p:pic>
+        <p:nvPicPr>
+          <p:cNvPr id="5" name="Content Placeholder 4">
+            <a:extLst>
+              <a:ext uri="{FF2B5EF4-FFF2-40B4-BE49-F238E27FC236}">
+                <a16:creationId xmlns:a16="http://schemas.microsoft.com/office/drawing/2014/main" id="{35A770E0-A069-5FC4-7A9E-EF4C1DEEE5D3}"/>
+              </a:ext>
+            </a:extLst>
+          </p:cNvPr>
+          <p:cNvPicPr>
+            <a:picLocks noGrp="1" noChangeAspect="1"/>
+          </p:cNvPicPr>
+          <p:nvPr>
+            <p:ph idx="1"/>
+          </p:nvPr>
+        </p:nvPicPr>
+        <p:blipFill>
+          <a:blip r:embed="rId2"/>
+          <a:stretch>
+            <a:fillRect/>
+          </a:stretch>
+        </p:blipFill>
+        <p:spPr>
+          <a:xfrm>
+            <a:off x="236947" y="2546430"/>
+            <a:ext cx="3610880" cy="3249793"/>
+          </a:xfrm>
+          <a:prstGeom prst="rect">
+            <a:avLst/>
+          </a:prstGeom>
+        </p:spPr>
+      </p:pic>
+      <p:pic>
+        <p:nvPicPr>
+          <p:cNvPr id="7" name="Picture 6">
+            <a:extLst>
+              <a:ext uri="{FF2B5EF4-FFF2-40B4-BE49-F238E27FC236}">
+                <a16:creationId xmlns:a16="http://schemas.microsoft.com/office/drawing/2014/main" id="{82DB1401-39CB-D1B9-45FE-E7A3827DF684}"/>
+              </a:ext>
+            </a:extLst>
+          </p:cNvPr>
+          <p:cNvPicPr>
+            <a:picLocks noChangeAspect="1"/>
+          </p:cNvPicPr>
+          <p:nvPr/>
+        </p:nvPicPr>
+        <p:blipFill>
+          <a:blip r:embed="rId3"/>
+          <a:stretch>
+            <a:fillRect/>
+          </a:stretch>
+        </p:blipFill>
+        <p:spPr>
+          <a:xfrm>
+            <a:off x="4218077" y="2674446"/>
+            <a:ext cx="7881947" cy="2817795"/>
+          </a:xfrm>
+          <a:prstGeom prst="rect">
+            <a:avLst/>
+          </a:prstGeom>
+        </p:spPr>
+      </p:pic>
+    </p:spTree>
+    <p:extLst>
+      <p:ext uri="{BB962C8B-B14F-4D97-AF65-F5344CB8AC3E}">
+        <p14:creationId xmlns:p14="http://schemas.microsoft.com/office/powerpoint/2010/main" val="423554484"/>
+      </p:ext>
+    </p:extLst>
+  </p:cSld>
+  <p:clrMapOvr>
+    <a:masterClrMapping/>
+  </p:clrMapOvr>
+</p:sld>
+</file>
+
+<file path=ppt/slides/slide11.xml><?xml version="1.0" encoding="utf-8"?>
+<p:sld xmlns:a="http://schemas.openxmlformats.org/drawingml/2006/main" xmlns:r="http://schemas.openxmlformats.org/officeDocument/2006/relationships" xmlns:p="http://schemas.openxmlformats.org/presentationml/2006/main">
+  <p:cSld>
+    <p:bg>
+      <p:bgPr>
+        <a:solidFill>
+          <a:schemeClr val="bg1"/>
+        </a:solidFill>
+        <a:effectLst/>
+      </p:bgPr>
+    </p:bg>
+    <p:spTree>
+      <p:nvGrpSpPr>
+        <p:cNvPr id="1" name=""/>
+        <p:cNvGrpSpPr/>
+        <p:nvPr/>
+      </p:nvGrpSpPr>
+      <p:grpSpPr>
+        <a:xfrm>
+          <a:off x="0" y="0"/>
+          <a:ext cx="0" cy="0"/>
+          <a:chOff x="0" y="0"/>
+          <a:chExt cx="0" cy="0"/>
+        </a:xfrm>
+      </p:grpSpPr>
+      <p:sp>
+        <p:nvSpPr>
+          <p:cNvPr id="28" name="Rectangle 27">
+            <a:extLst>
+              <a:ext uri="{FF2B5EF4-FFF2-40B4-BE49-F238E27FC236}">
+                <a16:creationId xmlns:a16="http://schemas.microsoft.com/office/drawing/2014/main" id="{F3060C83-F051-4F0E-ABAD-AA0DFC48B218}"/>
+              </a:ext>
+              <a:ext uri="{C183D7F6-B498-43B3-948B-1728B52AA6E4}">
+                <adec:decorative xmlns:adec="http://schemas.microsoft.com/office/drawing/2017/decorative" val="1"/>
+              </a:ext>
+            </a:extLst>
+          </p:cNvPr>
+          <p:cNvSpPr>
+            <a:spLocks noGrp="1" noRot="1" noChangeAspect="1" noMove="1" noResize="1" noEditPoints="1" noAdjustHandles="1" noChangeArrowheads="1" noChangeShapeType="1" noTextEdit="1"/>
+          </p:cNvSpPr>
+          <p:nvPr>
+            <p:extLst>
+              <p:ext uri="{386F3935-93C4-4BCD-93E2-E3B085C9AB24}">
+                <p16:designElem xmlns:p16="http://schemas.microsoft.com/office/powerpoint/2015/main" val="1"/>
+              </p:ext>
+            </p:extLst>
+          </p:nvPr>
+        </p:nvSpPr>
+        <p:spPr>
+          <a:xfrm>
+            <a:off x="0" y="0"/>
+            <a:ext cx="12192000" cy="6858000"/>
+          </a:xfrm>
+          <a:prstGeom prst="rect">
+            <a:avLst/>
+          </a:prstGeom>
+          <a:solidFill>
+            <a:schemeClr val="bg1"/>
+          </a:solidFill>
+          <a:ln>
+            <a:noFill/>
+          </a:ln>
+        </p:spPr>
+        <p:style>
+          <a:lnRef idx="2">
+            <a:schemeClr val="accent1">
+              <a:shade val="50000"/>
+            </a:schemeClr>
+          </a:lnRef>
+          <a:fillRef idx="1">
+            <a:schemeClr val="accent1"/>
+          </a:fillRef>
+          <a:effectRef idx="0">
+            <a:schemeClr val="accent1"/>
+          </a:effectRef>
+          <a:fontRef idx="minor">
+            <a:schemeClr val="lt1"/>
+          </a:fontRef>
+        </p:style>
+        <p:txBody>
+          <a:bodyPr rtlCol="0" anchor="ctr"/>
+          <a:lstStyle/>
+          <a:p>
+            <a:pPr algn="ctr"/>
+            <a:endParaRPr lang="en-US"/>
+          </a:p>
+        </p:txBody>
+      </p:sp>
+      <p:sp>
+        <p:nvSpPr>
+          <p:cNvPr id="30" name="Freeform: Shape 29">
+            <a:extLst>
+              <a:ext uri="{FF2B5EF4-FFF2-40B4-BE49-F238E27FC236}">
+                <a16:creationId xmlns:a16="http://schemas.microsoft.com/office/drawing/2014/main" id="{83C98ABE-055B-441F-B07E-44F97F083C39}"/>
+              </a:ext>
+              <a:ext uri="{C183D7F6-B498-43B3-948B-1728B52AA6E4}">
+                <adec:decorative xmlns:adec="http://schemas.microsoft.com/office/drawing/2017/decorative" val="1"/>
+              </a:ext>
+            </a:extLst>
+          </p:cNvPr>
+          <p:cNvSpPr>
+            <a:spLocks noGrp="1" noRot="1" noChangeAspect="1" noMove="1" noResize="1" noEditPoints="1" noAdjustHandles="1" noChangeArrowheads="1" noChangeShapeType="1" noTextEdit="1"/>
+          </p:cNvSpPr>
+          <p:nvPr>
+            <p:extLst>
+              <p:ext uri="{386F3935-93C4-4BCD-93E2-E3B085C9AB24}">
+                <p16:designElem xmlns:p16="http://schemas.microsoft.com/office/powerpoint/2015/main" val="1"/>
+              </p:ext>
+            </p:extLst>
+          </p:nvPr>
+        </p:nvSpPr>
+        <p:spPr>
+          <a:xfrm rot="18900000" flipH="1">
+            <a:off x="-376156" y="-253670"/>
+            <a:ext cx="1827638" cy="1376989"/>
+          </a:xfrm>
+          <a:custGeom>
+            <a:avLst/>
+            <a:gdLst>
+              <a:gd name="connsiteX0" fmla="*/ 0 w 1827638"/>
+              <a:gd name="connsiteY0" fmla="*/ 987379 h 1376989"/>
+              <a:gd name="connsiteX1" fmla="*/ 987379 w 1827638"/>
+              <a:gd name="connsiteY1" fmla="*/ 0 h 1376989"/>
+              <a:gd name="connsiteX2" fmla="*/ 1827638 w 1827638"/>
+              <a:gd name="connsiteY2" fmla="*/ 840260 h 1376989"/>
+              <a:gd name="connsiteX3" fmla="*/ 1827638 w 1827638"/>
+              <a:gd name="connsiteY3" fmla="*/ 1376989 h 1376989"/>
+              <a:gd name="connsiteX4" fmla="*/ 0 w 1827638"/>
+              <a:gd name="connsiteY4" fmla="*/ 1376989 h 1376989"/>
+            </a:gdLst>
+            <a:ahLst/>
+            <a:cxnLst>
+              <a:cxn ang="0">
+                <a:pos x="connsiteX0" y="connsiteY0"/>
+              </a:cxn>
+              <a:cxn ang="0">
+                <a:pos x="connsiteX1" y="connsiteY1"/>
+              </a:cxn>
+              <a:cxn ang="0">
+                <a:pos x="connsiteX2" y="connsiteY2"/>
+              </a:cxn>
+              <a:cxn ang="0">
+                <a:pos x="connsiteX3" y="connsiteY3"/>
+              </a:cxn>
+              <a:cxn ang="0">
+                <a:pos x="connsiteX4" y="connsiteY4"/>
+              </a:cxn>
+            </a:cxnLst>
+            <a:rect l="l" t="t" r="r" b="b"/>
+            <a:pathLst>
+              <a:path w="1827638" h="1376989">
+                <a:moveTo>
+                  <a:pt x="0" y="987379"/>
+                </a:moveTo>
+                <a:lnTo>
+                  <a:pt x="987379" y="0"/>
+                </a:lnTo>
+                <a:lnTo>
+                  <a:pt x="1827638" y="840260"/>
+                </a:lnTo>
+                <a:lnTo>
+                  <a:pt x="1827638" y="1376989"/>
+                </a:lnTo>
+                <a:lnTo>
+                  <a:pt x="0" y="1376989"/>
+                </a:lnTo>
+                <a:close/>
+              </a:path>
+            </a:pathLst>
+          </a:custGeom>
+          <a:solidFill>
+            <a:schemeClr val="accent1">
+              <a:alpha val="30000"/>
+            </a:schemeClr>
+          </a:solidFill>
+          <a:ln>
+            <a:noFill/>
+          </a:ln>
+        </p:spPr>
+        <p:style>
+          <a:lnRef idx="2">
+            <a:schemeClr val="accent1">
+              <a:shade val="50000"/>
+            </a:schemeClr>
+          </a:lnRef>
+          <a:fillRef idx="1">
+            <a:schemeClr val="accent1"/>
+          </a:fillRef>
+          <a:effectRef idx="0">
+            <a:schemeClr val="accent1"/>
+          </a:effectRef>
+          <a:fontRef idx="minor">
+            <a:schemeClr val="lt1"/>
+          </a:fontRef>
+        </p:style>
+        <p:txBody>
+          <a:bodyPr rtlCol="0" anchor="ctr"/>
+          <a:lstStyle/>
+          <a:p>
+            <a:pPr algn="ctr"/>
+            <a:endParaRPr lang="en-US"/>
+          </a:p>
+        </p:txBody>
+      </p:sp>
+      <p:sp>
+        <p:nvSpPr>
+          <p:cNvPr id="32" name="Rectangle 31">
+            <a:extLst>
+              <a:ext uri="{FF2B5EF4-FFF2-40B4-BE49-F238E27FC236}">
+                <a16:creationId xmlns:a16="http://schemas.microsoft.com/office/drawing/2014/main" id="{29FDB030-9B49-4CED-8CCD-4D99382388AC}"/>
+              </a:ext>
+              <a:ext uri="{C183D7F6-B498-43B3-948B-1728B52AA6E4}">
+                <adec:decorative xmlns:adec="http://schemas.microsoft.com/office/drawing/2017/decorative" val="1"/>
+              </a:ext>
+            </a:extLst>
+          </p:cNvPr>
+          <p:cNvSpPr>
+            <a:spLocks noGrp="1" noRot="1" noChangeAspect="1" noMove="1" noResize="1" noEditPoints="1" noAdjustHandles="1" noChangeArrowheads="1" noChangeShapeType="1" noTextEdit="1"/>
+          </p:cNvSpPr>
+          <p:nvPr>
+            <p:extLst>
+              <p:ext uri="{386F3935-93C4-4BCD-93E2-E3B085C9AB24}">
+                <p16:designElem xmlns:p16="http://schemas.microsoft.com/office/powerpoint/2015/main" val="1"/>
+              </p:ext>
+            </p:extLst>
+          </p:nvPr>
+        </p:nvSpPr>
+        <p:spPr>
+          <a:xfrm rot="18900000" flipH="1">
+            <a:off x="891641" y="422146"/>
+            <a:ext cx="645368" cy="645368"/>
+          </a:xfrm>
+          <a:prstGeom prst="rect">
+            <a:avLst/>
+          </a:prstGeom>
+          <a:solidFill>
+            <a:schemeClr val="accent1">
+              <a:alpha val="30000"/>
+            </a:schemeClr>
+          </a:solidFill>
+          <a:ln>
+            <a:noFill/>
+          </a:ln>
+        </p:spPr>
+        <p:style>
+          <a:lnRef idx="2">
+            <a:schemeClr val="accent1">
+              <a:shade val="50000"/>
+            </a:schemeClr>
+          </a:lnRef>
+          <a:fillRef idx="1">
+            <a:schemeClr val="accent1"/>
+          </a:fillRef>
+          <a:effectRef idx="0">
+            <a:schemeClr val="accent1"/>
+          </a:effectRef>
+          <a:fontRef idx="minor">
+            <a:schemeClr val="lt1"/>
+          </a:fontRef>
+        </p:style>
+        <p:txBody>
+          <a:bodyPr rtlCol="0" anchor="ctr"/>
+          <a:lstStyle/>
+          <a:p>
+            <a:pPr algn="ctr"/>
+            <a:endParaRPr lang="en-US"/>
+          </a:p>
+        </p:txBody>
+      </p:sp>
+      <p:sp>
+        <p:nvSpPr>
+          <p:cNvPr id="34" name="Rectangle 33">
+            <a:extLst>
+              <a:ext uri="{FF2B5EF4-FFF2-40B4-BE49-F238E27FC236}">
+                <a16:creationId xmlns:a16="http://schemas.microsoft.com/office/drawing/2014/main" id="{3783CA14-24A1-485C-8B30-D6A5D87987AD}"/>
+              </a:ext>
+              <a:ext uri="{C183D7F6-B498-43B3-948B-1728B52AA6E4}">
+                <adec:decorative xmlns:adec="http://schemas.microsoft.com/office/drawing/2017/decorative" val="1"/>
+              </a:ext>
+            </a:extLst>
+          </p:cNvPr>
+          <p:cNvSpPr>
+            <a:spLocks noGrp="1" noRot="1" noChangeAspect="1" noMove="1" noResize="1" noEditPoints="1" noAdjustHandles="1" noChangeArrowheads="1" noChangeShapeType="1" noTextEdit="1"/>
+          </p:cNvSpPr>
+          <p:nvPr>
+            <p:extLst>
+              <p:ext uri="{386F3935-93C4-4BCD-93E2-E3B085C9AB24}">
+                <p16:designElem xmlns:p16="http://schemas.microsoft.com/office/powerpoint/2015/main" val="1"/>
+              </p:ext>
+            </p:extLst>
+          </p:nvPr>
+        </p:nvSpPr>
+        <p:spPr>
+          <a:xfrm rot="18900000" flipH="1">
+            <a:off x="10043482" y="655140"/>
+            <a:ext cx="687472" cy="687472"/>
+          </a:xfrm>
+          <a:prstGeom prst="rect">
+            <a:avLst/>
+          </a:prstGeom>
+          <a:solidFill>
+            <a:schemeClr val="accent4">
+              <a:alpha val="30000"/>
+            </a:schemeClr>
+          </a:solidFill>
+          <a:ln>
+            <a:noFill/>
+          </a:ln>
+        </p:spPr>
+        <p:style>
+          <a:lnRef idx="2">
+            <a:schemeClr val="accent1">
+              <a:shade val="50000"/>
+            </a:schemeClr>
+          </a:lnRef>
+          <a:fillRef idx="1">
+            <a:schemeClr val="accent1"/>
+          </a:fillRef>
+          <a:effectRef idx="0">
+            <a:schemeClr val="accent1"/>
+          </a:effectRef>
+          <a:fontRef idx="minor">
+            <a:schemeClr val="lt1"/>
+          </a:fontRef>
+        </p:style>
+        <p:txBody>
+          <a:bodyPr rtlCol="0" anchor="ctr"/>
+          <a:lstStyle/>
+          <a:p>
+            <a:pPr algn="ctr"/>
+            <a:endParaRPr lang="en-US"/>
+          </a:p>
+        </p:txBody>
+      </p:sp>
+      <p:sp>
+        <p:nvSpPr>
+          <p:cNvPr id="36" name="Freeform: Shape 35">
+            <a:extLst>
+              <a:ext uri="{FF2B5EF4-FFF2-40B4-BE49-F238E27FC236}">
+                <a16:creationId xmlns:a16="http://schemas.microsoft.com/office/drawing/2014/main" id="{9A97C86A-04D6-40F7-AE84-31AB43E6A846}"/>
+              </a:ext>
+              <a:ext uri="{C183D7F6-B498-43B3-948B-1728B52AA6E4}">
+                <adec:decorative xmlns:adec="http://schemas.microsoft.com/office/drawing/2017/decorative" val="1"/>
+              </a:ext>
+            </a:extLst>
+          </p:cNvPr>
+          <p:cNvSpPr>
+            <a:spLocks noGrp="1" noRot="1" noChangeAspect="1" noMove="1" noResize="1" noEditPoints="1" noAdjustHandles="1" noChangeArrowheads="1" noChangeShapeType="1" noTextEdit="1"/>
+          </p:cNvSpPr>
+          <p:nvPr>
+            <p:extLst>
+              <p:ext uri="{386F3935-93C4-4BCD-93E2-E3B085C9AB24}">
+                <p16:designElem xmlns:p16="http://schemas.microsoft.com/office/powerpoint/2015/main" val="1"/>
+              </p:ext>
+            </p:extLst>
+          </p:nvPr>
+        </p:nvSpPr>
+        <p:spPr>
+          <a:xfrm rot="10800000" flipH="1">
+            <a:off x="9356643" y="0"/>
+            <a:ext cx="2835357" cy="1480837"/>
+          </a:xfrm>
+          <a:custGeom>
+            <a:avLst/>
+            <a:gdLst>
+              <a:gd name="connsiteX0" fmla="*/ 2835357 w 2835357"/>
+              <a:gd name="connsiteY0" fmla="*/ 1480837 h 1480837"/>
+              <a:gd name="connsiteX1" fmla="*/ 0 w 2835357"/>
+              <a:gd name="connsiteY1" fmla="*/ 1480837 h 1480837"/>
+              <a:gd name="connsiteX2" fmla="*/ 1552727 w 2835357"/>
+              <a:gd name="connsiteY2" fmla="*/ 0 h 1480837"/>
+              <a:gd name="connsiteX3" fmla="*/ 2835357 w 2835357"/>
+              <a:gd name="connsiteY3" fmla="*/ 1223245 h 1480837"/>
+            </a:gdLst>
+            <a:ahLst/>
+            <a:cxnLst>
+              <a:cxn ang="0">
+                <a:pos x="connsiteX0" y="connsiteY0"/>
+              </a:cxn>
+              <a:cxn ang="0">
+                <a:pos x="connsiteX1" y="connsiteY1"/>
+              </a:cxn>
+              <a:cxn ang="0">
+                <a:pos x="connsiteX2" y="connsiteY2"/>
+              </a:cxn>
+              <a:cxn ang="0">
+                <a:pos x="connsiteX3" y="connsiteY3"/>
+              </a:cxn>
+            </a:cxnLst>
+            <a:rect l="l" t="t" r="r" b="b"/>
+            <a:pathLst>
+              <a:path w="2835357" h="1480837">
+                <a:moveTo>
+                  <a:pt x="2835357" y="1480837"/>
+                </a:moveTo>
+                <a:lnTo>
+                  <a:pt x="0" y="1480837"/>
+                </a:lnTo>
+                <a:lnTo>
+                  <a:pt x="1552727" y="0"/>
+                </a:lnTo>
+                <a:lnTo>
+                  <a:pt x="2835357" y="1223245"/>
+                </a:lnTo>
+                <a:close/>
+              </a:path>
+            </a:pathLst>
+          </a:custGeom>
+          <a:solidFill>
+            <a:schemeClr val="accent4">
+              <a:alpha val="30000"/>
+            </a:schemeClr>
+          </a:solidFill>
+          <a:ln>
+            <a:noFill/>
+          </a:ln>
+        </p:spPr>
+        <p:style>
+          <a:lnRef idx="2">
+            <a:schemeClr val="accent1">
+              <a:shade val="50000"/>
+            </a:schemeClr>
+          </a:lnRef>
+          <a:fillRef idx="1">
+            <a:schemeClr val="accent1"/>
+          </a:fillRef>
+          <a:effectRef idx="0">
+            <a:schemeClr val="accent1"/>
+          </a:effectRef>
+          <a:fontRef idx="minor">
+            <a:schemeClr val="lt1"/>
+          </a:fontRef>
+        </p:style>
+        <p:txBody>
+          <a:bodyPr wrap="square" rtlCol="0" anchor="ctr">
+            <a:noAutofit/>
+          </a:bodyPr>
+          <a:lstStyle/>
+          <a:p>
+            <a:pPr algn="ctr"/>
+            <a:endParaRPr lang="en-US"/>
+          </a:p>
+        </p:txBody>
+      </p:sp>
+      <p:sp>
+        <p:nvSpPr>
+          <p:cNvPr id="38" name="Isosceles Triangle 37">
+            <a:extLst>
+              <a:ext uri="{FF2B5EF4-FFF2-40B4-BE49-F238E27FC236}">
+                <a16:creationId xmlns:a16="http://schemas.microsoft.com/office/drawing/2014/main" id="{FF9F2414-84E8-453E-B1F3-389FDE8192D9}"/>
+              </a:ext>
+              <a:ext uri="{C183D7F6-B498-43B3-948B-1728B52AA6E4}">
+                <adec:decorative xmlns:adec="http://schemas.microsoft.com/office/drawing/2017/decorative" val="1"/>
+              </a:ext>
+            </a:extLst>
+          </p:cNvPr>
+          <p:cNvSpPr>
+            <a:spLocks noGrp="1" noRot="1" noChangeAspect="1" noMove="1" noResize="1" noEditPoints="1" noAdjustHandles="1" noChangeArrowheads="1" noChangeShapeType="1" noTextEdit="1"/>
+          </p:cNvSpPr>
+          <p:nvPr>
+            <p:extLst>
+              <p:ext uri="{386F3935-93C4-4BCD-93E2-E3B085C9AB24}">
+                <p16:designElem xmlns:p16="http://schemas.microsoft.com/office/powerpoint/2015/main" val="1"/>
+              </p:ext>
+            </p:extLst>
+          </p:nvPr>
+        </p:nvSpPr>
+        <p:spPr>
+          <a:xfrm flipH="1">
+            <a:off x="7976344" y="6115501"/>
+            <a:ext cx="1494513" cy="742499"/>
+          </a:xfrm>
+          <a:prstGeom prst="triangle">
+            <a:avLst/>
+          </a:prstGeom>
+          <a:solidFill>
+            <a:schemeClr val="accent1">
+              <a:alpha val="30000"/>
+            </a:schemeClr>
+          </a:solidFill>
+          <a:ln>
+            <a:noFill/>
+          </a:ln>
+        </p:spPr>
+        <p:style>
+          <a:lnRef idx="2">
+            <a:schemeClr val="accent1">
+              <a:shade val="50000"/>
+            </a:schemeClr>
+          </a:lnRef>
+          <a:fillRef idx="1">
+            <a:schemeClr val="accent1"/>
+          </a:fillRef>
+          <a:effectRef idx="0">
+            <a:schemeClr val="accent1"/>
+          </a:effectRef>
+          <a:fontRef idx="minor">
+            <a:schemeClr val="lt1"/>
+          </a:fontRef>
+        </p:style>
+        <p:txBody>
+          <a:bodyPr rtlCol="0" anchor="ctr"/>
+          <a:lstStyle/>
+          <a:p>
+            <a:pPr algn="ctr"/>
+            <a:endParaRPr lang="en-US"/>
+          </a:p>
+        </p:txBody>
+      </p:sp>
+      <p:pic>
+        <p:nvPicPr>
+          <p:cNvPr id="23" name="Picture 22">
+            <a:extLst>
+              <a:ext uri="{FF2B5EF4-FFF2-40B4-BE49-F238E27FC236}">
+                <a16:creationId xmlns:a16="http://schemas.microsoft.com/office/drawing/2014/main" id="{C6AD9238-36FE-8688-48DE-A1BBF5C85AA1}"/>
+              </a:ext>
+            </a:extLst>
+          </p:cNvPr>
+          <p:cNvPicPr>
+            <a:picLocks noChangeAspect="1"/>
+          </p:cNvPicPr>
+          <p:nvPr/>
+        </p:nvPicPr>
+        <p:blipFill>
+          <a:blip r:embed="rId3"/>
+          <a:stretch>
+            <a:fillRect/>
+          </a:stretch>
+        </p:blipFill>
+        <p:spPr>
+          <a:xfrm>
+            <a:off x="643467" y="1302512"/>
+            <a:ext cx="10905066" cy="4252975"/>
+          </a:xfrm>
+          <a:prstGeom prst="rect">
+            <a:avLst/>
+          </a:prstGeom>
+          <a:ln>
+            <a:noFill/>
+          </a:ln>
+        </p:spPr>
+      </p:pic>
+      <p:sp>
+        <p:nvSpPr>
+          <p:cNvPr id="40" name="Isosceles Triangle 39">
+            <a:extLst>
+              <a:ext uri="{FF2B5EF4-FFF2-40B4-BE49-F238E27FC236}">
+                <a16:creationId xmlns:a16="http://schemas.microsoft.com/office/drawing/2014/main" id="{3ECA69A1-7536-43AC-85EF-C7106179F5ED}"/>
+              </a:ext>
+              <a:ext uri="{C183D7F6-B498-43B3-948B-1728B52AA6E4}">
+                <adec:decorative xmlns:adec="http://schemas.microsoft.com/office/drawing/2017/decorative" val="1"/>
+              </a:ext>
+            </a:extLst>
+          </p:cNvPr>
+          <p:cNvSpPr>
+            <a:spLocks noGrp="1" noRot="1" noChangeAspect="1" noMove="1" noResize="1" noEditPoints="1" noAdjustHandles="1" noChangeArrowheads="1" noChangeShapeType="1" noTextEdit="1"/>
+          </p:cNvSpPr>
+          <p:nvPr>
+            <p:extLst>
+              <p:ext uri="{386F3935-93C4-4BCD-93E2-E3B085C9AB24}">
+                <p16:designElem xmlns:p16="http://schemas.microsoft.com/office/powerpoint/2015/main" val="1"/>
+              </p:ext>
+            </p:extLst>
+          </p:nvPr>
+        </p:nvSpPr>
+        <p:spPr>
+          <a:xfrm flipH="1">
+            <a:off x="7604080" y="6453143"/>
+            <a:ext cx="814903" cy="404857"/>
+          </a:xfrm>
+          <a:prstGeom prst="triangle">
+            <a:avLst/>
+          </a:prstGeom>
+          <a:solidFill>
+            <a:schemeClr val="accent1">
+              <a:alpha val="30000"/>
+            </a:schemeClr>
+          </a:solidFill>
+          <a:ln>
+            <a:noFill/>
+          </a:ln>
+        </p:spPr>
+        <p:style>
+          <a:lnRef idx="2">
+            <a:schemeClr val="accent1">
+              <a:shade val="50000"/>
+            </a:schemeClr>
+          </a:lnRef>
+          <a:fillRef idx="1">
+            <a:schemeClr val="accent1"/>
+          </a:fillRef>
+          <a:effectRef idx="0">
+            <a:schemeClr val="accent1"/>
+          </a:effectRef>
+          <a:fontRef idx="minor">
+            <a:schemeClr val="lt1"/>
+          </a:fontRef>
+        </p:style>
+        <p:txBody>
+          <a:bodyPr rtlCol="0" anchor="ctr"/>
+          <a:lstStyle/>
+          <a:p>
+            <a:pPr algn="ctr"/>
+            <a:endParaRPr lang="en-US"/>
+          </a:p>
+        </p:txBody>
+      </p:sp>
+    </p:spTree>
+    <p:extLst>
+      <p:ext uri="{BB962C8B-B14F-4D97-AF65-F5344CB8AC3E}">
+        <p14:creationId xmlns:p14="http://schemas.microsoft.com/office/powerpoint/2010/main" val="3902131348"/>
+      </p:ext>
+    </p:extLst>
+  </p:cSld>
+  <p:clrMapOvr>
+    <a:masterClrMapping/>
+  </p:clrMapOvr>
+</p:sld>
+</file>
+
+<file path=ppt/slides/slide12.xml><?xml version="1.0" encoding="utf-8"?>
+<p:sld xmlns:a="http://schemas.openxmlformats.org/drawingml/2006/main" xmlns:r="http://schemas.openxmlformats.org/officeDocument/2006/relationships" xmlns:p="http://schemas.openxmlformats.org/presentationml/2006/main">
+  <p:cSld>
+    <p:spTree>
+      <p:nvGrpSpPr>
+        <p:cNvPr id="1" name=""/>
+        <p:cNvGrpSpPr/>
+        <p:nvPr/>
+      </p:nvGrpSpPr>
+      <p:grpSpPr>
+        <a:xfrm>
+          <a:off x="0" y="0"/>
+          <a:ext cx="0" cy="0"/>
+          <a:chOff x="0" y="0"/>
+          <a:chExt cx="0" cy="0"/>
+        </a:xfrm>
+      </p:grpSpPr>
+      <p:pic>
+        <p:nvPicPr>
+          <p:cNvPr id="2" name="Image 0" descr="preencoded.png"/>
+          <p:cNvPicPr>
+            <a:picLocks noChangeAspect="1"/>
+          </p:cNvPicPr>
+          <p:nvPr/>
+        </p:nvPicPr>
+        <p:blipFill>
+          <a:blip r:embed="rId3"/>
+          <a:stretch>
+            <a:fillRect/>
+          </a:stretch>
+        </p:blipFill>
+        <p:spPr>
+          <a:xfrm>
+            <a:off x="0" y="0"/>
+            <a:ext cx="12192000" cy="6807573"/>
+          </a:xfrm>
+          <a:prstGeom prst="rect">
+            <a:avLst/>
+          </a:prstGeom>
+        </p:spPr>
+      </p:pic>
+      <p:sp>
+        <p:nvSpPr>
+          <p:cNvPr id="3" name="Shape 0"/>
+          <p:cNvSpPr/>
+          <p:nvPr/>
+        </p:nvSpPr>
+        <p:spPr>
+          <a:xfrm>
+            <a:off x="0" y="15902"/>
+            <a:ext cx="12192000" cy="6858000"/>
+          </a:xfrm>
+          <a:prstGeom prst="rect">
+            <a:avLst/>
+          </a:prstGeom>
+          <a:solidFill>
+            <a:srgbClr val="FFFFFF">
+              <a:alpha val="75000"/>
+            </a:srgbClr>
+          </a:solidFill>
+          <a:ln w="7620">
+            <a:solidFill>
+              <a:srgbClr val="FFFFFF">
+                <a:alpha val="64000"/>
+              </a:srgbClr>
+            </a:solidFill>
+            <a:prstDash val="solid"/>
+          </a:ln>
+        </p:spPr>
+        <p:txBody>
+          <a:bodyPr/>
+          <a:lstStyle/>
+          <a:p>
+            <a:endParaRPr lang="en-US"/>
+          </a:p>
+        </p:txBody>
+      </p:sp>
+      <p:sp>
+        <p:nvSpPr>
+          <p:cNvPr id="4" name="Text 1"/>
+          <p:cNvSpPr/>
+          <p:nvPr/>
+        </p:nvSpPr>
+        <p:spPr>
+          <a:xfrm>
+            <a:off x="694333" y="1819391"/>
+            <a:ext cx="3703241" cy="597337"/>
+          </a:xfrm>
+          <a:prstGeom prst="rect">
+            <a:avLst/>
+          </a:prstGeom>
+          <a:noFill/>
+          <a:ln/>
+        </p:spPr>
+        <p:txBody>
+          <a:bodyPr wrap="none" rtlCol="0" anchor="t"/>
+          <a:lstStyle/>
+          <a:p>
+            <a:pPr>
+              <a:lnSpc>
+                <a:spcPts val="4738"/>
+              </a:lnSpc>
+            </a:pPr>
+            <a:r>
+              <a:rPr lang="en-US" sz="3645">
+                <a:solidFill>
+                  <a:srgbClr val="312F2B"/>
+                </a:solidFill>
+                <a:latin typeface="Georgia" pitchFamily="34" charset="0"/>
+                <a:ea typeface="Georgia" pitchFamily="34" charset="-122"/>
+                <a:cs typeface="Georgia" pitchFamily="34" charset="-120"/>
+              </a:rPr>
+              <a:t>Responsibilities</a:t>
+            </a:r>
+            <a:endParaRPr lang="en-US" sz="3645"/>
+          </a:p>
+        </p:txBody>
+      </p:sp>
+      <p:sp>
+        <p:nvSpPr>
+          <p:cNvPr id="5" name="Shape 2"/>
+          <p:cNvSpPr/>
+          <p:nvPr/>
+        </p:nvSpPr>
+        <p:spPr>
+          <a:xfrm>
+            <a:off x="694332" y="2821025"/>
+            <a:ext cx="3477717" cy="2363223"/>
+          </a:xfrm>
+          <a:prstGeom prst="roundRect">
+            <a:avLst>
+              <a:gd name="adj" fmla="val 2110"/>
+            </a:avLst>
+          </a:prstGeom>
+          <a:solidFill>
+            <a:srgbClr val="E8E8E3"/>
+          </a:solidFill>
+          <a:ln w="7620">
+            <a:solidFill>
+              <a:srgbClr val="D1D1C7"/>
+            </a:solidFill>
+            <a:prstDash val="solid"/>
+          </a:ln>
+        </p:spPr>
+        <p:txBody>
+          <a:bodyPr/>
+          <a:lstStyle/>
+          <a:p>
+            <a:endParaRPr lang="en-US"/>
+          </a:p>
+        </p:txBody>
+      </p:sp>
+      <p:sp>
+        <p:nvSpPr>
+          <p:cNvPr id="6" name="Text 3"/>
+          <p:cNvSpPr/>
+          <p:nvPr/>
+        </p:nvSpPr>
+        <p:spPr>
+          <a:xfrm>
+            <a:off x="885825" y="3011111"/>
+            <a:ext cx="1851620" cy="298619"/>
+          </a:xfrm>
+          <a:prstGeom prst="rect">
+            <a:avLst/>
+          </a:prstGeom>
+          <a:noFill/>
+          <a:ln/>
+        </p:spPr>
+        <p:txBody>
+          <a:bodyPr wrap="none" rtlCol="0" anchor="t"/>
+          <a:lstStyle/>
+          <a:p>
+            <a:pPr>
+              <a:lnSpc>
+                <a:spcPts val="2369"/>
+              </a:lnSpc>
+            </a:pPr>
+            <a:r>
+              <a:rPr lang="en-US" sz="1822">
+                <a:solidFill>
+                  <a:srgbClr val="272525"/>
+                </a:solidFill>
+                <a:latin typeface="Georgia" pitchFamily="34" charset="0"/>
+                <a:ea typeface="Georgia" pitchFamily="34" charset="-122"/>
+                <a:cs typeface="Georgia" pitchFamily="34" charset="-120"/>
+              </a:rPr>
+              <a:t>Stay Informed</a:t>
+            </a:r>
+            <a:endParaRPr lang="en-US" sz="1822"/>
+          </a:p>
+        </p:txBody>
+      </p:sp>
+      <p:sp>
+        <p:nvSpPr>
+          <p:cNvPr id="7" name="Text 4"/>
+          <p:cNvSpPr/>
+          <p:nvPr/>
+        </p:nvSpPr>
+        <p:spPr>
+          <a:xfrm>
+            <a:off x="885825" y="3475093"/>
+            <a:ext cx="3094732" cy="992180"/>
+          </a:xfrm>
+          <a:prstGeom prst="rect">
+            <a:avLst/>
+          </a:prstGeom>
+          <a:noFill/>
+          <a:ln/>
+        </p:spPr>
+        <p:txBody>
+          <a:bodyPr wrap="square" rtlCol="0" anchor="t"/>
+          <a:lstStyle/>
+          <a:p>
+            <a:pPr>
+              <a:lnSpc>
+                <a:spcPts val="2624"/>
+              </a:lnSpc>
+            </a:pPr>
+            <a:r>
+              <a:rPr lang="en-US" sz="1458">
+                <a:solidFill>
+                  <a:srgbClr val="272525"/>
+                </a:solidFill>
+                <a:latin typeface="Lato" pitchFamily="34" charset="0"/>
+                <a:ea typeface="Lato" pitchFamily="34" charset="-122"/>
+                <a:cs typeface="Lato" pitchFamily="34" charset="-120"/>
+              </a:rPr>
+              <a:t>Be aware of AQI updates in your area and how they might impact your health and daily routine.</a:t>
+            </a:r>
+            <a:endParaRPr lang="en-US" sz="1458"/>
+          </a:p>
+        </p:txBody>
+      </p:sp>
+      <p:sp>
+        <p:nvSpPr>
+          <p:cNvPr id="8" name="Shape 5"/>
+          <p:cNvSpPr/>
+          <p:nvPr/>
+        </p:nvSpPr>
+        <p:spPr>
+          <a:xfrm>
+            <a:off x="4357192" y="2821026"/>
+            <a:ext cx="3477717" cy="2363224"/>
+          </a:xfrm>
+          <a:prstGeom prst="roundRect">
+            <a:avLst>
+              <a:gd name="adj" fmla="val 2110"/>
+            </a:avLst>
+          </a:prstGeom>
+          <a:solidFill>
+            <a:srgbClr val="E8E8E3"/>
+          </a:solidFill>
+          <a:ln w="7620">
+            <a:solidFill>
+              <a:srgbClr val="D1D1C7"/>
+            </a:solidFill>
+            <a:prstDash val="solid"/>
+          </a:ln>
+        </p:spPr>
+        <p:txBody>
+          <a:bodyPr/>
+          <a:lstStyle/>
+          <a:p>
+            <a:endParaRPr lang="en-US"/>
+          </a:p>
+        </p:txBody>
+      </p:sp>
+      <p:sp>
+        <p:nvSpPr>
+          <p:cNvPr id="9" name="Text 6"/>
+          <p:cNvSpPr/>
+          <p:nvPr/>
+        </p:nvSpPr>
+        <p:spPr>
+          <a:xfrm>
+            <a:off x="4548683" y="3011111"/>
+            <a:ext cx="1851620" cy="298619"/>
+          </a:xfrm>
+          <a:prstGeom prst="rect">
+            <a:avLst/>
+          </a:prstGeom>
+          <a:noFill/>
+          <a:ln/>
+        </p:spPr>
+        <p:txBody>
+          <a:bodyPr wrap="none" rtlCol="0" anchor="t"/>
+          <a:lstStyle/>
+          <a:p>
+            <a:pPr>
+              <a:lnSpc>
+                <a:spcPts val="2369"/>
+              </a:lnSpc>
+            </a:pPr>
+            <a:r>
+              <a:rPr lang="en-US" sz="1822">
+                <a:solidFill>
+                  <a:srgbClr val="272525"/>
+                </a:solidFill>
+                <a:latin typeface="Georgia" pitchFamily="34" charset="0"/>
+                <a:ea typeface="Georgia" pitchFamily="34" charset="-122"/>
+                <a:cs typeface="Georgia" pitchFamily="34" charset="-120"/>
+              </a:rPr>
+              <a:t>Take Action</a:t>
+            </a:r>
+            <a:endParaRPr lang="en-US" sz="1822"/>
+          </a:p>
+        </p:txBody>
+      </p:sp>
+      <p:sp>
+        <p:nvSpPr>
+          <p:cNvPr id="10" name="Text 7"/>
+          <p:cNvSpPr/>
+          <p:nvPr/>
+        </p:nvSpPr>
+        <p:spPr>
+          <a:xfrm>
+            <a:off x="4548683" y="3475093"/>
+            <a:ext cx="3094732" cy="1322907"/>
+          </a:xfrm>
+          <a:prstGeom prst="rect">
+            <a:avLst/>
+          </a:prstGeom>
+          <a:noFill/>
+          <a:ln/>
+        </p:spPr>
+        <p:txBody>
+          <a:bodyPr wrap="square" rtlCol="0" anchor="t"/>
+          <a:lstStyle/>
+          <a:p>
+            <a:pPr>
+              <a:lnSpc>
+                <a:spcPts val="2624"/>
+              </a:lnSpc>
+            </a:pPr>
+            <a:r>
+              <a:rPr lang="en-US" sz="1458">
+                <a:solidFill>
+                  <a:srgbClr val="272525"/>
+                </a:solidFill>
+                <a:latin typeface="Lato" pitchFamily="34" charset="0"/>
+                <a:ea typeface="Lato" pitchFamily="34" charset="-122"/>
+                <a:cs typeface="Lato" pitchFamily="34" charset="-120"/>
+              </a:rPr>
+              <a:t>Take steps to reduce your personal contribution to air pollution, such as recycling, using public transport, and running your home energy efficiently.</a:t>
+            </a:r>
+            <a:endParaRPr lang="en-US" sz="1458"/>
+          </a:p>
+        </p:txBody>
+      </p:sp>
+      <p:sp>
+        <p:nvSpPr>
+          <p:cNvPr id="11" name="Shape 8"/>
+          <p:cNvSpPr/>
+          <p:nvPr/>
+        </p:nvSpPr>
+        <p:spPr>
+          <a:xfrm>
+            <a:off x="8020050" y="2821026"/>
+            <a:ext cx="3477717" cy="2363222"/>
+          </a:xfrm>
+          <a:prstGeom prst="roundRect">
+            <a:avLst>
+              <a:gd name="adj" fmla="val 2110"/>
+            </a:avLst>
+          </a:prstGeom>
+          <a:solidFill>
+            <a:srgbClr val="E8E8E3"/>
+          </a:solidFill>
+          <a:ln w="7620">
+            <a:solidFill>
+              <a:srgbClr val="D1D1C7"/>
+            </a:solidFill>
+            <a:prstDash val="solid"/>
+          </a:ln>
+        </p:spPr>
+        <p:txBody>
+          <a:bodyPr/>
+          <a:lstStyle/>
+          <a:p>
+            <a:endParaRPr lang="en-US"/>
+          </a:p>
+        </p:txBody>
+      </p:sp>
+      <p:sp>
+        <p:nvSpPr>
+          <p:cNvPr id="12" name="Text 9"/>
+          <p:cNvSpPr/>
+          <p:nvPr/>
+        </p:nvSpPr>
+        <p:spPr>
+          <a:xfrm>
+            <a:off x="8211543" y="3011111"/>
+            <a:ext cx="1851620" cy="298619"/>
+          </a:xfrm>
+          <a:prstGeom prst="rect">
+            <a:avLst/>
+          </a:prstGeom>
+          <a:noFill/>
+          <a:ln/>
+        </p:spPr>
+        <p:txBody>
+          <a:bodyPr wrap="none" rtlCol="0" anchor="t"/>
+          <a:lstStyle/>
+          <a:p>
+            <a:pPr>
+              <a:lnSpc>
+                <a:spcPts val="2369"/>
+              </a:lnSpc>
+            </a:pPr>
+            <a:r>
+              <a:rPr lang="en-US" sz="1822">
+                <a:solidFill>
+                  <a:srgbClr val="272525"/>
+                </a:solidFill>
+                <a:latin typeface="Georgia" pitchFamily="34" charset="0"/>
+                <a:ea typeface="Georgia" pitchFamily="34" charset="-122"/>
+                <a:cs typeface="Georgia" pitchFamily="34" charset="-120"/>
+              </a:rPr>
+              <a:t>Spread the Word</a:t>
+            </a:r>
+            <a:endParaRPr lang="en-US" sz="1822"/>
+          </a:p>
+        </p:txBody>
+      </p:sp>
+      <p:sp>
+        <p:nvSpPr>
+          <p:cNvPr id="13" name="Text 10"/>
+          <p:cNvSpPr/>
+          <p:nvPr/>
+        </p:nvSpPr>
+        <p:spPr>
+          <a:xfrm>
+            <a:off x="8211542" y="3475093"/>
+            <a:ext cx="3094732" cy="992180"/>
+          </a:xfrm>
+          <a:prstGeom prst="rect">
+            <a:avLst/>
+          </a:prstGeom>
+          <a:noFill/>
+          <a:ln/>
+        </p:spPr>
+        <p:txBody>
+          <a:bodyPr wrap="square" rtlCol="0" anchor="t"/>
+          <a:lstStyle/>
+          <a:p>
+            <a:pPr>
+              <a:lnSpc>
+                <a:spcPts val="2624"/>
+              </a:lnSpc>
+            </a:pPr>
+            <a:r>
+              <a:rPr lang="en-US" sz="1458">
+                <a:solidFill>
+                  <a:srgbClr val="272525"/>
+                </a:solidFill>
+                <a:latin typeface="Lato" pitchFamily="34" charset="0"/>
+                <a:ea typeface="Lato" pitchFamily="34" charset="-122"/>
+                <a:cs typeface="Lato" pitchFamily="34" charset="-120"/>
+              </a:rPr>
+              <a:t>Help raise awareness about AQI and its impact on human health and the environment.</a:t>
+            </a:r>
+            <a:endParaRPr lang="en-US" sz="1458"/>
+          </a:p>
+        </p:txBody>
+      </p:sp>
+    </p:spTree>
+  </p:cSld>
+  <p:clrMapOvr>
+    <a:masterClrMapping/>
+  </p:clrMapOvr>
+</p:sld>
+</file>
+
+<file path=ppt/slides/slide2.xml><?xml version="1.0" encoding="utf-8"?>
+<p:sld xmlns:a="http://schemas.openxmlformats.org/drawingml/2006/main" xmlns:r="http://schemas.openxmlformats.org/officeDocument/2006/relationships" xmlns:p="http://schemas.openxmlformats.org/presentationml/2006/main">
+  <p:cSld>
+    <p:spTree>
+      <p:nvGrpSpPr>
+        <p:cNvPr id="1" name=""/>
+        <p:cNvGrpSpPr/>
+        <p:nvPr/>
+      </p:nvGrpSpPr>
+      <p:grpSpPr>
+        <a:xfrm>
+          <a:off x="0" y="0"/>
+          <a:ext cx="0" cy="0"/>
+          <a:chOff x="0" y="0"/>
+          <a:chExt cx="0" cy="0"/>
+        </a:xfrm>
+      </p:grpSpPr>
       <p:sp>
         <p:nvSpPr>
           <p:cNvPr id="2" name="Title 1">
@@ -3512,8 +5452,8 @@
           <a:lstStyle/>
           <a:p>
             <a:r>
-              <a:rPr lang="en-US" sz="5400"/>
-              <a:t>Let’s play a game</a:t>
+              <a:rPr lang="en-US" sz="5400" dirty="0"/>
+              <a:t>Let’s play our first game for today</a:t>
             </a:r>
           </a:p>
         </p:txBody>
@@ -3721,7 +5661,7 @@
           <a:p>
             <a:fld id="{03C731F9-C159-4852-9A74-0BE793153C89}" type="slidenum">
               <a:rPr lang="en-US" smtClean="0"/>
-              <a:t>1</a:t>
+              <a:t>2</a:t>
             </a:fld>
             <a:endParaRPr lang="en-US"/>
           </a:p>
@@ -3740,1101 +5680,7 @@
 </p:sld>
 </file>
 
-<file path=ppt/slides/slide10.xml><?xml version="1.0" encoding="utf-8"?>
-<p:sld xmlns:a="http://schemas.openxmlformats.org/drawingml/2006/main" xmlns:r="http://schemas.openxmlformats.org/officeDocument/2006/relationships" xmlns:p="http://schemas.openxmlformats.org/presentationml/2006/main">
-  <p:cSld>
-    <p:bg>
-      <p:bgPr>
-        <a:solidFill>
-          <a:schemeClr val="bg1"/>
-        </a:solidFill>
-        <a:effectLst/>
-      </p:bgPr>
-    </p:bg>
-    <p:spTree>
-      <p:nvGrpSpPr>
-        <p:cNvPr id="1" name=""/>
-        <p:cNvGrpSpPr/>
-        <p:nvPr/>
-      </p:nvGrpSpPr>
-      <p:grpSpPr>
-        <a:xfrm>
-          <a:off x="0" y="0"/>
-          <a:ext cx="0" cy="0"/>
-          <a:chOff x="0" y="0"/>
-          <a:chExt cx="0" cy="0"/>
-        </a:xfrm>
-      </p:grpSpPr>
-      <p:sp>
-        <p:nvSpPr>
-          <p:cNvPr id="28" name="Rectangle 27">
-            <a:extLst>
-              <a:ext uri="{FF2B5EF4-FFF2-40B4-BE49-F238E27FC236}">
-                <a16:creationId xmlns:a16="http://schemas.microsoft.com/office/drawing/2014/main" id="{F3060C83-F051-4F0E-ABAD-AA0DFC48B218}"/>
-              </a:ext>
-              <a:ext uri="{C183D7F6-B498-43B3-948B-1728B52AA6E4}">
-                <adec:decorative xmlns:adec="http://schemas.microsoft.com/office/drawing/2017/decorative" val="1"/>
-              </a:ext>
-            </a:extLst>
-          </p:cNvPr>
-          <p:cNvSpPr>
-            <a:spLocks noGrp="1" noRot="1" noChangeAspect="1" noMove="1" noResize="1" noEditPoints="1" noAdjustHandles="1" noChangeArrowheads="1" noChangeShapeType="1" noTextEdit="1"/>
-          </p:cNvSpPr>
-          <p:nvPr>
-            <p:extLst>
-              <p:ext uri="{386F3935-93C4-4BCD-93E2-E3B085C9AB24}">
-                <p16:designElem xmlns:p16="http://schemas.microsoft.com/office/powerpoint/2015/main" val="1"/>
-              </p:ext>
-            </p:extLst>
-          </p:nvPr>
-        </p:nvSpPr>
-        <p:spPr>
-          <a:xfrm>
-            <a:off x="0" y="0"/>
-            <a:ext cx="12192000" cy="6858000"/>
-          </a:xfrm>
-          <a:prstGeom prst="rect">
-            <a:avLst/>
-          </a:prstGeom>
-          <a:solidFill>
-            <a:schemeClr val="bg1"/>
-          </a:solidFill>
-          <a:ln>
-            <a:noFill/>
-          </a:ln>
-        </p:spPr>
-        <p:style>
-          <a:lnRef idx="2">
-            <a:schemeClr val="accent1">
-              <a:shade val="50000"/>
-            </a:schemeClr>
-          </a:lnRef>
-          <a:fillRef idx="1">
-            <a:schemeClr val="accent1"/>
-          </a:fillRef>
-          <a:effectRef idx="0">
-            <a:schemeClr val="accent1"/>
-          </a:effectRef>
-          <a:fontRef idx="minor">
-            <a:schemeClr val="lt1"/>
-          </a:fontRef>
-        </p:style>
-        <p:txBody>
-          <a:bodyPr rtlCol="0" anchor="ctr"/>
-          <a:lstStyle/>
-          <a:p>
-            <a:pPr algn="ctr"/>
-            <a:endParaRPr lang="en-US"/>
-          </a:p>
-        </p:txBody>
-      </p:sp>
-      <p:sp>
-        <p:nvSpPr>
-          <p:cNvPr id="30" name="Freeform: Shape 29">
-            <a:extLst>
-              <a:ext uri="{FF2B5EF4-FFF2-40B4-BE49-F238E27FC236}">
-                <a16:creationId xmlns:a16="http://schemas.microsoft.com/office/drawing/2014/main" id="{83C98ABE-055B-441F-B07E-44F97F083C39}"/>
-              </a:ext>
-              <a:ext uri="{C183D7F6-B498-43B3-948B-1728B52AA6E4}">
-                <adec:decorative xmlns:adec="http://schemas.microsoft.com/office/drawing/2017/decorative" val="1"/>
-              </a:ext>
-            </a:extLst>
-          </p:cNvPr>
-          <p:cNvSpPr>
-            <a:spLocks noGrp="1" noRot="1" noChangeAspect="1" noMove="1" noResize="1" noEditPoints="1" noAdjustHandles="1" noChangeArrowheads="1" noChangeShapeType="1" noTextEdit="1"/>
-          </p:cNvSpPr>
-          <p:nvPr>
-            <p:extLst>
-              <p:ext uri="{386F3935-93C4-4BCD-93E2-E3B085C9AB24}">
-                <p16:designElem xmlns:p16="http://schemas.microsoft.com/office/powerpoint/2015/main" val="1"/>
-              </p:ext>
-            </p:extLst>
-          </p:nvPr>
-        </p:nvSpPr>
-        <p:spPr>
-          <a:xfrm rot="18900000" flipH="1">
-            <a:off x="-376156" y="-253670"/>
-            <a:ext cx="1827638" cy="1376989"/>
-          </a:xfrm>
-          <a:custGeom>
-            <a:avLst/>
-            <a:gdLst>
-              <a:gd name="connsiteX0" fmla="*/ 0 w 1827638"/>
-              <a:gd name="connsiteY0" fmla="*/ 987379 h 1376989"/>
-              <a:gd name="connsiteX1" fmla="*/ 987379 w 1827638"/>
-              <a:gd name="connsiteY1" fmla="*/ 0 h 1376989"/>
-              <a:gd name="connsiteX2" fmla="*/ 1827638 w 1827638"/>
-              <a:gd name="connsiteY2" fmla="*/ 840260 h 1376989"/>
-              <a:gd name="connsiteX3" fmla="*/ 1827638 w 1827638"/>
-              <a:gd name="connsiteY3" fmla="*/ 1376989 h 1376989"/>
-              <a:gd name="connsiteX4" fmla="*/ 0 w 1827638"/>
-              <a:gd name="connsiteY4" fmla="*/ 1376989 h 1376989"/>
-            </a:gdLst>
-            <a:ahLst/>
-            <a:cxnLst>
-              <a:cxn ang="0">
-                <a:pos x="connsiteX0" y="connsiteY0"/>
-              </a:cxn>
-              <a:cxn ang="0">
-                <a:pos x="connsiteX1" y="connsiteY1"/>
-              </a:cxn>
-              <a:cxn ang="0">
-                <a:pos x="connsiteX2" y="connsiteY2"/>
-              </a:cxn>
-              <a:cxn ang="0">
-                <a:pos x="connsiteX3" y="connsiteY3"/>
-              </a:cxn>
-              <a:cxn ang="0">
-                <a:pos x="connsiteX4" y="connsiteY4"/>
-              </a:cxn>
-            </a:cxnLst>
-            <a:rect l="l" t="t" r="r" b="b"/>
-            <a:pathLst>
-              <a:path w="1827638" h="1376989">
-                <a:moveTo>
-                  <a:pt x="0" y="987379"/>
-                </a:moveTo>
-                <a:lnTo>
-                  <a:pt x="987379" y="0"/>
-                </a:lnTo>
-                <a:lnTo>
-                  <a:pt x="1827638" y="840260"/>
-                </a:lnTo>
-                <a:lnTo>
-                  <a:pt x="1827638" y="1376989"/>
-                </a:lnTo>
-                <a:lnTo>
-                  <a:pt x="0" y="1376989"/>
-                </a:lnTo>
-                <a:close/>
-              </a:path>
-            </a:pathLst>
-          </a:custGeom>
-          <a:solidFill>
-            <a:schemeClr val="accent1">
-              <a:alpha val="30000"/>
-            </a:schemeClr>
-          </a:solidFill>
-          <a:ln>
-            <a:noFill/>
-          </a:ln>
-        </p:spPr>
-        <p:style>
-          <a:lnRef idx="2">
-            <a:schemeClr val="accent1">
-              <a:shade val="50000"/>
-            </a:schemeClr>
-          </a:lnRef>
-          <a:fillRef idx="1">
-            <a:schemeClr val="accent1"/>
-          </a:fillRef>
-          <a:effectRef idx="0">
-            <a:schemeClr val="accent1"/>
-          </a:effectRef>
-          <a:fontRef idx="minor">
-            <a:schemeClr val="lt1"/>
-          </a:fontRef>
-        </p:style>
-        <p:txBody>
-          <a:bodyPr rtlCol="0" anchor="ctr"/>
-          <a:lstStyle/>
-          <a:p>
-            <a:pPr algn="ctr"/>
-            <a:endParaRPr lang="en-US"/>
-          </a:p>
-        </p:txBody>
-      </p:sp>
-      <p:sp>
-        <p:nvSpPr>
-          <p:cNvPr id="32" name="Rectangle 31">
-            <a:extLst>
-              <a:ext uri="{FF2B5EF4-FFF2-40B4-BE49-F238E27FC236}">
-                <a16:creationId xmlns:a16="http://schemas.microsoft.com/office/drawing/2014/main" id="{29FDB030-9B49-4CED-8CCD-4D99382388AC}"/>
-              </a:ext>
-              <a:ext uri="{C183D7F6-B498-43B3-948B-1728B52AA6E4}">
-                <adec:decorative xmlns:adec="http://schemas.microsoft.com/office/drawing/2017/decorative" val="1"/>
-              </a:ext>
-            </a:extLst>
-          </p:cNvPr>
-          <p:cNvSpPr>
-            <a:spLocks noGrp="1" noRot="1" noChangeAspect="1" noMove="1" noResize="1" noEditPoints="1" noAdjustHandles="1" noChangeArrowheads="1" noChangeShapeType="1" noTextEdit="1"/>
-          </p:cNvSpPr>
-          <p:nvPr>
-            <p:extLst>
-              <p:ext uri="{386F3935-93C4-4BCD-93E2-E3B085C9AB24}">
-                <p16:designElem xmlns:p16="http://schemas.microsoft.com/office/powerpoint/2015/main" val="1"/>
-              </p:ext>
-            </p:extLst>
-          </p:nvPr>
-        </p:nvSpPr>
-        <p:spPr>
-          <a:xfrm rot="18900000" flipH="1">
-            <a:off x="891641" y="422146"/>
-            <a:ext cx="645368" cy="645368"/>
-          </a:xfrm>
-          <a:prstGeom prst="rect">
-            <a:avLst/>
-          </a:prstGeom>
-          <a:solidFill>
-            <a:schemeClr val="accent1">
-              <a:alpha val="30000"/>
-            </a:schemeClr>
-          </a:solidFill>
-          <a:ln>
-            <a:noFill/>
-          </a:ln>
-        </p:spPr>
-        <p:style>
-          <a:lnRef idx="2">
-            <a:schemeClr val="accent1">
-              <a:shade val="50000"/>
-            </a:schemeClr>
-          </a:lnRef>
-          <a:fillRef idx="1">
-            <a:schemeClr val="accent1"/>
-          </a:fillRef>
-          <a:effectRef idx="0">
-            <a:schemeClr val="accent1"/>
-          </a:effectRef>
-          <a:fontRef idx="minor">
-            <a:schemeClr val="lt1"/>
-          </a:fontRef>
-        </p:style>
-        <p:txBody>
-          <a:bodyPr rtlCol="0" anchor="ctr"/>
-          <a:lstStyle/>
-          <a:p>
-            <a:pPr algn="ctr"/>
-            <a:endParaRPr lang="en-US"/>
-          </a:p>
-        </p:txBody>
-      </p:sp>
-      <p:sp>
-        <p:nvSpPr>
-          <p:cNvPr id="34" name="Rectangle 33">
-            <a:extLst>
-              <a:ext uri="{FF2B5EF4-FFF2-40B4-BE49-F238E27FC236}">
-                <a16:creationId xmlns:a16="http://schemas.microsoft.com/office/drawing/2014/main" id="{3783CA14-24A1-485C-8B30-D6A5D87987AD}"/>
-              </a:ext>
-              <a:ext uri="{C183D7F6-B498-43B3-948B-1728B52AA6E4}">
-                <adec:decorative xmlns:adec="http://schemas.microsoft.com/office/drawing/2017/decorative" val="1"/>
-              </a:ext>
-            </a:extLst>
-          </p:cNvPr>
-          <p:cNvSpPr>
-            <a:spLocks noGrp="1" noRot="1" noChangeAspect="1" noMove="1" noResize="1" noEditPoints="1" noAdjustHandles="1" noChangeArrowheads="1" noChangeShapeType="1" noTextEdit="1"/>
-          </p:cNvSpPr>
-          <p:nvPr>
-            <p:extLst>
-              <p:ext uri="{386F3935-93C4-4BCD-93E2-E3B085C9AB24}">
-                <p16:designElem xmlns:p16="http://schemas.microsoft.com/office/powerpoint/2015/main" val="1"/>
-              </p:ext>
-            </p:extLst>
-          </p:nvPr>
-        </p:nvSpPr>
-        <p:spPr>
-          <a:xfrm rot="18900000" flipH="1">
-            <a:off x="10043482" y="655140"/>
-            <a:ext cx="687472" cy="687472"/>
-          </a:xfrm>
-          <a:prstGeom prst="rect">
-            <a:avLst/>
-          </a:prstGeom>
-          <a:solidFill>
-            <a:schemeClr val="accent4">
-              <a:alpha val="30000"/>
-            </a:schemeClr>
-          </a:solidFill>
-          <a:ln>
-            <a:noFill/>
-          </a:ln>
-        </p:spPr>
-        <p:style>
-          <a:lnRef idx="2">
-            <a:schemeClr val="accent1">
-              <a:shade val="50000"/>
-            </a:schemeClr>
-          </a:lnRef>
-          <a:fillRef idx="1">
-            <a:schemeClr val="accent1"/>
-          </a:fillRef>
-          <a:effectRef idx="0">
-            <a:schemeClr val="accent1"/>
-          </a:effectRef>
-          <a:fontRef idx="minor">
-            <a:schemeClr val="lt1"/>
-          </a:fontRef>
-        </p:style>
-        <p:txBody>
-          <a:bodyPr rtlCol="0" anchor="ctr"/>
-          <a:lstStyle/>
-          <a:p>
-            <a:pPr algn="ctr"/>
-            <a:endParaRPr lang="en-US"/>
-          </a:p>
-        </p:txBody>
-      </p:sp>
-      <p:sp>
-        <p:nvSpPr>
-          <p:cNvPr id="36" name="Freeform: Shape 35">
-            <a:extLst>
-              <a:ext uri="{FF2B5EF4-FFF2-40B4-BE49-F238E27FC236}">
-                <a16:creationId xmlns:a16="http://schemas.microsoft.com/office/drawing/2014/main" id="{9A97C86A-04D6-40F7-AE84-31AB43E6A846}"/>
-              </a:ext>
-              <a:ext uri="{C183D7F6-B498-43B3-948B-1728B52AA6E4}">
-                <adec:decorative xmlns:adec="http://schemas.microsoft.com/office/drawing/2017/decorative" val="1"/>
-              </a:ext>
-            </a:extLst>
-          </p:cNvPr>
-          <p:cNvSpPr>
-            <a:spLocks noGrp="1" noRot="1" noChangeAspect="1" noMove="1" noResize="1" noEditPoints="1" noAdjustHandles="1" noChangeArrowheads="1" noChangeShapeType="1" noTextEdit="1"/>
-          </p:cNvSpPr>
-          <p:nvPr>
-            <p:extLst>
-              <p:ext uri="{386F3935-93C4-4BCD-93E2-E3B085C9AB24}">
-                <p16:designElem xmlns:p16="http://schemas.microsoft.com/office/powerpoint/2015/main" val="1"/>
-              </p:ext>
-            </p:extLst>
-          </p:nvPr>
-        </p:nvSpPr>
-        <p:spPr>
-          <a:xfrm rot="10800000" flipH="1">
-            <a:off x="9356643" y="0"/>
-            <a:ext cx="2835357" cy="1480837"/>
-          </a:xfrm>
-          <a:custGeom>
-            <a:avLst/>
-            <a:gdLst>
-              <a:gd name="connsiteX0" fmla="*/ 2835357 w 2835357"/>
-              <a:gd name="connsiteY0" fmla="*/ 1480837 h 1480837"/>
-              <a:gd name="connsiteX1" fmla="*/ 0 w 2835357"/>
-              <a:gd name="connsiteY1" fmla="*/ 1480837 h 1480837"/>
-              <a:gd name="connsiteX2" fmla="*/ 1552727 w 2835357"/>
-              <a:gd name="connsiteY2" fmla="*/ 0 h 1480837"/>
-              <a:gd name="connsiteX3" fmla="*/ 2835357 w 2835357"/>
-              <a:gd name="connsiteY3" fmla="*/ 1223245 h 1480837"/>
-            </a:gdLst>
-            <a:ahLst/>
-            <a:cxnLst>
-              <a:cxn ang="0">
-                <a:pos x="connsiteX0" y="connsiteY0"/>
-              </a:cxn>
-              <a:cxn ang="0">
-                <a:pos x="connsiteX1" y="connsiteY1"/>
-              </a:cxn>
-              <a:cxn ang="0">
-                <a:pos x="connsiteX2" y="connsiteY2"/>
-              </a:cxn>
-              <a:cxn ang="0">
-                <a:pos x="connsiteX3" y="connsiteY3"/>
-              </a:cxn>
-            </a:cxnLst>
-            <a:rect l="l" t="t" r="r" b="b"/>
-            <a:pathLst>
-              <a:path w="2835357" h="1480837">
-                <a:moveTo>
-                  <a:pt x="2835357" y="1480837"/>
-                </a:moveTo>
-                <a:lnTo>
-                  <a:pt x="0" y="1480837"/>
-                </a:lnTo>
-                <a:lnTo>
-                  <a:pt x="1552727" y="0"/>
-                </a:lnTo>
-                <a:lnTo>
-                  <a:pt x="2835357" y="1223245"/>
-                </a:lnTo>
-                <a:close/>
-              </a:path>
-            </a:pathLst>
-          </a:custGeom>
-          <a:solidFill>
-            <a:schemeClr val="accent4">
-              <a:alpha val="30000"/>
-            </a:schemeClr>
-          </a:solidFill>
-          <a:ln>
-            <a:noFill/>
-          </a:ln>
-        </p:spPr>
-        <p:style>
-          <a:lnRef idx="2">
-            <a:schemeClr val="accent1">
-              <a:shade val="50000"/>
-            </a:schemeClr>
-          </a:lnRef>
-          <a:fillRef idx="1">
-            <a:schemeClr val="accent1"/>
-          </a:fillRef>
-          <a:effectRef idx="0">
-            <a:schemeClr val="accent1"/>
-          </a:effectRef>
-          <a:fontRef idx="minor">
-            <a:schemeClr val="lt1"/>
-          </a:fontRef>
-        </p:style>
-        <p:txBody>
-          <a:bodyPr wrap="square" rtlCol="0" anchor="ctr">
-            <a:noAutofit/>
-          </a:bodyPr>
-          <a:lstStyle/>
-          <a:p>
-            <a:pPr algn="ctr"/>
-            <a:endParaRPr lang="en-US"/>
-          </a:p>
-        </p:txBody>
-      </p:sp>
-      <p:sp>
-        <p:nvSpPr>
-          <p:cNvPr id="38" name="Isosceles Triangle 37">
-            <a:extLst>
-              <a:ext uri="{FF2B5EF4-FFF2-40B4-BE49-F238E27FC236}">
-                <a16:creationId xmlns:a16="http://schemas.microsoft.com/office/drawing/2014/main" id="{FF9F2414-84E8-453E-B1F3-389FDE8192D9}"/>
-              </a:ext>
-              <a:ext uri="{C183D7F6-B498-43B3-948B-1728B52AA6E4}">
-                <adec:decorative xmlns:adec="http://schemas.microsoft.com/office/drawing/2017/decorative" val="1"/>
-              </a:ext>
-            </a:extLst>
-          </p:cNvPr>
-          <p:cNvSpPr>
-            <a:spLocks noGrp="1" noRot="1" noChangeAspect="1" noMove="1" noResize="1" noEditPoints="1" noAdjustHandles="1" noChangeArrowheads="1" noChangeShapeType="1" noTextEdit="1"/>
-          </p:cNvSpPr>
-          <p:nvPr>
-            <p:extLst>
-              <p:ext uri="{386F3935-93C4-4BCD-93E2-E3B085C9AB24}">
-                <p16:designElem xmlns:p16="http://schemas.microsoft.com/office/powerpoint/2015/main" val="1"/>
-              </p:ext>
-            </p:extLst>
-          </p:nvPr>
-        </p:nvSpPr>
-        <p:spPr>
-          <a:xfrm flipH="1">
-            <a:off x="7976344" y="6115501"/>
-            <a:ext cx="1494513" cy="742499"/>
-          </a:xfrm>
-          <a:prstGeom prst="triangle">
-            <a:avLst/>
-          </a:prstGeom>
-          <a:solidFill>
-            <a:schemeClr val="accent1">
-              <a:alpha val="30000"/>
-            </a:schemeClr>
-          </a:solidFill>
-          <a:ln>
-            <a:noFill/>
-          </a:ln>
-        </p:spPr>
-        <p:style>
-          <a:lnRef idx="2">
-            <a:schemeClr val="accent1">
-              <a:shade val="50000"/>
-            </a:schemeClr>
-          </a:lnRef>
-          <a:fillRef idx="1">
-            <a:schemeClr val="accent1"/>
-          </a:fillRef>
-          <a:effectRef idx="0">
-            <a:schemeClr val="accent1"/>
-          </a:effectRef>
-          <a:fontRef idx="minor">
-            <a:schemeClr val="lt1"/>
-          </a:fontRef>
-        </p:style>
-        <p:txBody>
-          <a:bodyPr rtlCol="0" anchor="ctr"/>
-          <a:lstStyle/>
-          <a:p>
-            <a:pPr algn="ctr"/>
-            <a:endParaRPr lang="en-US"/>
-          </a:p>
-        </p:txBody>
-      </p:sp>
-      <p:pic>
-        <p:nvPicPr>
-          <p:cNvPr id="23" name="Picture 22">
-            <a:extLst>
-              <a:ext uri="{FF2B5EF4-FFF2-40B4-BE49-F238E27FC236}">
-                <a16:creationId xmlns:a16="http://schemas.microsoft.com/office/drawing/2014/main" id="{C6AD9238-36FE-8688-48DE-A1BBF5C85AA1}"/>
-              </a:ext>
-            </a:extLst>
-          </p:cNvPr>
-          <p:cNvPicPr>
-            <a:picLocks noChangeAspect="1"/>
-          </p:cNvPicPr>
-          <p:nvPr/>
-        </p:nvPicPr>
-        <p:blipFill>
-          <a:blip r:embed="rId3"/>
-          <a:stretch>
-            <a:fillRect/>
-          </a:stretch>
-        </p:blipFill>
-        <p:spPr>
-          <a:xfrm>
-            <a:off x="643467" y="1302512"/>
-            <a:ext cx="10905066" cy="4252975"/>
-          </a:xfrm>
-          <a:prstGeom prst="rect">
-            <a:avLst/>
-          </a:prstGeom>
-          <a:ln>
-            <a:noFill/>
-          </a:ln>
-        </p:spPr>
-      </p:pic>
-      <p:sp>
-        <p:nvSpPr>
-          <p:cNvPr id="40" name="Isosceles Triangle 39">
-            <a:extLst>
-              <a:ext uri="{FF2B5EF4-FFF2-40B4-BE49-F238E27FC236}">
-                <a16:creationId xmlns:a16="http://schemas.microsoft.com/office/drawing/2014/main" id="{3ECA69A1-7536-43AC-85EF-C7106179F5ED}"/>
-              </a:ext>
-              <a:ext uri="{C183D7F6-B498-43B3-948B-1728B52AA6E4}">
-                <adec:decorative xmlns:adec="http://schemas.microsoft.com/office/drawing/2017/decorative" val="1"/>
-              </a:ext>
-            </a:extLst>
-          </p:cNvPr>
-          <p:cNvSpPr>
-            <a:spLocks noGrp="1" noRot="1" noChangeAspect="1" noMove="1" noResize="1" noEditPoints="1" noAdjustHandles="1" noChangeArrowheads="1" noChangeShapeType="1" noTextEdit="1"/>
-          </p:cNvSpPr>
-          <p:nvPr>
-            <p:extLst>
-              <p:ext uri="{386F3935-93C4-4BCD-93E2-E3B085C9AB24}">
-                <p16:designElem xmlns:p16="http://schemas.microsoft.com/office/powerpoint/2015/main" val="1"/>
-              </p:ext>
-            </p:extLst>
-          </p:nvPr>
-        </p:nvSpPr>
-        <p:spPr>
-          <a:xfrm flipH="1">
-            <a:off x="7604080" y="6453143"/>
-            <a:ext cx="814903" cy="404857"/>
-          </a:xfrm>
-          <a:prstGeom prst="triangle">
-            <a:avLst/>
-          </a:prstGeom>
-          <a:solidFill>
-            <a:schemeClr val="accent1">
-              <a:alpha val="30000"/>
-            </a:schemeClr>
-          </a:solidFill>
-          <a:ln>
-            <a:noFill/>
-          </a:ln>
-        </p:spPr>
-        <p:style>
-          <a:lnRef idx="2">
-            <a:schemeClr val="accent1">
-              <a:shade val="50000"/>
-            </a:schemeClr>
-          </a:lnRef>
-          <a:fillRef idx="1">
-            <a:schemeClr val="accent1"/>
-          </a:fillRef>
-          <a:effectRef idx="0">
-            <a:schemeClr val="accent1"/>
-          </a:effectRef>
-          <a:fontRef idx="minor">
-            <a:schemeClr val="lt1"/>
-          </a:fontRef>
-        </p:style>
-        <p:txBody>
-          <a:bodyPr rtlCol="0" anchor="ctr"/>
-          <a:lstStyle/>
-          <a:p>
-            <a:pPr algn="ctr"/>
-            <a:endParaRPr lang="en-US"/>
-          </a:p>
-        </p:txBody>
-      </p:sp>
-    </p:spTree>
-    <p:extLst>
-      <p:ext uri="{BB962C8B-B14F-4D97-AF65-F5344CB8AC3E}">
-        <p14:creationId xmlns:p14="http://schemas.microsoft.com/office/powerpoint/2010/main" val="3902131348"/>
-      </p:ext>
-    </p:extLst>
-  </p:cSld>
-  <p:clrMapOvr>
-    <a:masterClrMapping/>
-  </p:clrMapOvr>
-</p:sld>
-</file>
-
-<file path=ppt/slides/slide11.xml><?xml version="1.0" encoding="utf-8"?>
-<p:sld xmlns:a="http://schemas.openxmlformats.org/drawingml/2006/main" xmlns:r="http://schemas.openxmlformats.org/officeDocument/2006/relationships" xmlns:p="http://schemas.openxmlformats.org/presentationml/2006/main">
-  <p:cSld>
-    <p:spTree>
-      <p:nvGrpSpPr>
-        <p:cNvPr id="1" name=""/>
-        <p:cNvGrpSpPr/>
-        <p:nvPr/>
-      </p:nvGrpSpPr>
-      <p:grpSpPr>
-        <a:xfrm>
-          <a:off x="0" y="0"/>
-          <a:ext cx="0" cy="0"/>
-          <a:chOff x="0" y="0"/>
-          <a:chExt cx="0" cy="0"/>
-        </a:xfrm>
-      </p:grpSpPr>
-      <p:pic>
-        <p:nvPicPr>
-          <p:cNvPr id="2" name="Image 0" descr="preencoded.png"/>
-          <p:cNvPicPr>
-            <a:picLocks noChangeAspect="1"/>
-          </p:cNvPicPr>
-          <p:nvPr/>
-        </p:nvPicPr>
-        <p:blipFill>
-          <a:blip r:embed="rId3"/>
-          <a:stretch>
-            <a:fillRect/>
-          </a:stretch>
-        </p:blipFill>
-        <p:spPr>
-          <a:xfrm>
-            <a:off x="0" y="0"/>
-            <a:ext cx="12192000" cy="6807573"/>
-          </a:xfrm>
-          <a:prstGeom prst="rect">
-            <a:avLst/>
-          </a:prstGeom>
-        </p:spPr>
-      </p:pic>
-      <p:sp>
-        <p:nvSpPr>
-          <p:cNvPr id="3" name="Shape 0"/>
-          <p:cNvSpPr/>
-          <p:nvPr/>
-        </p:nvSpPr>
-        <p:spPr>
-          <a:xfrm>
-            <a:off x="0" y="15902"/>
-            <a:ext cx="12192000" cy="6858000"/>
-          </a:xfrm>
-          <a:prstGeom prst="rect">
-            <a:avLst/>
-          </a:prstGeom>
-          <a:solidFill>
-            <a:srgbClr val="FFFFFF">
-              <a:alpha val="75000"/>
-            </a:srgbClr>
-          </a:solidFill>
-          <a:ln w="7620">
-            <a:solidFill>
-              <a:srgbClr val="FFFFFF">
-                <a:alpha val="64000"/>
-              </a:srgbClr>
-            </a:solidFill>
-            <a:prstDash val="solid"/>
-          </a:ln>
-        </p:spPr>
-        <p:txBody>
-          <a:bodyPr/>
-          <a:lstStyle/>
-          <a:p>
-            <a:endParaRPr lang="en-US"/>
-          </a:p>
-        </p:txBody>
-      </p:sp>
-      <p:sp>
-        <p:nvSpPr>
-          <p:cNvPr id="4" name="Text 1"/>
-          <p:cNvSpPr/>
-          <p:nvPr/>
-        </p:nvSpPr>
-        <p:spPr>
-          <a:xfrm>
-            <a:off x="694333" y="1819391"/>
-            <a:ext cx="3703241" cy="597337"/>
-          </a:xfrm>
-          <a:prstGeom prst="rect">
-            <a:avLst/>
-          </a:prstGeom>
-          <a:noFill/>
-          <a:ln/>
-        </p:spPr>
-        <p:txBody>
-          <a:bodyPr wrap="none" rtlCol="0" anchor="t"/>
-          <a:lstStyle/>
-          <a:p>
-            <a:pPr>
-              <a:lnSpc>
-                <a:spcPts val="4738"/>
-              </a:lnSpc>
-            </a:pPr>
-            <a:r>
-              <a:rPr lang="en-US" sz="3645">
-                <a:solidFill>
-                  <a:srgbClr val="312F2B"/>
-                </a:solidFill>
-                <a:latin typeface="Georgia" pitchFamily="34" charset="0"/>
-                <a:ea typeface="Georgia" pitchFamily="34" charset="-122"/>
-                <a:cs typeface="Georgia" pitchFamily="34" charset="-120"/>
-              </a:rPr>
-              <a:t>Responsibilities</a:t>
-            </a:r>
-            <a:endParaRPr lang="en-US" sz="3645"/>
-          </a:p>
-        </p:txBody>
-      </p:sp>
-      <p:sp>
-        <p:nvSpPr>
-          <p:cNvPr id="5" name="Shape 2"/>
-          <p:cNvSpPr/>
-          <p:nvPr/>
-        </p:nvSpPr>
-        <p:spPr>
-          <a:xfrm>
-            <a:off x="694332" y="2821025"/>
-            <a:ext cx="3477717" cy="2363223"/>
-          </a:xfrm>
-          <a:prstGeom prst="roundRect">
-            <a:avLst>
-              <a:gd name="adj" fmla="val 2110"/>
-            </a:avLst>
-          </a:prstGeom>
-          <a:solidFill>
-            <a:srgbClr val="E8E8E3"/>
-          </a:solidFill>
-          <a:ln w="7620">
-            <a:solidFill>
-              <a:srgbClr val="D1D1C7"/>
-            </a:solidFill>
-            <a:prstDash val="solid"/>
-          </a:ln>
-        </p:spPr>
-        <p:txBody>
-          <a:bodyPr/>
-          <a:lstStyle/>
-          <a:p>
-            <a:endParaRPr lang="en-US"/>
-          </a:p>
-        </p:txBody>
-      </p:sp>
-      <p:sp>
-        <p:nvSpPr>
-          <p:cNvPr id="6" name="Text 3"/>
-          <p:cNvSpPr/>
-          <p:nvPr/>
-        </p:nvSpPr>
-        <p:spPr>
-          <a:xfrm>
-            <a:off x="885825" y="3011111"/>
-            <a:ext cx="1851620" cy="298619"/>
-          </a:xfrm>
-          <a:prstGeom prst="rect">
-            <a:avLst/>
-          </a:prstGeom>
-          <a:noFill/>
-          <a:ln/>
-        </p:spPr>
-        <p:txBody>
-          <a:bodyPr wrap="none" rtlCol="0" anchor="t"/>
-          <a:lstStyle/>
-          <a:p>
-            <a:pPr>
-              <a:lnSpc>
-                <a:spcPts val="2369"/>
-              </a:lnSpc>
-            </a:pPr>
-            <a:r>
-              <a:rPr lang="en-US" sz="1822">
-                <a:solidFill>
-                  <a:srgbClr val="272525"/>
-                </a:solidFill>
-                <a:latin typeface="Georgia" pitchFamily="34" charset="0"/>
-                <a:ea typeface="Georgia" pitchFamily="34" charset="-122"/>
-                <a:cs typeface="Georgia" pitchFamily="34" charset="-120"/>
-              </a:rPr>
-              <a:t>Stay Informed</a:t>
-            </a:r>
-            <a:endParaRPr lang="en-US" sz="1822"/>
-          </a:p>
-        </p:txBody>
-      </p:sp>
-      <p:sp>
-        <p:nvSpPr>
-          <p:cNvPr id="7" name="Text 4"/>
-          <p:cNvSpPr/>
-          <p:nvPr/>
-        </p:nvSpPr>
-        <p:spPr>
-          <a:xfrm>
-            <a:off x="885825" y="3475093"/>
-            <a:ext cx="3094732" cy="992180"/>
-          </a:xfrm>
-          <a:prstGeom prst="rect">
-            <a:avLst/>
-          </a:prstGeom>
-          <a:noFill/>
-          <a:ln/>
-        </p:spPr>
-        <p:txBody>
-          <a:bodyPr wrap="square" rtlCol="0" anchor="t"/>
-          <a:lstStyle/>
-          <a:p>
-            <a:pPr>
-              <a:lnSpc>
-                <a:spcPts val="2624"/>
-              </a:lnSpc>
-            </a:pPr>
-            <a:r>
-              <a:rPr lang="en-US" sz="1458">
-                <a:solidFill>
-                  <a:srgbClr val="272525"/>
-                </a:solidFill>
-                <a:latin typeface="Lato" pitchFamily="34" charset="0"/>
-                <a:ea typeface="Lato" pitchFamily="34" charset="-122"/>
-                <a:cs typeface="Lato" pitchFamily="34" charset="-120"/>
-              </a:rPr>
-              <a:t>Be aware of AQI updates in your area and how they might impact your health and daily routine.</a:t>
-            </a:r>
-            <a:endParaRPr lang="en-US" sz="1458"/>
-          </a:p>
-        </p:txBody>
-      </p:sp>
-      <p:sp>
-        <p:nvSpPr>
-          <p:cNvPr id="8" name="Shape 5"/>
-          <p:cNvSpPr/>
-          <p:nvPr/>
-        </p:nvSpPr>
-        <p:spPr>
-          <a:xfrm>
-            <a:off x="4357192" y="2821026"/>
-            <a:ext cx="3477717" cy="2363224"/>
-          </a:xfrm>
-          <a:prstGeom prst="roundRect">
-            <a:avLst>
-              <a:gd name="adj" fmla="val 2110"/>
-            </a:avLst>
-          </a:prstGeom>
-          <a:solidFill>
-            <a:srgbClr val="E8E8E3"/>
-          </a:solidFill>
-          <a:ln w="7620">
-            <a:solidFill>
-              <a:srgbClr val="D1D1C7"/>
-            </a:solidFill>
-            <a:prstDash val="solid"/>
-          </a:ln>
-        </p:spPr>
-        <p:txBody>
-          <a:bodyPr/>
-          <a:lstStyle/>
-          <a:p>
-            <a:endParaRPr lang="en-US"/>
-          </a:p>
-        </p:txBody>
-      </p:sp>
-      <p:sp>
-        <p:nvSpPr>
-          <p:cNvPr id="9" name="Text 6"/>
-          <p:cNvSpPr/>
-          <p:nvPr/>
-        </p:nvSpPr>
-        <p:spPr>
-          <a:xfrm>
-            <a:off x="4548683" y="3011111"/>
-            <a:ext cx="1851620" cy="298619"/>
-          </a:xfrm>
-          <a:prstGeom prst="rect">
-            <a:avLst/>
-          </a:prstGeom>
-          <a:noFill/>
-          <a:ln/>
-        </p:spPr>
-        <p:txBody>
-          <a:bodyPr wrap="none" rtlCol="0" anchor="t"/>
-          <a:lstStyle/>
-          <a:p>
-            <a:pPr>
-              <a:lnSpc>
-                <a:spcPts val="2369"/>
-              </a:lnSpc>
-            </a:pPr>
-            <a:r>
-              <a:rPr lang="en-US" sz="1822">
-                <a:solidFill>
-                  <a:srgbClr val="272525"/>
-                </a:solidFill>
-                <a:latin typeface="Georgia" pitchFamily="34" charset="0"/>
-                <a:ea typeface="Georgia" pitchFamily="34" charset="-122"/>
-                <a:cs typeface="Georgia" pitchFamily="34" charset="-120"/>
-              </a:rPr>
-              <a:t>Take Action</a:t>
-            </a:r>
-            <a:endParaRPr lang="en-US" sz="1822"/>
-          </a:p>
-        </p:txBody>
-      </p:sp>
-      <p:sp>
-        <p:nvSpPr>
-          <p:cNvPr id="10" name="Text 7"/>
-          <p:cNvSpPr/>
-          <p:nvPr/>
-        </p:nvSpPr>
-        <p:spPr>
-          <a:xfrm>
-            <a:off x="4548683" y="3475093"/>
-            <a:ext cx="3094732" cy="1322907"/>
-          </a:xfrm>
-          <a:prstGeom prst="rect">
-            <a:avLst/>
-          </a:prstGeom>
-          <a:noFill/>
-          <a:ln/>
-        </p:spPr>
-        <p:txBody>
-          <a:bodyPr wrap="square" rtlCol="0" anchor="t"/>
-          <a:lstStyle/>
-          <a:p>
-            <a:pPr>
-              <a:lnSpc>
-                <a:spcPts val="2624"/>
-              </a:lnSpc>
-            </a:pPr>
-            <a:r>
-              <a:rPr lang="en-US" sz="1458">
-                <a:solidFill>
-                  <a:srgbClr val="272525"/>
-                </a:solidFill>
-                <a:latin typeface="Lato" pitchFamily="34" charset="0"/>
-                <a:ea typeface="Lato" pitchFamily="34" charset="-122"/>
-                <a:cs typeface="Lato" pitchFamily="34" charset="-120"/>
-              </a:rPr>
-              <a:t>Take steps to reduce your personal contribution to air pollution, such as recycling, using public transport, and running your home energy efficiently.</a:t>
-            </a:r>
-            <a:endParaRPr lang="en-US" sz="1458"/>
-          </a:p>
-        </p:txBody>
-      </p:sp>
-      <p:sp>
-        <p:nvSpPr>
-          <p:cNvPr id="11" name="Shape 8"/>
-          <p:cNvSpPr/>
-          <p:nvPr/>
-        </p:nvSpPr>
-        <p:spPr>
-          <a:xfrm>
-            <a:off x="8020050" y="2821026"/>
-            <a:ext cx="3477717" cy="2363222"/>
-          </a:xfrm>
-          <a:prstGeom prst="roundRect">
-            <a:avLst>
-              <a:gd name="adj" fmla="val 2110"/>
-            </a:avLst>
-          </a:prstGeom>
-          <a:solidFill>
-            <a:srgbClr val="E8E8E3"/>
-          </a:solidFill>
-          <a:ln w="7620">
-            <a:solidFill>
-              <a:srgbClr val="D1D1C7"/>
-            </a:solidFill>
-            <a:prstDash val="solid"/>
-          </a:ln>
-        </p:spPr>
-        <p:txBody>
-          <a:bodyPr/>
-          <a:lstStyle/>
-          <a:p>
-            <a:endParaRPr lang="en-US"/>
-          </a:p>
-        </p:txBody>
-      </p:sp>
-      <p:sp>
-        <p:nvSpPr>
-          <p:cNvPr id="12" name="Text 9"/>
-          <p:cNvSpPr/>
-          <p:nvPr/>
-        </p:nvSpPr>
-        <p:spPr>
-          <a:xfrm>
-            <a:off x="8211543" y="3011111"/>
-            <a:ext cx="1851620" cy="298619"/>
-          </a:xfrm>
-          <a:prstGeom prst="rect">
-            <a:avLst/>
-          </a:prstGeom>
-          <a:noFill/>
-          <a:ln/>
-        </p:spPr>
-        <p:txBody>
-          <a:bodyPr wrap="none" rtlCol="0" anchor="t"/>
-          <a:lstStyle/>
-          <a:p>
-            <a:pPr>
-              <a:lnSpc>
-                <a:spcPts val="2369"/>
-              </a:lnSpc>
-            </a:pPr>
-            <a:r>
-              <a:rPr lang="en-US" sz="1822">
-                <a:solidFill>
-                  <a:srgbClr val="272525"/>
-                </a:solidFill>
-                <a:latin typeface="Georgia" pitchFamily="34" charset="0"/>
-                <a:ea typeface="Georgia" pitchFamily="34" charset="-122"/>
-                <a:cs typeface="Georgia" pitchFamily="34" charset="-120"/>
-              </a:rPr>
-              <a:t>Spread the Word</a:t>
-            </a:r>
-            <a:endParaRPr lang="en-US" sz="1822"/>
-          </a:p>
-        </p:txBody>
-      </p:sp>
-      <p:sp>
-        <p:nvSpPr>
-          <p:cNvPr id="13" name="Text 10"/>
-          <p:cNvSpPr/>
-          <p:nvPr/>
-        </p:nvSpPr>
-        <p:spPr>
-          <a:xfrm>
-            <a:off x="8211542" y="3475093"/>
-            <a:ext cx="3094732" cy="992180"/>
-          </a:xfrm>
-          <a:prstGeom prst="rect">
-            <a:avLst/>
-          </a:prstGeom>
-          <a:noFill/>
-          <a:ln/>
-        </p:spPr>
-        <p:txBody>
-          <a:bodyPr wrap="square" rtlCol="0" anchor="t"/>
-          <a:lstStyle/>
-          <a:p>
-            <a:pPr>
-              <a:lnSpc>
-                <a:spcPts val="2624"/>
-              </a:lnSpc>
-            </a:pPr>
-            <a:r>
-              <a:rPr lang="en-US" sz="1458">
-                <a:solidFill>
-                  <a:srgbClr val="272525"/>
-                </a:solidFill>
-                <a:latin typeface="Lato" pitchFamily="34" charset="0"/>
-                <a:ea typeface="Lato" pitchFamily="34" charset="-122"/>
-                <a:cs typeface="Lato" pitchFamily="34" charset="-120"/>
-              </a:rPr>
-              <a:t>Help raise awareness about AQI and its impact on human health and the environment.</a:t>
-            </a:r>
-            <a:endParaRPr lang="en-US" sz="1458"/>
-          </a:p>
-        </p:txBody>
-      </p:sp>
-    </p:spTree>
-  </p:cSld>
-  <p:clrMapOvr>
-    <a:masterClrMapping/>
-  </p:clrMapOvr>
-</p:sld>
-</file>
-
-<file path=ppt/slides/slide2.xml><?xml version="1.0" encoding="utf-8"?>
+<file path=ppt/slides/slide3.xml><?xml version="1.0" encoding="utf-8"?>
 <p:sld xmlns:a="http://schemas.openxmlformats.org/drawingml/2006/main" xmlns:r="http://schemas.openxmlformats.org/officeDocument/2006/relationships" xmlns:p="http://schemas.openxmlformats.org/presentationml/2006/main">
   <p:cSld>
     <p:spTree>
@@ -4886,8 +5732,8 @@
           <a:lstStyle/>
           <a:p>
             <a:r>
-              <a:rPr lang="en-US" sz="5400"/>
-              <a:t>Let’s play a game</a:t>
+              <a:rPr lang="en-US" sz="5400" dirty="0"/>
+              <a:t>Let’s play a second game</a:t>
             </a:r>
           </a:p>
         </p:txBody>
@@ -5095,7 +5941,7 @@
           <a:p>
             <a:fld id="{03C731F9-C159-4852-9A74-0BE793153C89}" type="slidenum">
               <a:rPr lang="en-US" smtClean="0"/>
-              <a:t>2</a:t>
+              <a:t>3</a:t>
             </a:fld>
             <a:endParaRPr lang="en-US"/>
           </a:p>
@@ -5114,7 +5960,7 @@
 </p:sld>
 </file>
 
-<file path=ppt/slides/slide3.xml><?xml version="1.0" encoding="utf-8"?>
+<file path=ppt/slides/slide4.xml><?xml version="1.0" encoding="utf-8"?>
 <p:sld xmlns:a="http://schemas.openxmlformats.org/drawingml/2006/main" xmlns:r="http://schemas.openxmlformats.org/officeDocument/2006/relationships" xmlns:p="http://schemas.openxmlformats.org/presentationml/2006/main">
   <p:cSld>
     <p:spTree>
@@ -5166,8 +6012,8 @@
           <a:lstStyle/>
           <a:p>
             <a:r>
-              <a:rPr lang="en-US" sz="5400"/>
-              <a:t>Let’s play a game</a:t>
+              <a:rPr lang="en-US" sz="5400" dirty="0"/>
+              <a:t>Let’s play our final game for today</a:t>
             </a:r>
           </a:p>
         </p:txBody>
@@ -5375,7 +6221,7 @@
           <a:p>
             <a:fld id="{03C731F9-C159-4852-9A74-0BE793153C89}" type="slidenum">
               <a:rPr lang="en-US" smtClean="0"/>
-              <a:t>3</a:t>
+              <a:t>4</a:t>
             </a:fld>
             <a:endParaRPr lang="en-US"/>
           </a:p>
@@ -5394,7 +6240,7 @@
 </p:sld>
 </file>
 
-<file path=ppt/slides/slide4.xml><?xml version="1.0" encoding="utf-8"?>
+<file path=ppt/slides/slide5.xml><?xml version="1.0" encoding="utf-8"?>
 <p:sld xmlns:a="http://schemas.openxmlformats.org/drawingml/2006/main" xmlns:r="http://schemas.openxmlformats.org/officeDocument/2006/relationships" xmlns:p="http://schemas.openxmlformats.org/presentationml/2006/main">
   <p:cSld>
     <p:bg>
@@ -5636,7 +6482,7 @@
 </p:sld>
 </file>
 
-<file path=ppt/slides/slide5.xml><?xml version="1.0" encoding="utf-8"?>
+<file path=ppt/slides/slide6.xml><?xml version="1.0" encoding="utf-8"?>
 <p:sld xmlns:a="http://schemas.openxmlformats.org/drawingml/2006/main" xmlns:r="http://schemas.openxmlformats.org/officeDocument/2006/relationships" xmlns:p="http://schemas.openxmlformats.org/presentationml/2006/main">
   <p:cSld>
     <p:bg>
@@ -5777,7 +6623,7 @@
 </p:sld>
 </file>
 
-<file path=ppt/slides/slide6.xml><?xml version="1.0" encoding="utf-8"?>
+<file path=ppt/slides/slide7.xml><?xml version="1.0" encoding="utf-8"?>
 <p:sld xmlns:a="http://schemas.openxmlformats.org/drawingml/2006/main" xmlns:r="http://schemas.openxmlformats.org/officeDocument/2006/relationships" xmlns:p="http://schemas.openxmlformats.org/presentationml/2006/main">
   <p:cSld>
     <p:spTree>
@@ -6398,7 +7244,7 @@
 </p:sld>
 </file>
 
-<file path=ppt/slides/slide7.xml><?xml version="1.0" encoding="utf-8"?>
+<file path=ppt/slides/slide8.xml><?xml version="1.0" encoding="utf-8"?>
 <p:sld xmlns:a="http://schemas.openxmlformats.org/drawingml/2006/main" xmlns:r="http://schemas.openxmlformats.org/officeDocument/2006/relationships" xmlns:p="http://schemas.openxmlformats.org/presentationml/2006/main">
   <p:cSld>
     <p:spTree>
@@ -6856,7 +7702,7 @@
 </p:sld>
 </file>
 
-<file path=ppt/slides/slide8.xml><?xml version="1.0" encoding="utf-8"?>
+<file path=ppt/slides/slide9.xml><?xml version="1.0" encoding="utf-8"?>
 <p:sld xmlns:a="http://schemas.openxmlformats.org/drawingml/2006/main" xmlns:r="http://schemas.openxmlformats.org/officeDocument/2006/relationships" xmlns:p="http://schemas.openxmlformats.org/presentationml/2006/main">
   <p:cSld>
     <p:spTree>
@@ -6897,13 +7743,13 @@
         </p:spPr>
         <p:txBody>
           <a:bodyPr>
-            <a:normAutofit fontScale="90000"/>
+            <a:normAutofit/>
           </a:bodyPr>
           <a:lstStyle/>
           <a:p>
             <a:r>
               <a:rPr lang="en-US" dirty="0"/>
-              <a:t>Last week we were under an air quality alert!</a:t>
+              <a:t>Recently, we have been under air quality alerts!</a:t>
             </a:r>
           </a:p>
         </p:txBody>
@@ -7023,485 +7869,6 @@
     <p:extLst>
       <p:ext uri="{BB962C8B-B14F-4D97-AF65-F5344CB8AC3E}">
         <p14:creationId xmlns:p14="http://schemas.microsoft.com/office/powerpoint/2010/main" val="1645279971"/>
-      </p:ext>
-    </p:extLst>
-  </p:cSld>
-  <p:clrMapOvr>
-    <a:masterClrMapping/>
-  </p:clrMapOvr>
-</p:sld>
-</file>
-
-<file path=ppt/slides/slide9.xml><?xml version="1.0" encoding="utf-8"?>
-<p:sld xmlns:a="http://schemas.openxmlformats.org/drawingml/2006/main" xmlns:r="http://schemas.openxmlformats.org/officeDocument/2006/relationships" xmlns:p="http://schemas.openxmlformats.org/presentationml/2006/main">
-  <p:cSld>
-    <p:bg>
-      <p:bgPr>
-        <a:solidFill>
-          <a:schemeClr val="bg1"/>
-        </a:solidFill>
-        <a:effectLst/>
-      </p:bgPr>
-    </p:bg>
-    <p:spTree>
-      <p:nvGrpSpPr>
-        <p:cNvPr id="1" name=""/>
-        <p:cNvGrpSpPr/>
-        <p:nvPr/>
-      </p:nvGrpSpPr>
-      <p:grpSpPr>
-        <a:xfrm>
-          <a:off x="0" y="0"/>
-          <a:ext cx="0" cy="0"/>
-          <a:chOff x="0" y="0"/>
-          <a:chExt cx="0" cy="0"/>
-        </a:xfrm>
-      </p:grpSpPr>
-      <p:sp useBgFill="1">
-        <p:nvSpPr>
-          <p:cNvPr id="12" name="Rectangle 11">
-            <a:extLst>
-              <a:ext uri="{FF2B5EF4-FFF2-40B4-BE49-F238E27FC236}">
-                <a16:creationId xmlns:a16="http://schemas.microsoft.com/office/drawing/2014/main" id="{C4879EFC-8E62-4E00-973C-C45EE9EC676D}"/>
-              </a:ext>
-              <a:ext uri="{C183D7F6-B498-43B3-948B-1728B52AA6E4}">
-                <adec:decorative xmlns:adec="http://schemas.microsoft.com/office/drawing/2017/decorative" val="1"/>
-              </a:ext>
-            </a:extLst>
-          </p:cNvPr>
-          <p:cNvSpPr>
-            <a:spLocks noGrp="1" noRot="1" noChangeAspect="1" noMove="1" noResize="1" noEditPoints="1" noAdjustHandles="1" noChangeArrowheads="1" noChangeShapeType="1" noTextEdit="1"/>
-          </p:cNvSpPr>
-          <p:nvPr>
-            <p:extLst>
-              <p:ext uri="{386F3935-93C4-4BCD-93E2-E3B085C9AB24}">
-                <p16:designElem xmlns:p16="http://schemas.microsoft.com/office/powerpoint/2015/main" val="1"/>
-              </p:ext>
-            </p:extLst>
-          </p:nvPr>
-        </p:nvSpPr>
-        <p:spPr>
-          <a:xfrm>
-            <a:off x="0" y="0"/>
-            <a:ext cx="12188952" cy="6858000"/>
-          </a:xfrm>
-          <a:prstGeom prst="rect">
-            <a:avLst/>
-          </a:prstGeom>
-          <a:ln>
-            <a:noFill/>
-          </a:ln>
-        </p:spPr>
-        <p:style>
-          <a:lnRef idx="2">
-            <a:schemeClr val="accent1">
-              <a:shade val="50000"/>
-            </a:schemeClr>
-          </a:lnRef>
-          <a:fillRef idx="1">
-            <a:schemeClr val="accent1"/>
-          </a:fillRef>
-          <a:effectRef idx="0">
-            <a:schemeClr val="accent1"/>
-          </a:effectRef>
-          <a:fontRef idx="minor">
-            <a:schemeClr val="lt1"/>
-          </a:fontRef>
-        </p:style>
-        <p:txBody>
-          <a:bodyPr rtlCol="0" anchor="ctr"/>
-          <a:lstStyle/>
-          <a:p>
-            <a:pPr algn="ctr"/>
-            <a:endParaRPr lang="en-US"/>
-          </a:p>
-        </p:txBody>
-      </p:sp>
-      <p:sp>
-        <p:nvSpPr>
-          <p:cNvPr id="2" name="Title 1">
-            <a:extLst>
-              <a:ext uri="{FF2B5EF4-FFF2-40B4-BE49-F238E27FC236}">
-                <a16:creationId xmlns:a16="http://schemas.microsoft.com/office/drawing/2014/main" id="{99A5B8BD-DF01-044B-C37E-0E8B21A4D5FD}"/>
-              </a:ext>
-            </a:extLst>
-          </p:cNvPr>
-          <p:cNvSpPr>
-            <a:spLocks noGrp="1"/>
-          </p:cNvSpPr>
-          <p:nvPr>
-            <p:ph type="title"/>
-          </p:nvPr>
-        </p:nvSpPr>
-        <p:spPr>
-          <a:xfrm>
-            <a:off x="638881" y="457200"/>
-            <a:ext cx="10909640" cy="1368614"/>
-          </a:xfrm>
-        </p:spPr>
-        <p:txBody>
-          <a:bodyPr vert="horz" lIns="91440" tIns="45720" rIns="91440" bIns="45720" rtlCol="0" anchor="ctr">
-            <a:normAutofit/>
-          </a:bodyPr>
-          <a:lstStyle/>
-          <a:p>
-            <a:pPr algn="ctr"/>
-            <a:r>
-              <a:rPr lang="en-US" sz="6600" dirty="0"/>
-              <a:t>We had a high AQI</a:t>
-            </a:r>
-          </a:p>
-        </p:txBody>
-      </p:sp>
-      <p:sp>
-        <p:nvSpPr>
-          <p:cNvPr id="14" name="sketch line">
-            <a:extLst>
-              <a:ext uri="{FF2B5EF4-FFF2-40B4-BE49-F238E27FC236}">
-                <a16:creationId xmlns:a16="http://schemas.microsoft.com/office/drawing/2014/main" id="{D6A9C53F-5F90-40A5-8C85-5412D39C8C68}"/>
-              </a:ext>
-              <a:ext uri="{C183D7F6-B498-43B3-948B-1728B52AA6E4}">
-                <adec:decorative xmlns:adec="http://schemas.microsoft.com/office/drawing/2017/decorative" val="1"/>
-              </a:ext>
-            </a:extLst>
-          </p:cNvPr>
-          <p:cNvSpPr>
-            <a:spLocks noGrp="1" noRot="1" noChangeAspect="1" noMove="1" noResize="1" noEditPoints="1" noAdjustHandles="1" noChangeArrowheads="1" noChangeShapeType="1" noTextEdit="1"/>
-          </p:cNvSpPr>
-          <p:nvPr>
-            <p:extLst>
-              <p:ext uri="{386F3935-93C4-4BCD-93E2-E3B085C9AB24}">
-                <p16:designElem xmlns:p16="http://schemas.microsoft.com/office/powerpoint/2015/main" val="1"/>
-              </p:ext>
-            </p:extLst>
-          </p:nvPr>
-        </p:nvSpPr>
-        <p:spPr>
-          <a:xfrm>
-            <a:off x="4450080" y="1850683"/>
-            <a:ext cx="3291840" cy="18288"/>
-          </a:xfrm>
-          <a:custGeom>
-            <a:avLst/>
-            <a:gdLst>
-              <a:gd name="csX0" fmla="*/ 0 w 3291840"/>
-              <a:gd name="csY0" fmla="*/ 0 h 18288"/>
-              <a:gd name="csX1" fmla="*/ 658368 w 3291840"/>
-              <a:gd name="csY1" fmla="*/ 0 h 18288"/>
-              <a:gd name="csX2" fmla="*/ 1283818 w 3291840"/>
-              <a:gd name="csY2" fmla="*/ 0 h 18288"/>
-              <a:gd name="csX3" fmla="*/ 1909267 w 3291840"/>
-              <a:gd name="csY3" fmla="*/ 0 h 18288"/>
-              <a:gd name="csX4" fmla="*/ 2633472 w 3291840"/>
-              <a:gd name="csY4" fmla="*/ 0 h 18288"/>
-              <a:gd name="csX5" fmla="*/ 3291840 w 3291840"/>
-              <a:gd name="csY5" fmla="*/ 0 h 18288"/>
-              <a:gd name="csX6" fmla="*/ 3291840 w 3291840"/>
-              <a:gd name="csY6" fmla="*/ 18288 h 18288"/>
-              <a:gd name="csX7" fmla="*/ 2633472 w 3291840"/>
-              <a:gd name="csY7" fmla="*/ 18288 h 18288"/>
-              <a:gd name="csX8" fmla="*/ 2073859 w 3291840"/>
-              <a:gd name="csY8" fmla="*/ 18288 h 18288"/>
-              <a:gd name="csX9" fmla="*/ 1448410 w 3291840"/>
-              <a:gd name="csY9" fmla="*/ 18288 h 18288"/>
-              <a:gd name="csX10" fmla="*/ 822960 w 3291840"/>
-              <a:gd name="csY10" fmla="*/ 18288 h 18288"/>
-              <a:gd name="csX11" fmla="*/ 0 w 3291840"/>
-              <a:gd name="csY11" fmla="*/ 18288 h 18288"/>
-              <a:gd name="csX12" fmla="*/ 0 w 3291840"/>
-              <a:gd name="csY12" fmla="*/ 0 h 18288"/>
-            </a:gdLst>
-            <a:ahLst/>
-            <a:cxnLst>
-              <a:cxn ang="0">
-                <a:pos x="csX0" y="csY0"/>
-              </a:cxn>
-              <a:cxn ang="0">
-                <a:pos x="csX1" y="csY1"/>
-              </a:cxn>
-              <a:cxn ang="0">
-                <a:pos x="csX2" y="csY2"/>
-              </a:cxn>
-              <a:cxn ang="0">
-                <a:pos x="csX3" y="csY3"/>
-              </a:cxn>
-              <a:cxn ang="0">
-                <a:pos x="csX4" y="csY4"/>
-              </a:cxn>
-              <a:cxn ang="0">
-                <a:pos x="csX5" y="csY5"/>
-              </a:cxn>
-              <a:cxn ang="0">
-                <a:pos x="csX6" y="csY6"/>
-              </a:cxn>
-              <a:cxn ang="0">
-                <a:pos x="csX7" y="csY7"/>
-              </a:cxn>
-              <a:cxn ang="0">
-                <a:pos x="csX8" y="csY8"/>
-              </a:cxn>
-              <a:cxn ang="0">
-                <a:pos x="csX9" y="csY9"/>
-              </a:cxn>
-              <a:cxn ang="0">
-                <a:pos x="csX10" y="csY10"/>
-              </a:cxn>
-              <a:cxn ang="0">
-                <a:pos x="csX11" y="csY11"/>
-              </a:cxn>
-              <a:cxn ang="0">
-                <a:pos x="csX12" y="csY12"/>
-              </a:cxn>
-            </a:cxnLst>
-            <a:rect l="l" t="t" r="r" b="b"/>
-            <a:pathLst>
-              <a:path w="3291840" h="18288" fill="none" extrusionOk="0">
-                <a:moveTo>
-                  <a:pt x="0" y="0"/>
-                </a:moveTo>
-                <a:cubicBezTo>
-                  <a:pt x="173077" y="-20031"/>
-                  <a:pt x="443104" y="6424"/>
-                  <a:pt x="658368" y="0"/>
-                </a:cubicBezTo>
-                <a:cubicBezTo>
-                  <a:pt x="873632" y="-6424"/>
-                  <a:pt x="1034028" y="11764"/>
-                  <a:pt x="1283818" y="0"/>
-                </a:cubicBezTo>
-                <a:cubicBezTo>
-                  <a:pt x="1533608" y="-11764"/>
-                  <a:pt x="1691227" y="-30112"/>
-                  <a:pt x="1909267" y="0"/>
-                </a:cubicBezTo>
-                <a:cubicBezTo>
-                  <a:pt x="2127307" y="30112"/>
-                  <a:pt x="2272465" y="-18735"/>
-                  <a:pt x="2633472" y="0"/>
-                </a:cubicBezTo>
-                <a:cubicBezTo>
-                  <a:pt x="2994479" y="18735"/>
-                  <a:pt x="3023324" y="-32030"/>
-                  <a:pt x="3291840" y="0"/>
-                </a:cubicBezTo>
-                <a:cubicBezTo>
-                  <a:pt x="3291406" y="7551"/>
-                  <a:pt x="3291373" y="9822"/>
-                  <a:pt x="3291840" y="18288"/>
-                </a:cubicBezTo>
-                <a:cubicBezTo>
-                  <a:pt x="3048445" y="38989"/>
-                  <a:pt x="2846548" y="-14400"/>
-                  <a:pt x="2633472" y="18288"/>
-                </a:cubicBezTo>
-                <a:cubicBezTo>
-                  <a:pt x="2420396" y="50976"/>
-                  <a:pt x="2304099" y="6336"/>
-                  <a:pt x="2073859" y="18288"/>
-                </a:cubicBezTo>
-                <a:cubicBezTo>
-                  <a:pt x="1843619" y="30240"/>
-                  <a:pt x="1706926" y="10778"/>
-                  <a:pt x="1448410" y="18288"/>
-                </a:cubicBezTo>
-                <a:cubicBezTo>
-                  <a:pt x="1189894" y="25798"/>
-                  <a:pt x="1002278" y="8992"/>
-                  <a:pt x="822960" y="18288"/>
-                </a:cubicBezTo>
-                <a:cubicBezTo>
-                  <a:pt x="643642" y="27585"/>
-                  <a:pt x="307039" y="38051"/>
-                  <a:pt x="0" y="18288"/>
-                </a:cubicBezTo>
-                <a:cubicBezTo>
-                  <a:pt x="60" y="11696"/>
-                  <a:pt x="66" y="3758"/>
-                  <a:pt x="0" y="0"/>
-                </a:cubicBezTo>
-                <a:close/>
-              </a:path>
-              <a:path w="3291840" h="18288" stroke="0" extrusionOk="0">
-                <a:moveTo>
-                  <a:pt x="0" y="0"/>
-                </a:moveTo>
-                <a:cubicBezTo>
-                  <a:pt x="195850" y="28018"/>
-                  <a:pt x="434891" y="17390"/>
-                  <a:pt x="592531" y="0"/>
-                </a:cubicBezTo>
-                <a:cubicBezTo>
-                  <a:pt x="750171" y="-17390"/>
-                  <a:pt x="1018709" y="32200"/>
-                  <a:pt x="1316736" y="0"/>
-                </a:cubicBezTo>
-                <a:cubicBezTo>
-                  <a:pt x="1614763" y="-32200"/>
-                  <a:pt x="1696480" y="-11367"/>
-                  <a:pt x="1876349" y="0"/>
-                </a:cubicBezTo>
-                <a:cubicBezTo>
-                  <a:pt x="2056218" y="11367"/>
-                  <a:pt x="2193364" y="13433"/>
-                  <a:pt x="2435962" y="0"/>
-                </a:cubicBezTo>
-                <a:cubicBezTo>
-                  <a:pt x="2678560" y="-13433"/>
-                  <a:pt x="3010901" y="-42367"/>
-                  <a:pt x="3291840" y="0"/>
-                </a:cubicBezTo>
-                <a:cubicBezTo>
-                  <a:pt x="3291758" y="4406"/>
-                  <a:pt x="3291751" y="9982"/>
-                  <a:pt x="3291840" y="18288"/>
-                </a:cubicBezTo>
-                <a:cubicBezTo>
-                  <a:pt x="3108993" y="14228"/>
-                  <a:pt x="2952658" y="46900"/>
-                  <a:pt x="2666390" y="18288"/>
-                </a:cubicBezTo>
-                <a:cubicBezTo>
-                  <a:pt x="2380122" y="-10324"/>
-                  <a:pt x="2263855" y="41055"/>
-                  <a:pt x="2040941" y="18288"/>
-                </a:cubicBezTo>
-                <a:cubicBezTo>
-                  <a:pt x="1818027" y="-4479"/>
-                  <a:pt x="1675097" y="6509"/>
-                  <a:pt x="1415491" y="18288"/>
-                </a:cubicBezTo>
-                <a:cubicBezTo>
-                  <a:pt x="1155885" y="30068"/>
-                  <a:pt x="852976" y="36210"/>
-                  <a:pt x="691286" y="18288"/>
-                </a:cubicBezTo>
-                <a:cubicBezTo>
-                  <a:pt x="529596" y="366"/>
-                  <a:pt x="187183" y="13912"/>
-                  <a:pt x="0" y="18288"/>
-                </a:cubicBezTo>
-                <a:cubicBezTo>
-                  <a:pt x="189" y="14288"/>
-                  <a:pt x="-703" y="3747"/>
-                  <a:pt x="0" y="0"/>
-                </a:cubicBezTo>
-                <a:close/>
-              </a:path>
-            </a:pathLst>
-          </a:custGeom>
-          <a:solidFill>
-            <a:schemeClr val="accent2"/>
-          </a:solidFill>
-          <a:ln w="41275" cap="rnd">
-            <a:solidFill>
-              <a:schemeClr val="accent2"/>
-            </a:solidFill>
-            <a:round/>
-            <a:extLst>
-              <a:ext uri="{C807C97D-BFC1-408E-A445-0C87EB9F89A2}">
-                <ask:lineSketchStyleProps xmlns:ask="http://schemas.microsoft.com/office/drawing/2018/sketchyshapes" sd="2863741219">
-                  <a:prstGeom prst="rect">
-                    <a:avLst/>
-                  </a:prstGeom>
-                  <ask:type>
-                    <ask:lineSketchFreehand/>
-                  </ask:type>
-                </ask:lineSketchStyleProps>
-              </a:ext>
-            </a:extLst>
-          </a:ln>
-        </p:spPr>
-        <p:style>
-          <a:lnRef idx="2">
-            <a:schemeClr val="accent1">
-              <a:shade val="50000"/>
-            </a:schemeClr>
-          </a:lnRef>
-          <a:fillRef idx="1">
-            <a:schemeClr val="accent1"/>
-          </a:fillRef>
-          <a:effectRef idx="0">
-            <a:schemeClr val="accent1"/>
-          </a:effectRef>
-          <a:fontRef idx="minor">
-            <a:schemeClr val="lt1"/>
-          </a:fontRef>
-        </p:style>
-        <p:txBody>
-          <a:bodyPr rtlCol="0" anchor="ctr"/>
-          <a:lstStyle/>
-          <a:p>
-            <a:pPr algn="ctr"/>
-            <a:endParaRPr lang="en-US"/>
-          </a:p>
-        </p:txBody>
-      </p:sp>
-      <p:pic>
-        <p:nvPicPr>
-          <p:cNvPr id="5" name="Content Placeholder 4">
-            <a:extLst>
-              <a:ext uri="{FF2B5EF4-FFF2-40B4-BE49-F238E27FC236}">
-                <a16:creationId xmlns:a16="http://schemas.microsoft.com/office/drawing/2014/main" id="{35A770E0-A069-5FC4-7A9E-EF4C1DEEE5D3}"/>
-              </a:ext>
-            </a:extLst>
-          </p:cNvPr>
-          <p:cNvPicPr>
-            <a:picLocks noGrp="1" noChangeAspect="1"/>
-          </p:cNvPicPr>
-          <p:nvPr>
-            <p:ph idx="1"/>
-          </p:nvPr>
-        </p:nvPicPr>
-        <p:blipFill>
-          <a:blip r:embed="rId2"/>
-          <a:stretch>
-            <a:fillRect/>
-          </a:stretch>
-        </p:blipFill>
-        <p:spPr>
-          <a:xfrm>
-            <a:off x="236947" y="2546430"/>
-            <a:ext cx="3610880" cy="3249793"/>
-          </a:xfrm>
-          <a:prstGeom prst="rect">
-            <a:avLst/>
-          </a:prstGeom>
-        </p:spPr>
-      </p:pic>
-      <p:pic>
-        <p:nvPicPr>
-          <p:cNvPr id="7" name="Picture 6">
-            <a:extLst>
-              <a:ext uri="{FF2B5EF4-FFF2-40B4-BE49-F238E27FC236}">
-                <a16:creationId xmlns:a16="http://schemas.microsoft.com/office/drawing/2014/main" id="{82DB1401-39CB-D1B9-45FE-E7A3827DF684}"/>
-              </a:ext>
-            </a:extLst>
-          </p:cNvPr>
-          <p:cNvPicPr>
-            <a:picLocks noChangeAspect="1"/>
-          </p:cNvPicPr>
-          <p:nvPr/>
-        </p:nvPicPr>
-        <p:blipFill>
-          <a:blip r:embed="rId3"/>
-          <a:stretch>
-            <a:fillRect/>
-          </a:stretch>
-        </p:blipFill>
-        <p:spPr>
-          <a:xfrm>
-            <a:off x="4218077" y="2674446"/>
-            <a:ext cx="7881947" cy="2817795"/>
-          </a:xfrm>
-          <a:prstGeom prst="rect">
-            <a:avLst/>
-          </a:prstGeom>
-        </p:spPr>
-      </p:pic>
-    </p:spTree>
-    <p:extLst>
-      <p:ext uri="{BB962C8B-B14F-4D97-AF65-F5344CB8AC3E}">
-        <p14:creationId xmlns:p14="http://schemas.microsoft.com/office/powerpoint/2010/main" val="423554484"/>
       </p:ext>
     </p:extLst>
   </p:cSld>
@@ -8417,12 +8784,14 @@
 </file>
 
 <file path=customXml/item1.xml><?xml version="1.0" encoding="utf-8"?>
-<?mso-contentType ?>
-<FormTemplates xmlns="http://schemas.microsoft.com/sharepoint/v3/contenttype/forms">
-  <Display>DocumentLibraryForm</Display>
-  <Edit>DocumentLibraryForm</Edit>
-  <New>DocumentLibraryForm</New>
-</FormTemplates>
+<p:properties xmlns:p="http://schemas.microsoft.com/office/2006/metadata/properties" xmlns:xsi="http://www.w3.org/2001/XMLSchema-instance" xmlns:pc="http://schemas.microsoft.com/office/infopath/2007/PartnerControls">
+  <documentManagement>
+    <TaxCatchAll xmlns="440f622b-d608-4c0a-8042-7ba907e25cbd" xsi:nil="true"/>
+    <lcf76f155ced4ddcb4097134ff3c332f xmlns="25c2ebd5-bc2d-4e39-894a-d1d0e7647b08">
+      <Terms xmlns="http://schemas.microsoft.com/office/infopath/2007/PartnerControls"/>
+    </lcf76f155ced4ddcb4097134ff3c332f>
+  </documentManagement>
+</p:properties>
 </file>
 
 <file path=customXml/item2.xml><?xml version="1.0" encoding="utf-8"?>
@@ -8681,20 +9050,29 @@
 </file>
 
 <file path=customXml/item3.xml><?xml version="1.0" encoding="utf-8"?>
-<p:properties xmlns:p="http://schemas.microsoft.com/office/2006/metadata/properties" xmlns:xsi="http://www.w3.org/2001/XMLSchema-instance" xmlns:pc="http://schemas.microsoft.com/office/infopath/2007/PartnerControls">
-  <documentManagement>
-    <TaxCatchAll xmlns="440f622b-d608-4c0a-8042-7ba907e25cbd" xsi:nil="true"/>
-    <lcf76f155ced4ddcb4097134ff3c332f xmlns="25c2ebd5-bc2d-4e39-894a-d1d0e7647b08">
-      <Terms xmlns="http://schemas.microsoft.com/office/infopath/2007/PartnerControls"/>
-    </lcf76f155ced4ddcb4097134ff3c332f>
-  </documentManagement>
-</p:properties>
+<?mso-contentType ?>
+<FormTemplates xmlns="http://schemas.microsoft.com/sharepoint/v3/contenttype/forms">
+  <Display>DocumentLibraryForm</Display>
+  <Edit>DocumentLibraryForm</Edit>
+  <New>DocumentLibraryForm</New>
+</FormTemplates>
 </file>
 
 <file path=customXml/itemProps1.xml><?xml version="1.0" encoding="utf-8"?>
-<ds:datastoreItem xmlns:ds="http://schemas.openxmlformats.org/officeDocument/2006/customXml" ds:itemID="{0CD6E676-D598-495D-8B4A-25C23EB2B412}">
+<ds:datastoreItem xmlns:ds="http://schemas.openxmlformats.org/officeDocument/2006/customXml" ds:itemID="{27AE09F3-13AE-469D-AD12-8390E4B01D46}">
   <ds:schemaRefs>
-    <ds:schemaRef ds:uri="http://schemas.microsoft.com/sharepoint/v3/contenttype/forms"/>
+    <ds:schemaRef ds:uri="36b2058d-813f-461a-9726-1c951a8d02e0"/>
+    <ds:schemaRef ds:uri="785b6205-926b-4996-b7dc-1cee80bdb135"/>
+    <ds:schemaRef ds:uri="http://purl.org/dc/dcmitype/"/>
+    <ds:schemaRef ds:uri="http://purl.org/dc/elements/1.1/"/>
+    <ds:schemaRef ds:uri="http://purl.org/dc/terms/"/>
+    <ds:schemaRef ds:uri="http://schemas.microsoft.com/office/2006/documentManagement/types"/>
+    <ds:schemaRef ds:uri="http://schemas.microsoft.com/office/2006/metadata/properties"/>
+    <ds:schemaRef ds:uri="http://schemas.microsoft.com/office/infopath/2007/PartnerControls"/>
+    <ds:schemaRef ds:uri="http://schemas.openxmlformats.org/package/2006/metadata/core-properties"/>
+    <ds:schemaRef ds:uri="http://www.w3.org/XML/1998/namespace"/>
+    <ds:schemaRef ds:uri="440f622b-d608-4c0a-8042-7ba907e25cbd"/>
+    <ds:schemaRef ds:uri="25c2ebd5-bc2d-4e39-894a-d1d0e7647b08"/>
   </ds:schemaRefs>
 </ds:datastoreItem>
 </file>
@@ -8719,20 +9097,9 @@
 </file>
 
 <file path=customXml/itemProps3.xml><?xml version="1.0" encoding="utf-8"?>
-<ds:datastoreItem xmlns:ds="http://schemas.openxmlformats.org/officeDocument/2006/customXml" ds:itemID="{27AE09F3-13AE-469D-AD12-8390E4B01D46}">
+<ds:datastoreItem xmlns:ds="http://schemas.openxmlformats.org/officeDocument/2006/customXml" ds:itemID="{0CD6E676-D598-495D-8B4A-25C23EB2B412}">
   <ds:schemaRefs>
-    <ds:schemaRef ds:uri="36b2058d-813f-461a-9726-1c951a8d02e0"/>
-    <ds:schemaRef ds:uri="785b6205-926b-4996-b7dc-1cee80bdb135"/>
-    <ds:schemaRef ds:uri="http://purl.org/dc/dcmitype/"/>
-    <ds:schemaRef ds:uri="http://purl.org/dc/elements/1.1/"/>
-    <ds:schemaRef ds:uri="http://purl.org/dc/terms/"/>
-    <ds:schemaRef ds:uri="http://schemas.microsoft.com/office/2006/documentManagement/types"/>
-    <ds:schemaRef ds:uri="http://schemas.microsoft.com/office/2006/metadata/properties"/>
-    <ds:schemaRef ds:uri="http://schemas.microsoft.com/office/infopath/2007/PartnerControls"/>
-    <ds:schemaRef ds:uri="http://schemas.openxmlformats.org/package/2006/metadata/core-properties"/>
-    <ds:schemaRef ds:uri="http://www.w3.org/XML/1998/namespace"/>
-    <ds:schemaRef ds:uri="440f622b-d608-4c0a-8042-7ba907e25cbd"/>
-    <ds:schemaRef ds:uri="25c2ebd5-bc2d-4e39-894a-d1d0e7647b08"/>
+    <ds:schemaRef ds:uri="http://schemas.microsoft.com/sharepoint/v3/contenttype/forms"/>
   </ds:schemaRefs>
 </ds:datastoreItem>
 </file>
